--- a/Week-04/PPT-Slides/AI-ML-Evalution-Functions.pptx
+++ b/Week-04/PPT-Slides/AI-ML-Evalution-Functions.pptx
@@ -9,8 +9,8 @@
   </p:notesMasterIdLst>
   <p:sldIdLst>
     <p:sldId id="256" r:id="rId2"/>
-    <p:sldId id="436" r:id="rId3"/>
-    <p:sldId id="444" r:id="rId4"/>
+    <p:sldId id="444" r:id="rId3"/>
+    <p:sldId id="436" r:id="rId4"/>
     <p:sldId id="437" r:id="rId5"/>
     <p:sldId id="442" r:id="rId6"/>
     <p:sldId id="443" r:id="rId7"/>
@@ -1034,6 +1034,11 @@
         </p:txBody>
       </p:sp>
     </p:spTree>
+    <p:extLst>
+      <p:ext uri="{BB962C8B-B14F-4D97-AF65-F5344CB8AC3E}">
+        <p14:creationId xmlns:p14="http://schemas.microsoft.com/office/powerpoint/2010/main" val="1655514"/>
+      </p:ext>
+    </p:extLst>
   </p:cSld>
   <p:clrMapOvr>
     <a:masterClrMapping/>
@@ -1138,11 +1143,6 @@
         </p:txBody>
       </p:sp>
     </p:spTree>
-    <p:extLst>
-      <p:ext uri="{BB962C8B-B14F-4D97-AF65-F5344CB8AC3E}">
-        <p14:creationId xmlns:p14="http://schemas.microsoft.com/office/powerpoint/2010/main" val="1655514"/>
-      </p:ext>
-    </p:extLst>
   </p:cSld>
   <p:clrMapOvr>
     <a:masterClrMapping/>
@@ -9654,68 +9654,53 @@
               <a:buNone/>
             </a:pPr>
             <a:r>
-              <a:rPr lang="en-US" b="1" dirty="0">
+              <a:rPr lang="en-US" sz="2000" b="1" dirty="0" smtClean="0">
                 <a:solidFill>
                   <a:schemeClr val="tx1"/>
                 </a:solidFill>
               </a:rPr>
-              <a:t>When to Use Accuracy</a:t>
+              <a:t>Accuracy: </a:t>
             </a:r>
-            <a:endParaRPr lang="en-US" dirty="0">
+            <a:r>
+              <a:rPr lang="en-US" sz="2000" dirty="0" smtClean="0">
+                <a:solidFill>
+                  <a:schemeClr val="tx1"/>
+                </a:solidFill>
+              </a:rPr>
+              <a:t>Accuracy </a:t>
+            </a:r>
+            <a:r>
+              <a:rPr lang="en-US" sz="2000" dirty="0">
+                <a:solidFill>
+                  <a:schemeClr val="tx1"/>
+                </a:solidFill>
+              </a:rPr>
+              <a:t>is the ratio of correctly predicted instances to the total instances. It is a simple metric but can be misleading in imbalanced </a:t>
+            </a:r>
+            <a:r>
+              <a:rPr lang="en-US" sz="2000" dirty="0" smtClean="0">
+                <a:solidFill>
+                  <a:schemeClr val="tx1"/>
+                </a:solidFill>
+              </a:rPr>
+              <a:t>datasets.</a:t>
+            </a:r>
+          </a:p>
+          <a:p>
+            <a:pPr marL="114300" indent="0">
+              <a:buNone/>
+            </a:pPr>
+            <a:endParaRPr lang="en-US" sz="2000" dirty="0" smtClean="0">
               <a:solidFill>
                 <a:schemeClr val="tx1"/>
               </a:solidFill>
             </a:endParaRPr>
           </a:p>
           <a:p>
-            <a:r>
-              <a:rPr lang="en-US" b="1" dirty="0">
-                <a:solidFill>
-                  <a:schemeClr val="tx1"/>
-                </a:solidFill>
-              </a:rPr>
-              <a:t>Balanced datasets</a:t>
-            </a:r>
-            <a:r>
-              <a:rPr lang="en-US" dirty="0">
-                <a:solidFill>
-                  <a:schemeClr val="tx1"/>
-                </a:solidFill>
-              </a:rPr>
-              <a:t>: When classes are roughly equal in size.</a:t>
-            </a:r>
-          </a:p>
-          <a:p>
-            <a:r>
-              <a:rPr lang="en-US" b="1" dirty="0">
-                <a:solidFill>
-                  <a:schemeClr val="tx1"/>
-                </a:solidFill>
-              </a:rPr>
-              <a:t>Simple benchmarks</a:t>
-            </a:r>
-            <a:r>
-              <a:rPr lang="en-US" dirty="0">
-                <a:solidFill>
-                  <a:schemeClr val="tx1"/>
-                </a:solidFill>
-              </a:rPr>
-              <a:t>: Quick evaluation of model performance</a:t>
-            </a:r>
-            <a:r>
-              <a:rPr lang="en-US" dirty="0" smtClean="0">
-                <a:solidFill>
-                  <a:schemeClr val="tx1"/>
-                </a:solidFill>
-              </a:rPr>
-              <a:t>.</a:t>
-            </a:r>
-          </a:p>
-          <a:p>
             <a:pPr marL="114300" indent="0">
               <a:buNone/>
             </a:pPr>
-            <a:endParaRPr lang="en-US" dirty="0">
+            <a:endParaRPr lang="en-US" sz="2000" dirty="0">
               <a:solidFill>
                 <a:schemeClr val="tx1"/>
               </a:solidFill>
@@ -9725,62 +9710,38 @@
             <a:pPr marL="114300" indent="0">
               <a:buNone/>
             </a:pPr>
-            <a:r>
-              <a:rPr lang="en-US" b="1" dirty="0">
-                <a:solidFill>
-                  <a:schemeClr val="tx1"/>
-                </a:solidFill>
-              </a:rPr>
-              <a:t>When to Avoid Accuracy</a:t>
-            </a:r>
-            <a:endParaRPr lang="en-US" dirty="0">
-              <a:solidFill>
-                <a:schemeClr val="tx1"/>
-              </a:solidFill>
-            </a:endParaRPr>
-          </a:p>
-          <a:p>
-            <a:r>
-              <a:rPr lang="en-US" b="1" dirty="0">
-                <a:solidFill>
-                  <a:schemeClr val="tx1"/>
-                </a:solidFill>
-              </a:rPr>
-              <a:t>Imbalanced datasets</a:t>
-            </a:r>
-            <a:r>
-              <a:rPr lang="en-US" dirty="0">
-                <a:solidFill>
-                  <a:schemeClr val="tx1"/>
-                </a:solidFill>
-              </a:rPr>
-              <a:t>: For example, if 95% of examples are negative, a model that always predicts negative will have 95% accuracy but is useless.</a:t>
-            </a:r>
-          </a:p>
-          <a:p>
-            <a:r>
-              <a:rPr lang="en-US" b="1" dirty="0">
-                <a:solidFill>
-                  <a:schemeClr val="tx1"/>
-                </a:solidFill>
-              </a:rPr>
-              <a:t>Cost-sensitive scenarios</a:t>
-            </a:r>
-            <a:r>
-              <a:rPr lang="en-US" dirty="0">
-                <a:solidFill>
-                  <a:schemeClr val="tx1"/>
-                </a:solidFill>
-              </a:rPr>
-              <a:t>: When false positives and false negatives have different consequences (e.g., medical testing).</a:t>
-            </a:r>
+            <a:endParaRPr lang="en-US" sz="2000" dirty="0"/>
           </a:p>
         </p:txBody>
       </p:sp>
+      <p:pic>
+        <p:nvPicPr>
+          <p:cNvPr id="2" name="Picture 1"/>
+          <p:cNvPicPr>
+            <a:picLocks noChangeAspect="1"/>
+          </p:cNvPicPr>
+          <p:nvPr/>
+        </p:nvPicPr>
+        <p:blipFill>
+          <a:blip r:embed="rId3"/>
+          <a:stretch>
+            <a:fillRect/>
+          </a:stretch>
+        </p:blipFill>
+        <p:spPr>
+          <a:xfrm>
+            <a:off x="1323975" y="1813301"/>
+            <a:ext cx="6496050" cy="2362200"/>
+          </a:xfrm>
+          <a:prstGeom prst="rect">
+            <a:avLst/>
+          </a:prstGeom>
+        </p:spPr>
+      </p:pic>
     </p:spTree>
     <p:extLst>
       <p:ext uri="{BB962C8B-B14F-4D97-AF65-F5344CB8AC3E}">
-        <p14:creationId xmlns:p14="http://schemas.microsoft.com/office/powerpoint/2010/main" val="730423470"/>
+        <p14:creationId xmlns:p14="http://schemas.microsoft.com/office/powerpoint/2010/main" val="3162328535"/>
       </p:ext>
     </p:extLst>
   </p:cSld>
@@ -9880,53 +9841,68 @@
               <a:buNone/>
             </a:pPr>
             <a:r>
-              <a:rPr lang="en-US" sz="2000" b="1" dirty="0" smtClean="0">
+              <a:rPr lang="en-US" b="1" dirty="0">
                 <a:solidFill>
                   <a:schemeClr val="tx1"/>
                 </a:solidFill>
               </a:rPr>
-              <a:t>Accuracy: </a:t>
+              <a:t>When to Use Accuracy</a:t>
             </a:r>
-            <a:r>
-              <a:rPr lang="en-US" sz="2000" dirty="0" smtClean="0">
-                <a:solidFill>
-                  <a:schemeClr val="tx1"/>
-                </a:solidFill>
-              </a:rPr>
-              <a:t>Accuracy </a:t>
-            </a:r>
-            <a:r>
-              <a:rPr lang="en-US" sz="2000" dirty="0">
-                <a:solidFill>
-                  <a:schemeClr val="tx1"/>
-                </a:solidFill>
-              </a:rPr>
-              <a:t>is the ratio of correctly predicted instances to the total instances. It is a simple metric but can be misleading in imbalanced </a:t>
-            </a:r>
-            <a:r>
-              <a:rPr lang="en-US" sz="2000" dirty="0" smtClean="0">
-                <a:solidFill>
-                  <a:schemeClr val="tx1"/>
-                </a:solidFill>
-              </a:rPr>
-              <a:t>datasets.</a:t>
-            </a:r>
-          </a:p>
-          <a:p>
-            <a:pPr marL="114300" indent="0">
-              <a:buNone/>
-            </a:pPr>
-            <a:endParaRPr lang="en-US" sz="2000" dirty="0" smtClean="0">
+            <a:endParaRPr lang="en-US" dirty="0">
               <a:solidFill>
                 <a:schemeClr val="tx1"/>
               </a:solidFill>
             </a:endParaRPr>
           </a:p>
           <a:p>
+            <a:r>
+              <a:rPr lang="en-US" b="1" dirty="0">
+                <a:solidFill>
+                  <a:schemeClr val="tx1"/>
+                </a:solidFill>
+              </a:rPr>
+              <a:t>Balanced datasets</a:t>
+            </a:r>
+            <a:r>
+              <a:rPr lang="en-US" dirty="0">
+                <a:solidFill>
+                  <a:schemeClr val="tx1"/>
+                </a:solidFill>
+              </a:rPr>
+              <a:t>: When classes are roughly equal in size.</a:t>
+            </a:r>
+          </a:p>
+          <a:p>
+            <a:r>
+              <a:rPr lang="en-US" b="1" dirty="0">
+                <a:solidFill>
+                  <a:schemeClr val="tx1"/>
+                </a:solidFill>
+              </a:rPr>
+              <a:t>Simple benchmarks</a:t>
+            </a:r>
+            <a:r>
+              <a:rPr lang="en-US" dirty="0">
+                <a:solidFill>
+                  <a:schemeClr val="tx1"/>
+                </a:solidFill>
+              </a:rPr>
+              <a:t>: Quick evaluation of model performance</a:t>
+            </a:r>
+            <a:r>
+              <a:rPr lang="en-US" dirty="0" smtClean="0">
+                <a:solidFill>
+                  <a:schemeClr val="tx1"/>
+                </a:solidFill>
+              </a:rPr>
+              <a:t>.</a:t>
+            </a:r>
+          </a:p>
+          <a:p>
             <a:pPr marL="114300" indent="0">
               <a:buNone/>
             </a:pPr>
-            <a:endParaRPr lang="en-US" sz="2000" dirty="0">
+            <a:endParaRPr lang="en-US" dirty="0">
               <a:solidFill>
                 <a:schemeClr val="tx1"/>
               </a:solidFill>
@@ -9936,38 +9912,62 @@
             <a:pPr marL="114300" indent="0">
               <a:buNone/>
             </a:pPr>
-            <a:endParaRPr lang="en-US" sz="2000" dirty="0"/>
+            <a:r>
+              <a:rPr lang="en-US" b="1" dirty="0">
+                <a:solidFill>
+                  <a:schemeClr val="tx1"/>
+                </a:solidFill>
+              </a:rPr>
+              <a:t>When to Avoid Accuracy</a:t>
+            </a:r>
+            <a:endParaRPr lang="en-US" dirty="0">
+              <a:solidFill>
+                <a:schemeClr val="tx1"/>
+              </a:solidFill>
+            </a:endParaRPr>
+          </a:p>
+          <a:p>
+            <a:r>
+              <a:rPr lang="en-US" b="1" dirty="0">
+                <a:solidFill>
+                  <a:schemeClr val="tx1"/>
+                </a:solidFill>
+              </a:rPr>
+              <a:t>Imbalanced datasets</a:t>
+            </a:r>
+            <a:r>
+              <a:rPr lang="en-US" dirty="0">
+                <a:solidFill>
+                  <a:schemeClr val="tx1"/>
+                </a:solidFill>
+              </a:rPr>
+              <a:t>: For example, if 95% of examples are negative, a model that always predicts negative will have 95% accuracy but is useless.</a:t>
+            </a:r>
+          </a:p>
+          <a:p>
+            <a:r>
+              <a:rPr lang="en-US" b="1" dirty="0">
+                <a:solidFill>
+                  <a:schemeClr val="tx1"/>
+                </a:solidFill>
+              </a:rPr>
+              <a:t>Cost-sensitive scenarios</a:t>
+            </a:r>
+            <a:r>
+              <a:rPr lang="en-US" dirty="0">
+                <a:solidFill>
+                  <a:schemeClr val="tx1"/>
+                </a:solidFill>
+              </a:rPr>
+              <a:t>: When false positives and false negatives have different consequences (e.g., medical testing).</a:t>
+            </a:r>
           </a:p>
         </p:txBody>
       </p:sp>
-      <p:pic>
-        <p:nvPicPr>
-          <p:cNvPr id="2" name="Picture 1"/>
-          <p:cNvPicPr>
-            <a:picLocks noChangeAspect="1"/>
-          </p:cNvPicPr>
-          <p:nvPr/>
-        </p:nvPicPr>
-        <p:blipFill>
-          <a:blip r:embed="rId3"/>
-          <a:stretch>
-            <a:fillRect/>
-          </a:stretch>
-        </p:blipFill>
-        <p:spPr>
-          <a:xfrm>
-            <a:off x="1323975" y="1813301"/>
-            <a:ext cx="6496050" cy="2362200"/>
-          </a:xfrm>
-          <a:prstGeom prst="rect">
-            <a:avLst/>
-          </a:prstGeom>
-        </p:spPr>
-      </p:pic>
     </p:spTree>
     <p:extLst>
       <p:ext uri="{BB962C8B-B14F-4D97-AF65-F5344CB8AC3E}">
-        <p14:creationId xmlns:p14="http://schemas.microsoft.com/office/powerpoint/2010/main" val="3162328535"/>
+        <p14:creationId xmlns:p14="http://schemas.microsoft.com/office/powerpoint/2010/main" val="730423470"/>
       </p:ext>
     </p:extLst>
   </p:cSld>
@@ -10401,15 +10401,7 @@
                   <a:schemeClr val="tx1"/>
                 </a:solidFill>
               </a:rPr>
-              <a:t>Recall</a:t>
-            </a:r>
-            <a:r>
-              <a:rPr lang="en-US" sz="2000" b="1" dirty="0" smtClean="0">
-                <a:solidFill>
-                  <a:schemeClr val="tx1"/>
-                </a:solidFill>
-              </a:rPr>
-              <a:t>:</a:t>
+              <a:t>Recall:</a:t>
             </a:r>
             <a:r>
               <a:rPr lang="en-US" sz="2000" dirty="0">

--- a/Week-04/PPT-Slides/AI-ML-Evalution-Functions.pptx
+++ b/Week-04/PPT-Slides/AI-ML-Evalution-Functions.pptx
@@ -5,34 +5,37 @@
     <p:sldMasterId id="2147483659" r:id="rId1"/>
   </p:sldMasterIdLst>
   <p:notesMasterIdLst>
-    <p:notesMasterId r:id="rId17"/>
+    <p:notesMasterId r:id="rId20"/>
   </p:notesMasterIdLst>
   <p:sldIdLst>
     <p:sldId id="256" r:id="rId2"/>
-    <p:sldId id="444" r:id="rId3"/>
-    <p:sldId id="436" r:id="rId4"/>
-    <p:sldId id="437" r:id="rId5"/>
-    <p:sldId id="442" r:id="rId6"/>
-    <p:sldId id="443" r:id="rId7"/>
-    <p:sldId id="438" r:id="rId8"/>
-    <p:sldId id="432" r:id="rId9"/>
-    <p:sldId id="431" r:id="rId10"/>
-    <p:sldId id="408" r:id="rId11"/>
-    <p:sldId id="433" r:id="rId12"/>
-    <p:sldId id="434" r:id="rId13"/>
-    <p:sldId id="435" r:id="rId14"/>
-    <p:sldId id="409" r:id="rId15"/>
-    <p:sldId id="439" r:id="rId16"/>
+    <p:sldId id="445" r:id="rId3"/>
+    <p:sldId id="447" r:id="rId4"/>
+    <p:sldId id="446" r:id="rId5"/>
+    <p:sldId id="444" r:id="rId6"/>
+    <p:sldId id="436" r:id="rId7"/>
+    <p:sldId id="437" r:id="rId8"/>
+    <p:sldId id="442" r:id="rId9"/>
+    <p:sldId id="443" r:id="rId10"/>
+    <p:sldId id="438" r:id="rId11"/>
+    <p:sldId id="432" r:id="rId12"/>
+    <p:sldId id="431" r:id="rId13"/>
+    <p:sldId id="408" r:id="rId14"/>
+    <p:sldId id="433" r:id="rId15"/>
+    <p:sldId id="434" r:id="rId16"/>
+    <p:sldId id="435" r:id="rId17"/>
+    <p:sldId id="409" r:id="rId18"/>
+    <p:sldId id="439" r:id="rId19"/>
   </p:sldIdLst>
   <p:sldSz cx="9144000" cy="5143500" type="screen16x9"/>
   <p:notesSz cx="6858000" cy="9144000"/>
   <p:embeddedFontLst>
     <p:embeddedFont>
       <p:font typeface="Roboto" panose="020B0604020202020204" charset="0"/>
-      <p:regular r:id="rId18"/>
-      <p:bold r:id="rId19"/>
-      <p:italic r:id="rId20"/>
-      <p:boldItalic r:id="rId21"/>
+      <p:regular r:id="rId21"/>
+      <p:bold r:id="rId22"/>
+      <p:italic r:id="rId23"/>
+      <p:boldItalic r:id="rId24"/>
     </p:embeddedFont>
   </p:embeddedFontLst>
   <p:defaultTextStyle>
@@ -937,6 +940,318 @@
 </p:notes>
 </file>
 
+<file path=ppt/notesSlides/notesSlide11.xml><?xml version="1.0" encoding="utf-8"?>
+<p:notes xmlns:a="http://schemas.openxmlformats.org/drawingml/2006/main" xmlns:r="http://schemas.openxmlformats.org/officeDocument/2006/relationships" xmlns:p="http://schemas.openxmlformats.org/presentationml/2006/main" showMasterSp="0" showMasterPhAnim="0">
+  <p:cSld>
+    <p:spTree>
+      <p:nvGrpSpPr>
+        <p:cNvPr id="1" name="Shape 99"/>
+        <p:cNvGrpSpPr/>
+        <p:nvPr/>
+      </p:nvGrpSpPr>
+      <p:grpSpPr>
+        <a:xfrm>
+          <a:off x="0" y="0"/>
+          <a:ext cx="0" cy="0"/>
+          <a:chOff x="0" y="0"/>
+          <a:chExt cx="0" cy="0"/>
+        </a:xfrm>
+      </p:grpSpPr>
+      <p:sp>
+        <p:nvSpPr>
+          <p:cNvPr id="100" name="Google Shape;100;g2ddc889944f_0_0:notes"/>
+          <p:cNvSpPr>
+            <a:spLocks noGrp="1" noRot="1" noChangeAspect="1"/>
+          </p:cNvSpPr>
+          <p:nvPr>
+            <p:ph type="sldImg" idx="2"/>
+          </p:nvPr>
+        </p:nvSpPr>
+        <p:spPr>
+          <a:xfrm>
+            <a:off x="381000" y="685800"/>
+            <a:ext cx="6096000" cy="3429000"/>
+          </a:xfrm>
+          <a:custGeom>
+            <a:avLst/>
+            <a:gdLst/>
+            <a:ahLst/>
+            <a:cxnLst/>
+            <a:rect l="l" t="t" r="r" b="b"/>
+            <a:pathLst>
+              <a:path w="120000" h="120000" extrusionOk="0">
+                <a:moveTo>
+                  <a:pt x="0" y="0"/>
+                </a:moveTo>
+                <a:lnTo>
+                  <a:pt x="120000" y="0"/>
+                </a:lnTo>
+                <a:lnTo>
+                  <a:pt x="120000" y="120000"/>
+                </a:lnTo>
+                <a:lnTo>
+                  <a:pt x="0" y="120000"/>
+                </a:lnTo>
+                <a:close/>
+              </a:path>
+            </a:pathLst>
+          </a:custGeom>
+        </p:spPr>
+      </p:sp>
+      <p:sp>
+        <p:nvSpPr>
+          <p:cNvPr id="101" name="Google Shape;101;g2ddc889944f_0_0:notes"/>
+          <p:cNvSpPr txBox="1">
+            <a:spLocks noGrp="1"/>
+          </p:cNvSpPr>
+          <p:nvPr>
+            <p:ph type="body" idx="1"/>
+          </p:nvPr>
+        </p:nvSpPr>
+        <p:spPr>
+          <a:xfrm>
+            <a:off x="685800" y="4343400"/>
+            <a:ext cx="5486400" cy="4114800"/>
+          </a:xfrm>
+          <a:prstGeom prst="rect">
+            <a:avLst/>
+          </a:prstGeom>
+        </p:spPr>
+        <p:txBody>
+          <a:bodyPr spcFirstLastPara="1" wrap="square" lIns="91425" tIns="91425" rIns="91425" bIns="91425" anchor="t" anchorCtr="0">
+            <a:noAutofit/>
+          </a:bodyPr>
+          <a:lstStyle/>
+          <a:p>
+            <a:pPr marL="0" lvl="0" indent="0" algn="l" rtl="0">
+              <a:spcBef>
+                <a:spcPts val="0"/>
+              </a:spcBef>
+              <a:spcAft>
+                <a:spcPts val="0"/>
+              </a:spcAft>
+              <a:buNone/>
+            </a:pPr>
+            <a:endParaRPr/>
+          </a:p>
+        </p:txBody>
+      </p:sp>
+    </p:spTree>
+  </p:cSld>
+  <p:clrMapOvr>
+    <a:masterClrMapping/>
+  </p:clrMapOvr>
+</p:notes>
+</file>
+
+<file path=ppt/notesSlides/notesSlide12.xml><?xml version="1.0" encoding="utf-8"?>
+<p:notes xmlns:a="http://schemas.openxmlformats.org/drawingml/2006/main" xmlns:r="http://schemas.openxmlformats.org/officeDocument/2006/relationships" xmlns:p="http://schemas.openxmlformats.org/presentationml/2006/main" showMasterSp="0" showMasterPhAnim="0">
+  <p:cSld>
+    <p:spTree>
+      <p:nvGrpSpPr>
+        <p:cNvPr id="1" name="Shape 99"/>
+        <p:cNvGrpSpPr/>
+        <p:nvPr/>
+      </p:nvGrpSpPr>
+      <p:grpSpPr>
+        <a:xfrm>
+          <a:off x="0" y="0"/>
+          <a:ext cx="0" cy="0"/>
+          <a:chOff x="0" y="0"/>
+          <a:chExt cx="0" cy="0"/>
+        </a:xfrm>
+      </p:grpSpPr>
+      <p:sp>
+        <p:nvSpPr>
+          <p:cNvPr id="100" name="Google Shape;100;g2ddc889944f_0_0:notes"/>
+          <p:cNvSpPr>
+            <a:spLocks noGrp="1" noRot="1" noChangeAspect="1"/>
+          </p:cNvSpPr>
+          <p:nvPr>
+            <p:ph type="sldImg" idx="2"/>
+          </p:nvPr>
+        </p:nvSpPr>
+        <p:spPr>
+          <a:xfrm>
+            <a:off x="381000" y="685800"/>
+            <a:ext cx="6096000" cy="3429000"/>
+          </a:xfrm>
+          <a:custGeom>
+            <a:avLst/>
+            <a:gdLst/>
+            <a:ahLst/>
+            <a:cxnLst/>
+            <a:rect l="l" t="t" r="r" b="b"/>
+            <a:pathLst>
+              <a:path w="120000" h="120000" extrusionOk="0">
+                <a:moveTo>
+                  <a:pt x="0" y="0"/>
+                </a:moveTo>
+                <a:lnTo>
+                  <a:pt x="120000" y="0"/>
+                </a:lnTo>
+                <a:lnTo>
+                  <a:pt x="120000" y="120000"/>
+                </a:lnTo>
+                <a:lnTo>
+                  <a:pt x="0" y="120000"/>
+                </a:lnTo>
+                <a:close/>
+              </a:path>
+            </a:pathLst>
+          </a:custGeom>
+        </p:spPr>
+      </p:sp>
+      <p:sp>
+        <p:nvSpPr>
+          <p:cNvPr id="101" name="Google Shape;101;g2ddc889944f_0_0:notes"/>
+          <p:cNvSpPr txBox="1">
+            <a:spLocks noGrp="1"/>
+          </p:cNvSpPr>
+          <p:nvPr>
+            <p:ph type="body" idx="1"/>
+          </p:nvPr>
+        </p:nvSpPr>
+        <p:spPr>
+          <a:xfrm>
+            <a:off x="685800" y="4343400"/>
+            <a:ext cx="5486400" cy="4114800"/>
+          </a:xfrm>
+          <a:prstGeom prst="rect">
+            <a:avLst/>
+          </a:prstGeom>
+        </p:spPr>
+        <p:txBody>
+          <a:bodyPr spcFirstLastPara="1" wrap="square" lIns="91425" tIns="91425" rIns="91425" bIns="91425" anchor="t" anchorCtr="0">
+            <a:noAutofit/>
+          </a:bodyPr>
+          <a:lstStyle/>
+          <a:p>
+            <a:pPr marL="0" lvl="0" indent="0" algn="l" rtl="0">
+              <a:spcBef>
+                <a:spcPts val="0"/>
+              </a:spcBef>
+              <a:spcAft>
+                <a:spcPts val="0"/>
+              </a:spcAft>
+              <a:buNone/>
+            </a:pPr>
+            <a:endParaRPr/>
+          </a:p>
+        </p:txBody>
+      </p:sp>
+    </p:spTree>
+  </p:cSld>
+  <p:clrMapOvr>
+    <a:masterClrMapping/>
+  </p:clrMapOvr>
+</p:notes>
+</file>
+
+<file path=ppt/notesSlides/notesSlide13.xml><?xml version="1.0" encoding="utf-8"?>
+<p:notes xmlns:a="http://schemas.openxmlformats.org/drawingml/2006/main" xmlns:r="http://schemas.openxmlformats.org/officeDocument/2006/relationships" xmlns:p="http://schemas.openxmlformats.org/presentationml/2006/main" showMasterSp="0" showMasterPhAnim="0">
+  <p:cSld>
+    <p:spTree>
+      <p:nvGrpSpPr>
+        <p:cNvPr id="1" name="Shape 99"/>
+        <p:cNvGrpSpPr/>
+        <p:nvPr/>
+      </p:nvGrpSpPr>
+      <p:grpSpPr>
+        <a:xfrm>
+          <a:off x="0" y="0"/>
+          <a:ext cx="0" cy="0"/>
+          <a:chOff x="0" y="0"/>
+          <a:chExt cx="0" cy="0"/>
+        </a:xfrm>
+      </p:grpSpPr>
+      <p:sp>
+        <p:nvSpPr>
+          <p:cNvPr id="100" name="Google Shape;100;g2ddc889944f_0_0:notes"/>
+          <p:cNvSpPr>
+            <a:spLocks noGrp="1" noRot="1" noChangeAspect="1"/>
+          </p:cNvSpPr>
+          <p:nvPr>
+            <p:ph type="sldImg" idx="2"/>
+          </p:nvPr>
+        </p:nvSpPr>
+        <p:spPr>
+          <a:xfrm>
+            <a:off x="381000" y="685800"/>
+            <a:ext cx="6096000" cy="3429000"/>
+          </a:xfrm>
+          <a:custGeom>
+            <a:avLst/>
+            <a:gdLst/>
+            <a:ahLst/>
+            <a:cxnLst/>
+            <a:rect l="l" t="t" r="r" b="b"/>
+            <a:pathLst>
+              <a:path w="120000" h="120000" extrusionOk="0">
+                <a:moveTo>
+                  <a:pt x="0" y="0"/>
+                </a:moveTo>
+                <a:lnTo>
+                  <a:pt x="120000" y="0"/>
+                </a:lnTo>
+                <a:lnTo>
+                  <a:pt x="120000" y="120000"/>
+                </a:lnTo>
+                <a:lnTo>
+                  <a:pt x="0" y="120000"/>
+                </a:lnTo>
+                <a:close/>
+              </a:path>
+            </a:pathLst>
+          </a:custGeom>
+        </p:spPr>
+      </p:sp>
+      <p:sp>
+        <p:nvSpPr>
+          <p:cNvPr id="101" name="Google Shape;101;g2ddc889944f_0_0:notes"/>
+          <p:cNvSpPr txBox="1">
+            <a:spLocks noGrp="1"/>
+          </p:cNvSpPr>
+          <p:nvPr>
+            <p:ph type="body" idx="1"/>
+          </p:nvPr>
+        </p:nvSpPr>
+        <p:spPr>
+          <a:xfrm>
+            <a:off x="685800" y="4343400"/>
+            <a:ext cx="5486400" cy="4114800"/>
+          </a:xfrm>
+          <a:prstGeom prst="rect">
+            <a:avLst/>
+          </a:prstGeom>
+        </p:spPr>
+        <p:txBody>
+          <a:bodyPr spcFirstLastPara="1" wrap="square" lIns="91425" tIns="91425" rIns="91425" bIns="91425" anchor="t" anchorCtr="0">
+            <a:noAutofit/>
+          </a:bodyPr>
+          <a:lstStyle/>
+          <a:p>
+            <a:pPr marL="0" lvl="0" indent="0" algn="l" rtl="0">
+              <a:spcBef>
+                <a:spcPts val="0"/>
+              </a:spcBef>
+              <a:spcAft>
+                <a:spcPts val="0"/>
+              </a:spcAft>
+              <a:buNone/>
+            </a:pPr>
+            <a:endParaRPr/>
+          </a:p>
+        </p:txBody>
+      </p:sp>
+    </p:spTree>
+  </p:cSld>
+  <p:clrMapOvr>
+    <a:masterClrMapping/>
+  </p:clrMapOvr>
+</p:notes>
+</file>
+
 <file path=ppt/notesSlides/notesSlide2.xml><?xml version="1.0" encoding="utf-8"?>
 <p:notes xmlns:a="http://schemas.openxmlformats.org/drawingml/2006/main" xmlns:r="http://schemas.openxmlformats.org/officeDocument/2006/relationships" xmlns:p="http://schemas.openxmlformats.org/presentationml/2006/main" showMasterSp="0" showMasterPhAnim="0">
   <p:cSld>
@@ -1036,7 +1351,7 @@
     </p:spTree>
     <p:extLst>
       <p:ext uri="{BB962C8B-B14F-4D97-AF65-F5344CB8AC3E}">
-        <p14:creationId xmlns:p14="http://schemas.microsoft.com/office/powerpoint/2010/main" val="1655514"/>
+        <p14:creationId xmlns:p14="http://schemas.microsoft.com/office/powerpoint/2010/main" val="4027531698"/>
       </p:ext>
     </p:extLst>
   </p:cSld>
@@ -1143,6 +1458,11 @@
         </p:txBody>
       </p:sp>
     </p:spTree>
+    <p:extLst>
+      <p:ext uri="{BB962C8B-B14F-4D97-AF65-F5344CB8AC3E}">
+        <p14:creationId xmlns:p14="http://schemas.microsoft.com/office/powerpoint/2010/main" val="2074888294"/>
+      </p:ext>
+    </p:extLst>
   </p:cSld>
   <p:clrMapOvr>
     <a:masterClrMapping/>
@@ -1247,6 +1567,11 @@
         </p:txBody>
       </p:sp>
     </p:spTree>
+    <p:extLst>
+      <p:ext uri="{BB962C8B-B14F-4D97-AF65-F5344CB8AC3E}">
+        <p14:creationId xmlns:p14="http://schemas.microsoft.com/office/powerpoint/2010/main" val="3570956207"/>
+      </p:ext>
+    </p:extLst>
   </p:cSld>
   <p:clrMapOvr>
     <a:masterClrMapping/>
@@ -1353,7 +1678,7 @@
     </p:spTree>
     <p:extLst>
       <p:ext uri="{BB962C8B-B14F-4D97-AF65-F5344CB8AC3E}">
-        <p14:creationId xmlns:p14="http://schemas.microsoft.com/office/powerpoint/2010/main" val="212972419"/>
+        <p14:creationId xmlns:p14="http://schemas.microsoft.com/office/powerpoint/2010/main" val="1655514"/>
       </p:ext>
     </p:extLst>
   </p:cSld>
@@ -1460,11 +1785,6 @@
         </p:txBody>
       </p:sp>
     </p:spTree>
-    <p:extLst>
-      <p:ext uri="{BB962C8B-B14F-4D97-AF65-F5344CB8AC3E}">
-        <p14:creationId xmlns:p14="http://schemas.microsoft.com/office/powerpoint/2010/main" val="813253174"/>
-      </p:ext>
-    </p:extLst>
   </p:cSld>
   <p:clrMapOvr>
     <a:masterClrMapping/>
@@ -1673,6 +1993,11 @@
         </p:txBody>
       </p:sp>
     </p:spTree>
+    <p:extLst>
+      <p:ext uri="{BB962C8B-B14F-4D97-AF65-F5344CB8AC3E}">
+        <p14:creationId xmlns:p14="http://schemas.microsoft.com/office/powerpoint/2010/main" val="212972419"/>
+      </p:ext>
+    </p:extLst>
   </p:cSld>
   <p:clrMapOvr>
     <a:masterClrMapping/>
@@ -1777,6 +2102,11 @@
         </p:txBody>
       </p:sp>
     </p:spTree>
+    <p:extLst>
+      <p:ext uri="{BB962C8B-B14F-4D97-AF65-F5344CB8AC3E}">
+        <p14:creationId xmlns:p14="http://schemas.microsoft.com/office/powerpoint/2010/main" val="813253174"/>
+      </p:ext>
+    </p:extLst>
   </p:cSld>
   <p:clrMapOvr>
     <a:masterClrMapping/>
@@ -8543,2452 +8873,6 @@
               <a:t> </a:t>
             </a:r>
             <a:r>
-              <a:rPr lang="en" sz="2400" b="1" dirty="0" smtClean="0"/>
-              <a:t>COMPONENTS OF SUPERVISED MACHINE LEARNING</a:t>
-            </a:r>
-            <a:endParaRPr lang="en-US" sz="2400" b="1" dirty="0"/>
-          </a:p>
-        </p:txBody>
-      </p:sp>
-      <p:sp>
-        <p:nvSpPr>
-          <p:cNvPr id="7" name="Google Shape;77;g258990b3369_0_16"/>
-          <p:cNvSpPr txBox="1">
-            <a:spLocks noGrp="1"/>
-          </p:cNvSpPr>
-          <p:nvPr>
-            <p:ph type="body" idx="1"/>
-          </p:nvPr>
-        </p:nvSpPr>
-        <p:spPr>
-          <a:xfrm>
-            <a:off x="201341" y="575087"/>
-            <a:ext cx="8650800" cy="2252089"/>
-          </a:xfrm>
-          <a:prstGeom prst="rect">
-            <a:avLst/>
-          </a:prstGeom>
-        </p:spPr>
-        <p:txBody>
-          <a:bodyPr spcFirstLastPara="1" wrap="square" lIns="91425" tIns="91425" rIns="91425" bIns="91425" anchor="t" anchorCtr="0">
-            <a:normAutofit lnSpcReduction="10000"/>
-          </a:bodyPr>
-          <a:lstStyle/>
-          <a:p>
-            <a:pPr marL="114300" indent="0" algn="just">
-              <a:buNone/>
-            </a:pPr>
-            <a:r>
-              <a:rPr lang="en-US" sz="2000" b="1" u="sng" dirty="0">
-                <a:solidFill>
-                  <a:schemeClr val="tx1"/>
-                </a:solidFill>
-              </a:rPr>
-              <a:t>Cost Function (Loss Function)</a:t>
-            </a:r>
-            <a:r>
-              <a:rPr lang="en-US" sz="2000" u="sng" dirty="0">
-                <a:solidFill>
-                  <a:schemeClr val="tx1"/>
-                </a:solidFill>
-              </a:rPr>
-              <a:t>:</a:t>
-            </a:r>
-          </a:p>
-          <a:p>
-            <a:pPr algn="just"/>
-            <a:r>
-              <a:rPr lang="en-US" sz="2000" dirty="0">
-                <a:solidFill>
-                  <a:schemeClr val="tx1"/>
-                </a:solidFill>
-              </a:rPr>
-              <a:t>The cost function measures how well the model's predictions match the actual labels in the training data. It quantifies the error between the predicted and actual outputs. Common cost functions include Mean Squared Error (MSE) for regression tasks and Cross-Entropy Loss for classification tasks</a:t>
-            </a:r>
-            <a:r>
-              <a:rPr lang="en-US" sz="2000" dirty="0" smtClean="0">
-                <a:solidFill>
-                  <a:schemeClr val="tx1"/>
-                </a:solidFill>
-              </a:rPr>
-              <a:t>.</a:t>
-            </a:r>
-            <a:endParaRPr lang="en-US" dirty="0">
-              <a:solidFill>
-                <a:schemeClr val="tx1"/>
-              </a:solidFill>
-            </a:endParaRPr>
-          </a:p>
-        </p:txBody>
-      </p:sp>
-      <p:pic>
-        <p:nvPicPr>
-          <p:cNvPr id="3074" name="Picture 2"/>
-          <p:cNvPicPr>
-            <a:picLocks noChangeAspect="1" noChangeArrowheads="1"/>
-          </p:cNvPicPr>
-          <p:nvPr/>
-        </p:nvPicPr>
-        <p:blipFill>
-          <a:blip r:embed="rId3">
-            <a:extLst>
-              <a:ext uri="{28A0092B-C50C-407E-A947-70E740481C1C}">
-                <a14:useLocalDpi xmlns:a14="http://schemas.microsoft.com/office/drawing/2010/main" val="0"/>
-              </a:ext>
-            </a:extLst>
-          </a:blip>
-          <a:srcRect/>
-          <a:stretch>
-            <a:fillRect/>
-          </a:stretch>
-        </p:blipFill>
-        <p:spPr bwMode="auto">
-          <a:xfrm>
-            <a:off x="1505825" y="2719388"/>
-            <a:ext cx="5591175" cy="1533525"/>
-          </a:xfrm>
-          <a:prstGeom prst="rect">
-            <a:avLst/>
-          </a:prstGeom>
-          <a:noFill/>
-          <a:ln>
-            <a:noFill/>
-          </a:ln>
-          <a:effectLst/>
-          <a:extLst>
-            <a:ext uri="{909E8E84-426E-40DD-AFC4-6F175D3DCCD1}">
-              <a14:hiddenFill xmlns:a14="http://schemas.microsoft.com/office/drawing/2010/main">
-                <a:solidFill>
-                  <a:schemeClr val="accent1"/>
-                </a:solidFill>
-              </a14:hiddenFill>
-            </a:ext>
-            <a:ext uri="{91240B29-F687-4F45-9708-019B960494DF}">
-              <a14:hiddenLine xmlns:a14="http://schemas.microsoft.com/office/drawing/2010/main" w="9525">
-                <a:solidFill>
-                  <a:schemeClr val="tx1"/>
-                </a:solidFill>
-                <a:miter lim="800000"/>
-                <a:headEnd/>
-                <a:tailEnd/>
-              </a14:hiddenLine>
-            </a:ext>
-            <a:ext uri="{AF507438-7753-43E0-B8FC-AC1667EBCBE1}">
-              <a14:hiddenEffects xmlns:a14="http://schemas.microsoft.com/office/drawing/2010/main">
-                <a:effectLst>
-                  <a:outerShdw dist="35921" dir="2700000" algn="ctr" rotWithShape="0">
-                    <a:schemeClr val="bg2"/>
-                  </a:outerShdw>
-                </a:effectLst>
-              </a14:hiddenEffects>
-            </a:ext>
-          </a:extLst>
-        </p:spPr>
-      </p:pic>
-    </p:spTree>
-    <p:extLst>
-      <p:ext uri="{BB962C8B-B14F-4D97-AF65-F5344CB8AC3E}">
-        <p14:creationId xmlns:p14="http://schemas.microsoft.com/office/powerpoint/2010/main" val="1723408440"/>
-      </p:ext>
-    </p:extLst>
-  </p:cSld>
-  <p:clrMapOvr>
-    <a:masterClrMapping/>
-  </p:clrMapOvr>
-  <p:timing>
-    <p:tnLst>
-      <p:par>
-        <p:cTn id="1" dur="indefinite" restart="never" nodeType="tmRoot"/>
-      </p:par>
-    </p:tnLst>
-  </p:timing>
-</p:sld>
-</file>
-
-<file path=ppt/slides/slide11.xml><?xml version="1.0" encoding="utf-8"?>
-<p:sld xmlns:a="http://schemas.openxmlformats.org/drawingml/2006/main" xmlns:r="http://schemas.openxmlformats.org/officeDocument/2006/relationships" xmlns:p="http://schemas.openxmlformats.org/presentationml/2006/main">
-  <p:cSld>
-    <p:spTree>
-      <p:nvGrpSpPr>
-        <p:cNvPr id="1" name=""/>
-        <p:cNvGrpSpPr/>
-        <p:nvPr/>
-      </p:nvGrpSpPr>
-      <p:grpSpPr>
-        <a:xfrm>
-          <a:off x="0" y="0"/>
-          <a:ext cx="0" cy="0"/>
-          <a:chOff x="0" y="0"/>
-          <a:chExt cx="0" cy="0"/>
-        </a:xfrm>
-      </p:grpSpPr>
-      <p:sp>
-        <p:nvSpPr>
-          <p:cNvPr id="6" name="Google Shape;103;p16"/>
-          <p:cNvSpPr txBox="1">
-            <a:spLocks noGrp="1"/>
-          </p:cNvSpPr>
-          <p:nvPr>
-            <p:ph type="title"/>
-          </p:nvPr>
-        </p:nvSpPr>
-        <p:spPr>
-          <a:xfrm>
-            <a:off x="0" y="3650"/>
-            <a:ext cx="9144000" cy="523232"/>
-          </a:xfrm>
-          <a:prstGeom prst="rect">
-            <a:avLst/>
-          </a:prstGeom>
-        </p:spPr>
-        <p:txBody>
-          <a:bodyPr spcFirstLastPara="1" wrap="square" lIns="91425" tIns="91425" rIns="91425" bIns="91425" anchor="t" anchorCtr="0">
-            <a:noAutofit/>
-          </a:bodyPr>
-          <a:lstStyle/>
-          <a:p>
-            <a:pPr algn="ctr"/>
-            <a:r>
-              <a:rPr lang="en-US" sz="2400" b="1" dirty="0" smtClean="0"/>
-              <a:t>COST / LOSS FUNCTION</a:t>
-            </a:r>
-            <a:endParaRPr lang="en-US" sz="2400" b="1" dirty="0"/>
-          </a:p>
-        </p:txBody>
-      </p:sp>
-      <p:pic>
-        <p:nvPicPr>
-          <p:cNvPr id="3074" name="Picture 2"/>
-          <p:cNvPicPr>
-            <a:picLocks noChangeAspect="1" noChangeArrowheads="1"/>
-          </p:cNvPicPr>
-          <p:nvPr/>
-        </p:nvPicPr>
-        <p:blipFill>
-          <a:blip r:embed="rId2">
-            <a:extLst>
-              <a:ext uri="{28A0092B-C50C-407E-A947-70E740481C1C}">
-                <a14:useLocalDpi xmlns:a14="http://schemas.microsoft.com/office/drawing/2010/main" val="0"/>
-              </a:ext>
-            </a:extLst>
-          </a:blip>
-          <a:srcRect/>
-          <a:stretch>
-            <a:fillRect/>
-          </a:stretch>
-        </p:blipFill>
-        <p:spPr bwMode="auto">
-          <a:xfrm>
-            <a:off x="602073" y="783771"/>
-            <a:ext cx="6552078" cy="3150248"/>
-          </a:xfrm>
-          <a:prstGeom prst="rect">
-            <a:avLst/>
-          </a:prstGeom>
-          <a:noFill/>
-          <a:ln>
-            <a:noFill/>
-          </a:ln>
-          <a:effectLst/>
-          <a:extLst>
-            <a:ext uri="{909E8E84-426E-40DD-AFC4-6F175D3DCCD1}">
-              <a14:hiddenFill xmlns:a14="http://schemas.microsoft.com/office/drawing/2010/main">
-                <a:solidFill>
-                  <a:schemeClr val="accent1"/>
-                </a:solidFill>
-              </a14:hiddenFill>
-            </a:ext>
-            <a:ext uri="{91240B29-F687-4F45-9708-019B960494DF}">
-              <a14:hiddenLine xmlns:a14="http://schemas.microsoft.com/office/drawing/2010/main" w="9525">
-                <a:solidFill>
-                  <a:schemeClr val="tx1"/>
-                </a:solidFill>
-                <a:miter lim="800000"/>
-                <a:headEnd/>
-                <a:tailEnd/>
-              </a14:hiddenLine>
-            </a:ext>
-            <a:ext uri="{AF507438-7753-43E0-B8FC-AC1667EBCBE1}">
-              <a14:hiddenEffects xmlns:a14="http://schemas.microsoft.com/office/drawing/2010/main">
-                <a:effectLst>
-                  <a:outerShdw dist="35921" dir="2700000" algn="ctr" rotWithShape="0">
-                    <a:schemeClr val="bg2"/>
-                  </a:outerShdw>
-                </a:effectLst>
-              </a14:hiddenEffects>
-            </a:ext>
-          </a:extLst>
-        </p:spPr>
-      </p:pic>
-    </p:spTree>
-    <p:extLst>
-      <p:ext uri="{BB962C8B-B14F-4D97-AF65-F5344CB8AC3E}">
-        <p14:creationId xmlns:p14="http://schemas.microsoft.com/office/powerpoint/2010/main" val="4017530526"/>
-      </p:ext>
-    </p:extLst>
-  </p:cSld>
-  <p:clrMapOvr>
-    <a:masterClrMapping/>
-  </p:clrMapOvr>
-</p:sld>
-</file>
-
-<file path=ppt/slides/slide12.xml><?xml version="1.0" encoding="utf-8"?>
-<p:sld xmlns:a="http://schemas.openxmlformats.org/drawingml/2006/main" xmlns:r="http://schemas.openxmlformats.org/officeDocument/2006/relationships" xmlns:p="http://schemas.openxmlformats.org/presentationml/2006/main">
-  <p:cSld>
-    <p:spTree>
-      <p:nvGrpSpPr>
-        <p:cNvPr id="1" name=""/>
-        <p:cNvGrpSpPr/>
-        <p:nvPr/>
-      </p:nvGrpSpPr>
-      <p:grpSpPr>
-        <a:xfrm>
-          <a:off x="0" y="0"/>
-          <a:ext cx="0" cy="0"/>
-          <a:chOff x="0" y="0"/>
-          <a:chExt cx="0" cy="0"/>
-        </a:xfrm>
-      </p:grpSpPr>
-      <p:sp>
-        <p:nvSpPr>
-          <p:cNvPr id="6" name="Google Shape;103;p16"/>
-          <p:cNvSpPr txBox="1">
-            <a:spLocks noGrp="1"/>
-          </p:cNvSpPr>
-          <p:nvPr>
-            <p:ph type="title"/>
-          </p:nvPr>
-        </p:nvSpPr>
-        <p:spPr>
-          <a:xfrm>
-            <a:off x="0" y="3650"/>
-            <a:ext cx="9144000" cy="523232"/>
-          </a:xfrm>
-          <a:prstGeom prst="rect">
-            <a:avLst/>
-          </a:prstGeom>
-        </p:spPr>
-        <p:txBody>
-          <a:bodyPr spcFirstLastPara="1" wrap="square" lIns="91425" tIns="91425" rIns="91425" bIns="91425" anchor="t" anchorCtr="0">
-            <a:noAutofit/>
-          </a:bodyPr>
-          <a:lstStyle/>
-          <a:p>
-            <a:pPr algn="ctr"/>
-            <a:r>
-              <a:rPr lang="en-US" sz="2400" b="1" dirty="0" smtClean="0"/>
-              <a:t>COST / LOSS FUNCTION</a:t>
-            </a:r>
-            <a:endParaRPr lang="en-US" sz="2400" b="1" dirty="0"/>
-          </a:p>
-        </p:txBody>
-      </p:sp>
-      <p:pic>
-        <p:nvPicPr>
-          <p:cNvPr id="4099" name="Picture 3"/>
-          <p:cNvPicPr>
-            <a:picLocks noChangeAspect="1" noChangeArrowheads="1"/>
-          </p:cNvPicPr>
-          <p:nvPr/>
-        </p:nvPicPr>
-        <p:blipFill>
-          <a:blip r:embed="rId2">
-            <a:extLst>
-              <a:ext uri="{28A0092B-C50C-407E-A947-70E740481C1C}">
-                <a14:useLocalDpi xmlns:a14="http://schemas.microsoft.com/office/drawing/2010/main" val="0"/>
-              </a:ext>
-            </a:extLst>
-          </a:blip>
-          <a:srcRect/>
-          <a:stretch>
-            <a:fillRect/>
-          </a:stretch>
-        </p:blipFill>
-        <p:spPr bwMode="auto">
-          <a:xfrm>
-            <a:off x="1399592" y="471190"/>
-            <a:ext cx="5952930" cy="4388508"/>
-          </a:xfrm>
-          <a:prstGeom prst="rect">
-            <a:avLst/>
-          </a:prstGeom>
-          <a:noFill/>
-          <a:ln>
-            <a:noFill/>
-          </a:ln>
-          <a:effectLst/>
-          <a:extLst>
-            <a:ext uri="{909E8E84-426E-40DD-AFC4-6F175D3DCCD1}">
-              <a14:hiddenFill xmlns:a14="http://schemas.microsoft.com/office/drawing/2010/main">
-                <a:solidFill>
-                  <a:schemeClr val="accent1"/>
-                </a:solidFill>
-              </a14:hiddenFill>
-            </a:ext>
-            <a:ext uri="{91240B29-F687-4F45-9708-019B960494DF}">
-              <a14:hiddenLine xmlns:a14="http://schemas.microsoft.com/office/drawing/2010/main" w="9525">
-                <a:solidFill>
-                  <a:schemeClr val="tx1"/>
-                </a:solidFill>
-                <a:miter lim="800000"/>
-                <a:headEnd/>
-                <a:tailEnd/>
-              </a14:hiddenLine>
-            </a:ext>
-            <a:ext uri="{AF507438-7753-43E0-B8FC-AC1667EBCBE1}">
-              <a14:hiddenEffects xmlns:a14="http://schemas.microsoft.com/office/drawing/2010/main">
-                <a:effectLst>
-                  <a:outerShdw dist="35921" dir="2700000" algn="ctr" rotWithShape="0">
-                    <a:schemeClr val="bg2"/>
-                  </a:outerShdw>
-                </a:effectLst>
-              </a14:hiddenEffects>
-            </a:ext>
-          </a:extLst>
-        </p:spPr>
-      </p:pic>
-    </p:spTree>
-    <p:extLst>
-      <p:ext uri="{BB962C8B-B14F-4D97-AF65-F5344CB8AC3E}">
-        <p14:creationId xmlns:p14="http://schemas.microsoft.com/office/powerpoint/2010/main" val="3043475555"/>
-      </p:ext>
-    </p:extLst>
-  </p:cSld>
-  <p:clrMapOvr>
-    <a:masterClrMapping/>
-  </p:clrMapOvr>
-</p:sld>
-</file>
-
-<file path=ppt/slides/slide13.xml><?xml version="1.0" encoding="utf-8"?>
-<p:sld xmlns:a="http://schemas.openxmlformats.org/drawingml/2006/main" xmlns:r="http://schemas.openxmlformats.org/officeDocument/2006/relationships" xmlns:p="http://schemas.openxmlformats.org/presentationml/2006/main">
-  <p:cSld>
-    <p:spTree>
-      <p:nvGrpSpPr>
-        <p:cNvPr id="1" name=""/>
-        <p:cNvGrpSpPr/>
-        <p:nvPr/>
-      </p:nvGrpSpPr>
-      <p:grpSpPr>
-        <a:xfrm>
-          <a:off x="0" y="0"/>
-          <a:ext cx="0" cy="0"/>
-          <a:chOff x="0" y="0"/>
-          <a:chExt cx="0" cy="0"/>
-        </a:xfrm>
-      </p:grpSpPr>
-      <p:sp>
-        <p:nvSpPr>
-          <p:cNvPr id="6" name="Google Shape;103;p16"/>
-          <p:cNvSpPr txBox="1">
-            <a:spLocks noGrp="1"/>
-          </p:cNvSpPr>
-          <p:nvPr>
-            <p:ph type="title"/>
-          </p:nvPr>
-        </p:nvSpPr>
-        <p:spPr>
-          <a:xfrm>
-            <a:off x="0" y="3650"/>
-            <a:ext cx="9144000" cy="523232"/>
-          </a:xfrm>
-          <a:prstGeom prst="rect">
-            <a:avLst/>
-          </a:prstGeom>
-        </p:spPr>
-        <p:txBody>
-          <a:bodyPr spcFirstLastPara="1" wrap="square" lIns="91425" tIns="91425" rIns="91425" bIns="91425" anchor="t" anchorCtr="0">
-            <a:noAutofit/>
-          </a:bodyPr>
-          <a:lstStyle/>
-          <a:p>
-            <a:pPr algn="ctr"/>
-            <a:r>
-              <a:rPr lang="en-US" sz="2400" b="1" dirty="0" smtClean="0"/>
-              <a:t>COST / LOSS FUNCTION</a:t>
-            </a:r>
-            <a:endParaRPr lang="en-US" sz="2400" b="1" dirty="0"/>
-          </a:p>
-        </p:txBody>
-      </p:sp>
-      <p:pic>
-        <p:nvPicPr>
-          <p:cNvPr id="5122" name="Picture 2"/>
-          <p:cNvPicPr>
-            <a:picLocks noChangeAspect="1" noChangeArrowheads="1"/>
-          </p:cNvPicPr>
-          <p:nvPr/>
-        </p:nvPicPr>
-        <p:blipFill>
-          <a:blip r:embed="rId2">
-            <a:extLst>
-              <a:ext uri="{28A0092B-C50C-407E-A947-70E740481C1C}">
-                <a14:useLocalDpi xmlns:a14="http://schemas.microsoft.com/office/drawing/2010/main" val="0"/>
-              </a:ext>
-            </a:extLst>
-          </a:blip>
-          <a:srcRect/>
-          <a:stretch>
-            <a:fillRect/>
-          </a:stretch>
-        </p:blipFill>
-        <p:spPr bwMode="auto">
-          <a:xfrm>
-            <a:off x="1007708" y="735222"/>
-            <a:ext cx="7621264" cy="1977749"/>
-          </a:xfrm>
-          <a:prstGeom prst="rect">
-            <a:avLst/>
-          </a:prstGeom>
-          <a:noFill/>
-          <a:ln>
-            <a:noFill/>
-          </a:ln>
-          <a:effectLst/>
-          <a:extLst>
-            <a:ext uri="{909E8E84-426E-40DD-AFC4-6F175D3DCCD1}">
-              <a14:hiddenFill xmlns:a14="http://schemas.microsoft.com/office/drawing/2010/main">
-                <a:solidFill>
-                  <a:schemeClr val="accent1"/>
-                </a:solidFill>
-              </a14:hiddenFill>
-            </a:ext>
-            <a:ext uri="{91240B29-F687-4F45-9708-019B960494DF}">
-              <a14:hiddenLine xmlns:a14="http://schemas.microsoft.com/office/drawing/2010/main" w="9525">
-                <a:solidFill>
-                  <a:schemeClr val="tx1"/>
-                </a:solidFill>
-                <a:miter lim="800000"/>
-                <a:headEnd/>
-                <a:tailEnd/>
-              </a14:hiddenLine>
-            </a:ext>
-            <a:ext uri="{AF507438-7753-43E0-B8FC-AC1667EBCBE1}">
-              <a14:hiddenEffects xmlns:a14="http://schemas.microsoft.com/office/drawing/2010/main">
-                <a:effectLst>
-                  <a:outerShdw dist="35921" dir="2700000" algn="ctr" rotWithShape="0">
-                    <a:schemeClr val="bg2"/>
-                  </a:outerShdw>
-                </a:effectLst>
-              </a14:hiddenEffects>
-            </a:ext>
-          </a:extLst>
-        </p:spPr>
-      </p:pic>
-    </p:spTree>
-    <p:extLst>
-      <p:ext uri="{BB962C8B-B14F-4D97-AF65-F5344CB8AC3E}">
-        <p14:creationId xmlns:p14="http://schemas.microsoft.com/office/powerpoint/2010/main" val="2726059942"/>
-      </p:ext>
-    </p:extLst>
-  </p:cSld>
-  <p:clrMapOvr>
-    <a:masterClrMapping/>
-  </p:clrMapOvr>
-</p:sld>
-</file>
-
-<file path=ppt/slides/slide14.xml><?xml version="1.0" encoding="utf-8"?>
-<p:sld xmlns:a="http://schemas.openxmlformats.org/drawingml/2006/main" xmlns:r="http://schemas.openxmlformats.org/officeDocument/2006/relationships" xmlns:p="http://schemas.openxmlformats.org/presentationml/2006/main">
-  <p:cSld>
-    <p:spTree>
-      <p:nvGrpSpPr>
-        <p:cNvPr id="1" name="Shape 102"/>
-        <p:cNvGrpSpPr/>
-        <p:nvPr/>
-      </p:nvGrpSpPr>
-      <p:grpSpPr>
-        <a:xfrm>
-          <a:off x="0" y="0"/>
-          <a:ext cx="0" cy="0"/>
-          <a:chOff x="0" y="0"/>
-          <a:chExt cx="0" cy="0"/>
-        </a:xfrm>
-      </p:grpSpPr>
-      <p:sp>
-        <p:nvSpPr>
-          <p:cNvPr id="103" name="Google Shape;103;p16"/>
-          <p:cNvSpPr txBox="1">
-            <a:spLocks noGrp="1"/>
-          </p:cNvSpPr>
-          <p:nvPr>
-            <p:ph type="title"/>
-          </p:nvPr>
-        </p:nvSpPr>
-        <p:spPr>
-          <a:xfrm>
-            <a:off x="0" y="3650"/>
-            <a:ext cx="9144000" cy="523232"/>
-          </a:xfrm>
-          <a:prstGeom prst="rect">
-            <a:avLst/>
-          </a:prstGeom>
-        </p:spPr>
-        <p:txBody>
-          <a:bodyPr spcFirstLastPara="1" wrap="square" lIns="91425" tIns="91425" rIns="91425" bIns="91425" anchor="t" anchorCtr="0">
-            <a:noAutofit/>
-          </a:bodyPr>
-          <a:lstStyle/>
-          <a:p>
-            <a:pPr algn="ctr"/>
-            <a:r>
-              <a:rPr lang="en-US" sz="2400" b="1" dirty="0" smtClean="0"/>
-              <a:t> </a:t>
-            </a:r>
-            <a:r>
-              <a:rPr lang="en" sz="2400" b="1" dirty="0"/>
-              <a:t>EVALUATION FUNCTIONS</a:t>
-            </a:r>
-            <a:endParaRPr lang="en-US" sz="2400" b="1" dirty="0"/>
-          </a:p>
-        </p:txBody>
-      </p:sp>
-      <p:sp>
-        <p:nvSpPr>
-          <p:cNvPr id="7" name="Google Shape;77;g258990b3369_0_16"/>
-          <p:cNvSpPr txBox="1">
-            <a:spLocks noGrp="1"/>
-          </p:cNvSpPr>
-          <p:nvPr>
-            <p:ph type="body" idx="1"/>
-          </p:nvPr>
-        </p:nvSpPr>
-        <p:spPr>
-          <a:xfrm>
-            <a:off x="201341" y="575087"/>
-            <a:ext cx="8650800" cy="2252089"/>
-          </a:xfrm>
-          <a:prstGeom prst="rect">
-            <a:avLst/>
-          </a:prstGeom>
-        </p:spPr>
-        <p:txBody>
-          <a:bodyPr spcFirstLastPara="1" wrap="square" lIns="91425" tIns="91425" rIns="91425" bIns="91425" anchor="t" anchorCtr="0">
-            <a:normAutofit fontScale="85000" lnSpcReduction="10000"/>
-          </a:bodyPr>
-          <a:lstStyle/>
-          <a:p>
-            <a:pPr marL="114300" indent="0" algn="just">
-              <a:buNone/>
-            </a:pPr>
-            <a:r>
-              <a:rPr lang="en-US" sz="2000" b="1" u="sng" dirty="0">
-                <a:solidFill>
-                  <a:schemeClr val="tx1"/>
-                </a:solidFill>
-              </a:rPr>
-              <a:t>Optimizer:</a:t>
-            </a:r>
-          </a:p>
-          <a:p>
-            <a:r>
-              <a:rPr lang="en-US" sz="2000" dirty="0">
-                <a:solidFill>
-                  <a:schemeClr val="tx1"/>
-                </a:solidFill>
-              </a:rPr>
-              <a:t>Optimizers are algorithms used to minimize the cost function by updating the model parameters. In logistic regression, </a:t>
-            </a:r>
-            <a:r>
-              <a:rPr lang="en-US" sz="2000" b="1" dirty="0">
-                <a:solidFill>
-                  <a:schemeClr val="tx1"/>
-                </a:solidFill>
-              </a:rPr>
-              <a:t>Gradient Descent</a:t>
-            </a:r>
-            <a:r>
-              <a:rPr lang="en-US" sz="2000" dirty="0">
-                <a:solidFill>
-                  <a:schemeClr val="tx1"/>
-                </a:solidFill>
-              </a:rPr>
-              <a:t> is commonly used. There are various types of gradient descent optimizers, including:</a:t>
-            </a:r>
-          </a:p>
-          <a:p>
-            <a:r>
-              <a:rPr lang="en-US" sz="2000" b="1" dirty="0">
-                <a:solidFill>
-                  <a:schemeClr val="tx1"/>
-                </a:solidFill>
-              </a:rPr>
-              <a:t>Batch Gradient Descent</a:t>
-            </a:r>
-            <a:endParaRPr lang="en-US" sz="2000" dirty="0">
-              <a:solidFill>
-                <a:schemeClr val="tx1"/>
-              </a:solidFill>
-            </a:endParaRPr>
-          </a:p>
-          <a:p>
-            <a:r>
-              <a:rPr lang="en-US" sz="2000" b="1" dirty="0">
-                <a:solidFill>
-                  <a:schemeClr val="tx1"/>
-                </a:solidFill>
-              </a:rPr>
-              <a:t>Stochastic Gradient Descent (SGD)</a:t>
-            </a:r>
-            <a:endParaRPr lang="en-US" sz="2000" dirty="0">
-              <a:solidFill>
-                <a:schemeClr val="tx1"/>
-              </a:solidFill>
-            </a:endParaRPr>
-          </a:p>
-          <a:p>
-            <a:r>
-              <a:rPr lang="en-US" sz="2000" b="1" dirty="0">
-                <a:solidFill>
-                  <a:schemeClr val="tx1"/>
-                </a:solidFill>
-              </a:rPr>
-              <a:t>Mini-Batch Gradient Descent</a:t>
-            </a:r>
-            <a:endParaRPr lang="en-US" sz="2000" dirty="0">
-              <a:solidFill>
-                <a:schemeClr val="tx1"/>
-              </a:solidFill>
-            </a:endParaRPr>
-          </a:p>
-        </p:txBody>
-      </p:sp>
-      <p:pic>
-        <p:nvPicPr>
-          <p:cNvPr id="4098" name="Picture 2"/>
-          <p:cNvPicPr>
-            <a:picLocks noChangeAspect="1" noChangeArrowheads="1"/>
-          </p:cNvPicPr>
-          <p:nvPr/>
-        </p:nvPicPr>
-        <p:blipFill>
-          <a:blip r:embed="rId3">
-            <a:extLst>
-              <a:ext uri="{28A0092B-C50C-407E-A947-70E740481C1C}">
-                <a14:useLocalDpi xmlns:a14="http://schemas.microsoft.com/office/drawing/2010/main" val="0"/>
-              </a:ext>
-            </a:extLst>
-          </a:blip>
-          <a:srcRect/>
-          <a:stretch>
-            <a:fillRect/>
-          </a:stretch>
-        </p:blipFill>
-        <p:spPr bwMode="auto">
-          <a:xfrm>
-            <a:off x="757306" y="2978418"/>
-            <a:ext cx="5334000" cy="1295400"/>
-          </a:xfrm>
-          <a:prstGeom prst="rect">
-            <a:avLst/>
-          </a:prstGeom>
-          <a:noFill/>
-          <a:ln>
-            <a:noFill/>
-          </a:ln>
-          <a:effectLst/>
-          <a:extLst>
-            <a:ext uri="{909E8E84-426E-40DD-AFC4-6F175D3DCCD1}">
-              <a14:hiddenFill xmlns:a14="http://schemas.microsoft.com/office/drawing/2010/main">
-                <a:solidFill>
-                  <a:schemeClr val="accent1"/>
-                </a:solidFill>
-              </a14:hiddenFill>
-            </a:ext>
-            <a:ext uri="{91240B29-F687-4F45-9708-019B960494DF}">
-              <a14:hiddenLine xmlns:a14="http://schemas.microsoft.com/office/drawing/2010/main" w="9525">
-                <a:solidFill>
-                  <a:schemeClr val="tx1"/>
-                </a:solidFill>
-                <a:miter lim="800000"/>
-                <a:headEnd/>
-                <a:tailEnd/>
-              </a14:hiddenLine>
-            </a:ext>
-            <a:ext uri="{AF507438-7753-43E0-B8FC-AC1667EBCBE1}">
-              <a14:hiddenEffects xmlns:a14="http://schemas.microsoft.com/office/drawing/2010/main">
-                <a:effectLst>
-                  <a:outerShdw dist="35921" dir="2700000" algn="ctr" rotWithShape="0">
-                    <a:schemeClr val="bg2"/>
-                  </a:outerShdw>
-                </a:effectLst>
-              </a14:hiddenEffects>
-            </a:ext>
-          </a:extLst>
-        </p:spPr>
-      </p:pic>
-    </p:spTree>
-    <p:extLst>
-      <p:ext uri="{BB962C8B-B14F-4D97-AF65-F5344CB8AC3E}">
-        <p14:creationId xmlns:p14="http://schemas.microsoft.com/office/powerpoint/2010/main" val="1995493696"/>
-      </p:ext>
-    </p:extLst>
-  </p:cSld>
-  <p:clrMapOvr>
-    <a:masterClrMapping/>
-  </p:clrMapOvr>
-  <p:timing>
-    <p:tnLst>
-      <p:par>
-        <p:cTn id="1" dur="indefinite" restart="never" nodeType="tmRoot"/>
-      </p:par>
-    </p:tnLst>
-  </p:timing>
-</p:sld>
-</file>
-
-<file path=ppt/slides/slide15.xml><?xml version="1.0" encoding="utf-8"?>
-<p:sld xmlns:a="http://schemas.openxmlformats.org/drawingml/2006/main" xmlns:r="http://schemas.openxmlformats.org/officeDocument/2006/relationships" xmlns:p="http://schemas.openxmlformats.org/presentationml/2006/main">
-  <p:cSld>
-    <p:spTree>
-      <p:nvGrpSpPr>
-        <p:cNvPr id="1" name="Shape 102"/>
-        <p:cNvGrpSpPr/>
-        <p:nvPr/>
-      </p:nvGrpSpPr>
-      <p:grpSpPr>
-        <a:xfrm>
-          <a:off x="0" y="0"/>
-          <a:ext cx="0" cy="0"/>
-          <a:chOff x="0" y="0"/>
-          <a:chExt cx="0" cy="0"/>
-        </a:xfrm>
-      </p:grpSpPr>
-      <p:sp>
-        <p:nvSpPr>
-          <p:cNvPr id="103" name="Google Shape;103;p16"/>
-          <p:cNvSpPr txBox="1">
-            <a:spLocks noGrp="1"/>
-          </p:cNvSpPr>
-          <p:nvPr>
-            <p:ph type="title"/>
-          </p:nvPr>
-        </p:nvSpPr>
-        <p:spPr>
-          <a:xfrm>
-            <a:off x="0" y="3650"/>
-            <a:ext cx="9144000" cy="523232"/>
-          </a:xfrm>
-          <a:prstGeom prst="rect">
-            <a:avLst/>
-          </a:prstGeom>
-        </p:spPr>
-        <p:txBody>
-          <a:bodyPr spcFirstLastPara="1" wrap="square" lIns="91425" tIns="91425" rIns="91425" bIns="91425" anchor="t" anchorCtr="0">
-            <a:noAutofit/>
-          </a:bodyPr>
-          <a:lstStyle/>
-          <a:p>
-            <a:pPr algn="ctr"/>
-            <a:r>
-              <a:rPr lang="en-US" sz="2400" b="1" dirty="0" smtClean="0"/>
-              <a:t> </a:t>
-            </a:r>
-            <a:r>
-              <a:rPr lang="en" sz="2400" b="1" dirty="0" smtClean="0"/>
-              <a:t>EVALUATION FUNCTIONS</a:t>
-            </a:r>
-            <a:endParaRPr lang="en-US" sz="2400" b="1" dirty="0"/>
-          </a:p>
-        </p:txBody>
-      </p:sp>
-      <p:sp>
-        <p:nvSpPr>
-          <p:cNvPr id="7" name="Google Shape;77;g258990b3369_0_16"/>
-          <p:cNvSpPr txBox="1">
-            <a:spLocks noGrp="1"/>
-          </p:cNvSpPr>
-          <p:nvPr>
-            <p:ph type="body" idx="1"/>
-          </p:nvPr>
-        </p:nvSpPr>
-        <p:spPr>
-          <a:xfrm>
-            <a:off x="201341" y="575087"/>
-            <a:ext cx="8650800" cy="2802595"/>
-          </a:xfrm>
-          <a:prstGeom prst="rect">
-            <a:avLst/>
-          </a:prstGeom>
-        </p:spPr>
-        <p:txBody>
-          <a:bodyPr spcFirstLastPara="1" wrap="square" lIns="91425" tIns="91425" rIns="91425" bIns="91425" anchor="t" anchorCtr="0">
-            <a:normAutofit/>
-          </a:bodyPr>
-          <a:lstStyle/>
-          <a:p>
-            <a:pPr algn="just">
-              <a:buFont typeface="Wingdings" pitchFamily="2" charset="2"/>
-              <a:buChar char="v"/>
-            </a:pPr>
-            <a:r>
-              <a:rPr lang="en-US" b="1" dirty="0">
-                <a:solidFill>
-                  <a:schemeClr val="tx1"/>
-                </a:solidFill>
-              </a:rPr>
-              <a:t>Sigmoid Function</a:t>
-            </a:r>
-            <a:r>
-              <a:rPr lang="en-US" dirty="0">
-                <a:solidFill>
-                  <a:schemeClr val="tx1"/>
-                </a:solidFill>
-              </a:rPr>
-              <a:t>: Maps </a:t>
-            </a:r>
-            <a:r>
-              <a:rPr lang="en-US" dirty="0" err="1">
-                <a:solidFill>
-                  <a:schemeClr val="tx1"/>
-                </a:solidFill>
-              </a:rPr>
-              <a:t>logits</a:t>
-            </a:r>
-            <a:r>
-              <a:rPr lang="en-US" dirty="0">
-                <a:solidFill>
-                  <a:schemeClr val="tx1"/>
-                </a:solidFill>
-              </a:rPr>
-              <a:t> to probabilities, essential for binary classification</a:t>
-            </a:r>
-            <a:r>
-              <a:rPr lang="en-US" dirty="0" smtClean="0">
-                <a:solidFill>
-                  <a:schemeClr val="tx1"/>
-                </a:solidFill>
-              </a:rPr>
-              <a:t>.</a:t>
-            </a:r>
-          </a:p>
-          <a:p>
-            <a:pPr algn="just">
-              <a:buFont typeface="Wingdings" pitchFamily="2" charset="2"/>
-              <a:buChar char="v"/>
-            </a:pPr>
-            <a:endParaRPr lang="en-US" dirty="0" smtClean="0">
-              <a:solidFill>
-                <a:schemeClr val="tx1"/>
-              </a:solidFill>
-            </a:endParaRPr>
-          </a:p>
-          <a:p>
-            <a:pPr algn="just">
-              <a:buFont typeface="Wingdings" pitchFamily="2" charset="2"/>
-              <a:buChar char="v"/>
-            </a:pPr>
-            <a:r>
-              <a:rPr lang="en-US" b="1" dirty="0" smtClean="0">
-                <a:solidFill>
-                  <a:schemeClr val="tx1"/>
-                </a:solidFill>
-              </a:rPr>
-              <a:t>Cost </a:t>
-            </a:r>
-            <a:r>
-              <a:rPr lang="en-US" b="1" dirty="0">
-                <a:solidFill>
-                  <a:schemeClr val="tx1"/>
-                </a:solidFill>
-              </a:rPr>
-              <a:t>Function</a:t>
-            </a:r>
-            <a:r>
-              <a:rPr lang="en-US" dirty="0">
-                <a:solidFill>
-                  <a:schemeClr val="tx1"/>
-                </a:solidFill>
-              </a:rPr>
-              <a:t>: Measures the error between predicted probabilities and actual labels; binary cross-entropy is used for logistic regression</a:t>
-            </a:r>
-            <a:r>
-              <a:rPr lang="en-US" dirty="0" smtClean="0">
-                <a:solidFill>
-                  <a:schemeClr val="tx1"/>
-                </a:solidFill>
-              </a:rPr>
-              <a:t>.</a:t>
-            </a:r>
-          </a:p>
-          <a:p>
-            <a:pPr marL="114300" indent="0" algn="just">
-              <a:buNone/>
-            </a:pPr>
-            <a:endParaRPr lang="en-US" dirty="0" smtClean="0">
-              <a:solidFill>
-                <a:schemeClr val="tx1"/>
-              </a:solidFill>
-            </a:endParaRPr>
-          </a:p>
-          <a:p>
-            <a:pPr algn="just">
-              <a:buFont typeface="Wingdings" pitchFamily="2" charset="2"/>
-              <a:buChar char="v"/>
-            </a:pPr>
-            <a:r>
-              <a:rPr lang="en-US" b="1" dirty="0" smtClean="0">
-                <a:solidFill>
-                  <a:schemeClr val="tx1"/>
-                </a:solidFill>
-              </a:rPr>
-              <a:t>Optimizer</a:t>
-            </a:r>
-            <a:r>
-              <a:rPr lang="en-US" dirty="0">
-                <a:solidFill>
-                  <a:schemeClr val="tx1"/>
-                </a:solidFill>
-              </a:rPr>
-              <a:t>: Updates model parameters to minimize the cost function. Gradient Descent and its variants are commonly used optimizers.</a:t>
-            </a:r>
-            <a:endParaRPr lang="en-US" sz="2000" dirty="0">
-              <a:solidFill>
-                <a:schemeClr val="tx1"/>
-              </a:solidFill>
-            </a:endParaRPr>
-          </a:p>
-        </p:txBody>
-      </p:sp>
-    </p:spTree>
-    <p:extLst>
-      <p:ext uri="{BB962C8B-B14F-4D97-AF65-F5344CB8AC3E}">
-        <p14:creationId xmlns:p14="http://schemas.microsoft.com/office/powerpoint/2010/main" val="743032425"/>
-      </p:ext>
-    </p:extLst>
-  </p:cSld>
-  <p:clrMapOvr>
-    <a:masterClrMapping/>
-  </p:clrMapOvr>
-  <p:timing>
-    <p:tnLst>
-      <p:par>
-        <p:cTn id="1" dur="indefinite" restart="never" nodeType="tmRoot"/>
-      </p:par>
-    </p:tnLst>
-  </p:timing>
-</p:sld>
-</file>
-
-<file path=ppt/slides/slide2.xml><?xml version="1.0" encoding="utf-8"?>
-<p:sld xmlns:a="http://schemas.openxmlformats.org/drawingml/2006/main" xmlns:r="http://schemas.openxmlformats.org/officeDocument/2006/relationships" xmlns:p="http://schemas.openxmlformats.org/presentationml/2006/main">
-  <p:cSld>
-    <p:spTree>
-      <p:nvGrpSpPr>
-        <p:cNvPr id="1" name="Shape 102"/>
-        <p:cNvGrpSpPr/>
-        <p:nvPr/>
-      </p:nvGrpSpPr>
-      <p:grpSpPr>
-        <a:xfrm>
-          <a:off x="0" y="0"/>
-          <a:ext cx="0" cy="0"/>
-          <a:chOff x="0" y="0"/>
-          <a:chExt cx="0" cy="0"/>
-        </a:xfrm>
-      </p:grpSpPr>
-      <p:sp>
-        <p:nvSpPr>
-          <p:cNvPr id="103" name="Google Shape;103;p16"/>
-          <p:cNvSpPr txBox="1">
-            <a:spLocks noGrp="1"/>
-          </p:cNvSpPr>
-          <p:nvPr>
-            <p:ph type="title"/>
-          </p:nvPr>
-        </p:nvSpPr>
-        <p:spPr>
-          <a:xfrm>
-            <a:off x="0" y="3650"/>
-            <a:ext cx="9144000" cy="523232"/>
-          </a:xfrm>
-          <a:prstGeom prst="rect">
-            <a:avLst/>
-          </a:prstGeom>
-        </p:spPr>
-        <p:txBody>
-          <a:bodyPr spcFirstLastPara="1" wrap="square" lIns="91425" tIns="91425" rIns="91425" bIns="91425" anchor="t" anchorCtr="0">
-            <a:noAutofit/>
-          </a:bodyPr>
-          <a:lstStyle/>
-          <a:p>
-            <a:pPr algn="ctr"/>
-            <a:r>
-              <a:rPr lang="en-US" sz="2400" b="1" dirty="0" smtClean="0"/>
-              <a:t> </a:t>
-            </a:r>
-            <a:r>
-              <a:rPr lang="en-US" sz="2400" b="1" dirty="0"/>
-              <a:t>Evaluation Metrics for Classification Models</a:t>
-            </a:r>
-          </a:p>
-        </p:txBody>
-      </p:sp>
-      <p:sp>
-        <p:nvSpPr>
-          <p:cNvPr id="7" name="Google Shape;77;g258990b3369_0_16"/>
-          <p:cNvSpPr txBox="1">
-            <a:spLocks noGrp="1"/>
-          </p:cNvSpPr>
-          <p:nvPr>
-            <p:ph type="body" idx="1"/>
-          </p:nvPr>
-        </p:nvSpPr>
-        <p:spPr>
-          <a:xfrm>
-            <a:off x="201341" y="575087"/>
-            <a:ext cx="8650800" cy="3558374"/>
-          </a:xfrm>
-          <a:prstGeom prst="rect">
-            <a:avLst/>
-          </a:prstGeom>
-        </p:spPr>
-        <p:txBody>
-          <a:bodyPr spcFirstLastPara="1" wrap="square" lIns="91425" tIns="91425" rIns="91425" bIns="91425" anchor="t" anchorCtr="0">
-            <a:normAutofit/>
-          </a:bodyPr>
-          <a:lstStyle/>
-          <a:p>
-            <a:pPr marL="114300" indent="0">
-              <a:buNone/>
-            </a:pPr>
-            <a:r>
-              <a:rPr lang="en-US" sz="2000" b="1" dirty="0" smtClean="0">
-                <a:solidFill>
-                  <a:schemeClr val="tx1"/>
-                </a:solidFill>
-              </a:rPr>
-              <a:t>Accuracy: </a:t>
-            </a:r>
-            <a:r>
-              <a:rPr lang="en-US" sz="2000" dirty="0" smtClean="0">
-                <a:solidFill>
-                  <a:schemeClr val="tx1"/>
-                </a:solidFill>
-              </a:rPr>
-              <a:t>Accuracy </a:t>
-            </a:r>
-            <a:r>
-              <a:rPr lang="en-US" sz="2000" dirty="0">
-                <a:solidFill>
-                  <a:schemeClr val="tx1"/>
-                </a:solidFill>
-              </a:rPr>
-              <a:t>is the ratio of correctly predicted instances to the total instances. It is a simple metric but can be misleading in imbalanced </a:t>
-            </a:r>
-            <a:r>
-              <a:rPr lang="en-US" sz="2000" dirty="0" smtClean="0">
-                <a:solidFill>
-                  <a:schemeClr val="tx1"/>
-                </a:solidFill>
-              </a:rPr>
-              <a:t>datasets.</a:t>
-            </a:r>
-          </a:p>
-          <a:p>
-            <a:pPr marL="114300" indent="0">
-              <a:buNone/>
-            </a:pPr>
-            <a:endParaRPr lang="en-US" sz="2000" dirty="0" smtClean="0">
-              <a:solidFill>
-                <a:schemeClr val="tx1"/>
-              </a:solidFill>
-            </a:endParaRPr>
-          </a:p>
-          <a:p>
-            <a:pPr marL="114300" indent="0">
-              <a:buNone/>
-            </a:pPr>
-            <a:endParaRPr lang="en-US" sz="2000" dirty="0">
-              <a:solidFill>
-                <a:schemeClr val="tx1"/>
-              </a:solidFill>
-            </a:endParaRPr>
-          </a:p>
-          <a:p>
-            <a:pPr marL="114300" indent="0">
-              <a:buNone/>
-            </a:pPr>
-            <a:endParaRPr lang="en-US" sz="2000" dirty="0"/>
-          </a:p>
-        </p:txBody>
-      </p:sp>
-      <p:pic>
-        <p:nvPicPr>
-          <p:cNvPr id="2" name="Picture 1"/>
-          <p:cNvPicPr>
-            <a:picLocks noChangeAspect="1"/>
-          </p:cNvPicPr>
-          <p:nvPr/>
-        </p:nvPicPr>
-        <p:blipFill>
-          <a:blip r:embed="rId3"/>
-          <a:stretch>
-            <a:fillRect/>
-          </a:stretch>
-        </p:blipFill>
-        <p:spPr>
-          <a:xfrm>
-            <a:off x="1323975" y="1813301"/>
-            <a:ext cx="6496050" cy="2362200"/>
-          </a:xfrm>
-          <a:prstGeom prst="rect">
-            <a:avLst/>
-          </a:prstGeom>
-        </p:spPr>
-      </p:pic>
-    </p:spTree>
-    <p:extLst>
-      <p:ext uri="{BB962C8B-B14F-4D97-AF65-F5344CB8AC3E}">
-        <p14:creationId xmlns:p14="http://schemas.microsoft.com/office/powerpoint/2010/main" val="3162328535"/>
-      </p:ext>
-    </p:extLst>
-  </p:cSld>
-  <p:clrMapOvr>
-    <a:masterClrMapping/>
-  </p:clrMapOvr>
-  <p:timing>
-    <p:tnLst>
-      <p:par>
-        <p:cTn id="1" dur="indefinite" restart="never" nodeType="tmRoot"/>
-      </p:par>
-    </p:tnLst>
-  </p:timing>
-</p:sld>
-</file>
-
-<file path=ppt/slides/slide3.xml><?xml version="1.0" encoding="utf-8"?>
-<p:sld xmlns:a="http://schemas.openxmlformats.org/drawingml/2006/main" xmlns:r="http://schemas.openxmlformats.org/officeDocument/2006/relationships" xmlns:p="http://schemas.openxmlformats.org/presentationml/2006/main">
-  <p:cSld>
-    <p:spTree>
-      <p:nvGrpSpPr>
-        <p:cNvPr id="1" name="Shape 102"/>
-        <p:cNvGrpSpPr/>
-        <p:nvPr/>
-      </p:nvGrpSpPr>
-      <p:grpSpPr>
-        <a:xfrm>
-          <a:off x="0" y="0"/>
-          <a:ext cx="0" cy="0"/>
-          <a:chOff x="0" y="0"/>
-          <a:chExt cx="0" cy="0"/>
-        </a:xfrm>
-      </p:grpSpPr>
-      <p:sp>
-        <p:nvSpPr>
-          <p:cNvPr id="103" name="Google Shape;103;p16"/>
-          <p:cNvSpPr txBox="1">
-            <a:spLocks noGrp="1"/>
-          </p:cNvSpPr>
-          <p:nvPr>
-            <p:ph type="title"/>
-          </p:nvPr>
-        </p:nvSpPr>
-        <p:spPr>
-          <a:xfrm>
-            <a:off x="0" y="3650"/>
-            <a:ext cx="9144000" cy="523232"/>
-          </a:xfrm>
-          <a:prstGeom prst="rect">
-            <a:avLst/>
-          </a:prstGeom>
-        </p:spPr>
-        <p:txBody>
-          <a:bodyPr spcFirstLastPara="1" wrap="square" lIns="91425" tIns="91425" rIns="91425" bIns="91425" anchor="t" anchorCtr="0">
-            <a:noAutofit/>
-          </a:bodyPr>
-          <a:lstStyle/>
-          <a:p>
-            <a:pPr algn="ctr"/>
-            <a:r>
-              <a:rPr lang="en-US" sz="2400" b="1" dirty="0" smtClean="0"/>
-              <a:t> </a:t>
-            </a:r>
-            <a:r>
-              <a:rPr lang="en-US" sz="2400" b="1" dirty="0"/>
-              <a:t>Evaluation Metrics for Classification Models</a:t>
-            </a:r>
-          </a:p>
-        </p:txBody>
-      </p:sp>
-      <p:sp>
-        <p:nvSpPr>
-          <p:cNvPr id="7" name="Google Shape;77;g258990b3369_0_16"/>
-          <p:cNvSpPr txBox="1">
-            <a:spLocks noGrp="1"/>
-          </p:cNvSpPr>
-          <p:nvPr>
-            <p:ph type="body" idx="1"/>
-          </p:nvPr>
-        </p:nvSpPr>
-        <p:spPr>
-          <a:xfrm>
-            <a:off x="201341" y="575087"/>
-            <a:ext cx="8650800" cy="3558374"/>
-          </a:xfrm>
-          <a:prstGeom prst="rect">
-            <a:avLst/>
-          </a:prstGeom>
-        </p:spPr>
-        <p:txBody>
-          <a:bodyPr spcFirstLastPara="1" wrap="square" lIns="91425" tIns="91425" rIns="91425" bIns="91425" anchor="t" anchorCtr="0">
-            <a:normAutofit/>
-          </a:bodyPr>
-          <a:lstStyle/>
-          <a:p>
-            <a:pPr marL="114300" indent="0">
-              <a:buNone/>
-            </a:pPr>
-            <a:r>
-              <a:rPr lang="en-US" b="1" dirty="0">
-                <a:solidFill>
-                  <a:schemeClr val="tx1"/>
-                </a:solidFill>
-              </a:rPr>
-              <a:t>When to Use Accuracy</a:t>
-            </a:r>
-            <a:endParaRPr lang="en-US" dirty="0">
-              <a:solidFill>
-                <a:schemeClr val="tx1"/>
-              </a:solidFill>
-            </a:endParaRPr>
-          </a:p>
-          <a:p>
-            <a:r>
-              <a:rPr lang="en-US" b="1" dirty="0">
-                <a:solidFill>
-                  <a:schemeClr val="tx1"/>
-                </a:solidFill>
-              </a:rPr>
-              <a:t>Balanced datasets</a:t>
-            </a:r>
-            <a:r>
-              <a:rPr lang="en-US" dirty="0">
-                <a:solidFill>
-                  <a:schemeClr val="tx1"/>
-                </a:solidFill>
-              </a:rPr>
-              <a:t>: When classes are roughly equal in size.</a:t>
-            </a:r>
-          </a:p>
-          <a:p>
-            <a:r>
-              <a:rPr lang="en-US" b="1" dirty="0">
-                <a:solidFill>
-                  <a:schemeClr val="tx1"/>
-                </a:solidFill>
-              </a:rPr>
-              <a:t>Simple benchmarks</a:t>
-            </a:r>
-            <a:r>
-              <a:rPr lang="en-US" dirty="0">
-                <a:solidFill>
-                  <a:schemeClr val="tx1"/>
-                </a:solidFill>
-              </a:rPr>
-              <a:t>: Quick evaluation of model performance</a:t>
-            </a:r>
-            <a:r>
-              <a:rPr lang="en-US" dirty="0" smtClean="0">
-                <a:solidFill>
-                  <a:schemeClr val="tx1"/>
-                </a:solidFill>
-              </a:rPr>
-              <a:t>.</a:t>
-            </a:r>
-          </a:p>
-          <a:p>
-            <a:pPr marL="114300" indent="0">
-              <a:buNone/>
-            </a:pPr>
-            <a:endParaRPr lang="en-US" dirty="0">
-              <a:solidFill>
-                <a:schemeClr val="tx1"/>
-              </a:solidFill>
-            </a:endParaRPr>
-          </a:p>
-          <a:p>
-            <a:pPr marL="114300" indent="0">
-              <a:buNone/>
-            </a:pPr>
-            <a:r>
-              <a:rPr lang="en-US" b="1" dirty="0">
-                <a:solidFill>
-                  <a:schemeClr val="tx1"/>
-                </a:solidFill>
-              </a:rPr>
-              <a:t>When to Avoid Accuracy</a:t>
-            </a:r>
-            <a:endParaRPr lang="en-US" dirty="0">
-              <a:solidFill>
-                <a:schemeClr val="tx1"/>
-              </a:solidFill>
-            </a:endParaRPr>
-          </a:p>
-          <a:p>
-            <a:r>
-              <a:rPr lang="en-US" b="1" dirty="0">
-                <a:solidFill>
-                  <a:schemeClr val="tx1"/>
-                </a:solidFill>
-              </a:rPr>
-              <a:t>Imbalanced datasets</a:t>
-            </a:r>
-            <a:r>
-              <a:rPr lang="en-US" dirty="0">
-                <a:solidFill>
-                  <a:schemeClr val="tx1"/>
-                </a:solidFill>
-              </a:rPr>
-              <a:t>: For example, if 95% of examples are negative, a model that always predicts negative will have 95% accuracy but is useless.</a:t>
-            </a:r>
-          </a:p>
-          <a:p>
-            <a:r>
-              <a:rPr lang="en-US" b="1" dirty="0">
-                <a:solidFill>
-                  <a:schemeClr val="tx1"/>
-                </a:solidFill>
-              </a:rPr>
-              <a:t>Cost-sensitive scenarios</a:t>
-            </a:r>
-            <a:r>
-              <a:rPr lang="en-US" dirty="0">
-                <a:solidFill>
-                  <a:schemeClr val="tx1"/>
-                </a:solidFill>
-              </a:rPr>
-              <a:t>: When false positives and false negatives have different consequences (e.g., medical testing).</a:t>
-            </a:r>
-          </a:p>
-        </p:txBody>
-      </p:sp>
-    </p:spTree>
-    <p:extLst>
-      <p:ext uri="{BB962C8B-B14F-4D97-AF65-F5344CB8AC3E}">
-        <p14:creationId xmlns:p14="http://schemas.microsoft.com/office/powerpoint/2010/main" val="730423470"/>
-      </p:ext>
-    </p:extLst>
-  </p:cSld>
-  <p:clrMapOvr>
-    <a:masterClrMapping/>
-  </p:clrMapOvr>
-  <p:timing>
-    <p:tnLst>
-      <p:par>
-        <p:cTn id="1" dur="indefinite" restart="never" nodeType="tmRoot"/>
-      </p:par>
-    </p:tnLst>
-  </p:timing>
-</p:sld>
-</file>
-
-<file path=ppt/slides/slide4.xml><?xml version="1.0" encoding="utf-8"?>
-<p:sld xmlns:a="http://schemas.openxmlformats.org/drawingml/2006/main" xmlns:r="http://schemas.openxmlformats.org/officeDocument/2006/relationships" xmlns:p="http://schemas.openxmlformats.org/presentationml/2006/main">
-  <p:cSld>
-    <p:spTree>
-      <p:nvGrpSpPr>
-        <p:cNvPr id="1" name="Shape 102"/>
-        <p:cNvGrpSpPr/>
-        <p:nvPr/>
-      </p:nvGrpSpPr>
-      <p:grpSpPr>
-        <a:xfrm>
-          <a:off x="0" y="0"/>
-          <a:ext cx="0" cy="0"/>
-          <a:chOff x="0" y="0"/>
-          <a:chExt cx="0" cy="0"/>
-        </a:xfrm>
-      </p:grpSpPr>
-      <p:sp>
-        <p:nvSpPr>
-          <p:cNvPr id="103" name="Google Shape;103;p16"/>
-          <p:cNvSpPr txBox="1">
-            <a:spLocks noGrp="1"/>
-          </p:cNvSpPr>
-          <p:nvPr>
-            <p:ph type="title"/>
-          </p:nvPr>
-        </p:nvSpPr>
-        <p:spPr>
-          <a:xfrm>
-            <a:off x="0" y="3650"/>
-            <a:ext cx="9144000" cy="523232"/>
-          </a:xfrm>
-          <a:prstGeom prst="rect">
-            <a:avLst/>
-          </a:prstGeom>
-        </p:spPr>
-        <p:txBody>
-          <a:bodyPr spcFirstLastPara="1" wrap="square" lIns="91425" tIns="91425" rIns="91425" bIns="91425" anchor="t" anchorCtr="0">
-            <a:noAutofit/>
-          </a:bodyPr>
-          <a:lstStyle/>
-          <a:p>
-            <a:pPr algn="ctr"/>
-            <a:r>
-              <a:rPr lang="en-US" sz="2400" b="1" dirty="0" smtClean="0"/>
-              <a:t> </a:t>
-            </a:r>
-            <a:r>
-              <a:rPr lang="en-US" sz="2400" b="1" dirty="0"/>
-              <a:t>Evaluation Metrics for Classification Models</a:t>
-            </a:r>
-          </a:p>
-        </p:txBody>
-      </p:sp>
-      <p:sp>
-        <p:nvSpPr>
-          <p:cNvPr id="7" name="Google Shape;77;g258990b3369_0_16"/>
-          <p:cNvSpPr txBox="1">
-            <a:spLocks noGrp="1"/>
-          </p:cNvSpPr>
-          <p:nvPr>
-            <p:ph type="body" idx="1"/>
-          </p:nvPr>
-        </p:nvSpPr>
-        <p:spPr>
-          <a:xfrm>
-            <a:off x="201341" y="575087"/>
-            <a:ext cx="8650800" cy="4192856"/>
-          </a:xfrm>
-          <a:prstGeom prst="rect">
-            <a:avLst/>
-          </a:prstGeom>
-        </p:spPr>
-        <p:txBody>
-          <a:bodyPr spcFirstLastPara="1" wrap="square" lIns="91425" tIns="91425" rIns="91425" bIns="91425" anchor="t" anchorCtr="0">
-            <a:normAutofit/>
-          </a:bodyPr>
-          <a:lstStyle/>
-          <a:p>
-            <a:pPr marL="114300" indent="0">
-              <a:buNone/>
-            </a:pPr>
-            <a:r>
-              <a:rPr lang="en-US" sz="2000" b="1" dirty="0" smtClean="0">
-                <a:solidFill>
-                  <a:schemeClr val="tx1"/>
-                </a:solidFill>
-              </a:rPr>
-              <a:t>Precision:</a:t>
-            </a:r>
-            <a:r>
-              <a:rPr lang="en-US" sz="2000" dirty="0" smtClean="0">
-                <a:solidFill>
-                  <a:schemeClr val="tx1"/>
-                </a:solidFill>
-              </a:rPr>
-              <a:t> </a:t>
-            </a:r>
-            <a:r>
-              <a:rPr lang="en-US" sz="2000" dirty="0">
-                <a:solidFill>
-                  <a:schemeClr val="tx1"/>
-                </a:solidFill>
-              </a:rPr>
-              <a:t>The ratio of true positives to the sum of true positives and false positives. It answers how many selected items are relevant</a:t>
-            </a:r>
-            <a:r>
-              <a:rPr lang="en-US" sz="2000" dirty="0" smtClean="0">
-                <a:solidFill>
-                  <a:schemeClr val="tx1"/>
-                </a:solidFill>
-              </a:rPr>
-              <a:t>.</a:t>
-            </a:r>
-          </a:p>
-          <a:p>
-            <a:pPr marL="114300" indent="0">
-              <a:buNone/>
-            </a:pPr>
-            <a:endParaRPr lang="en-US" sz="2000" dirty="0">
-              <a:solidFill>
-                <a:schemeClr val="tx1"/>
-              </a:solidFill>
-            </a:endParaRPr>
-          </a:p>
-          <a:p>
-            <a:pPr marL="114300" indent="0">
-              <a:buNone/>
-            </a:pPr>
-            <a:endParaRPr lang="en-US" sz="2000" dirty="0" smtClean="0">
-              <a:solidFill>
-                <a:schemeClr val="tx1"/>
-              </a:solidFill>
-            </a:endParaRPr>
-          </a:p>
-          <a:p>
-            <a:pPr marL="114300" indent="0">
-              <a:buNone/>
-            </a:pPr>
-            <a:endParaRPr lang="en-US" sz="2000" dirty="0">
-              <a:solidFill>
-                <a:schemeClr val="tx1"/>
-              </a:solidFill>
-            </a:endParaRPr>
-          </a:p>
-          <a:p>
-            <a:pPr marL="114300" indent="0">
-              <a:buNone/>
-            </a:pPr>
-            <a:endParaRPr lang="en-US" sz="2000" dirty="0" smtClean="0">
-              <a:solidFill>
-                <a:schemeClr val="tx1"/>
-              </a:solidFill>
-            </a:endParaRPr>
-          </a:p>
-          <a:p>
-            <a:pPr marL="114300" indent="0">
-              <a:buNone/>
-            </a:pPr>
-            <a:r>
-              <a:rPr lang="en-US" b="1" dirty="0">
-                <a:solidFill>
-                  <a:schemeClr val="tx1"/>
-                </a:solidFill>
-              </a:rPr>
-              <a:t>Interpretation</a:t>
-            </a:r>
-            <a:r>
-              <a:rPr lang="en-US" dirty="0">
-                <a:solidFill>
-                  <a:schemeClr val="tx1"/>
-                </a:solidFill>
-              </a:rPr>
-              <a:t>:</a:t>
-            </a:r>
-          </a:p>
-          <a:p>
-            <a:r>
-              <a:rPr lang="en-US" b="1" dirty="0">
-                <a:solidFill>
-                  <a:schemeClr val="tx1"/>
-                </a:solidFill>
-              </a:rPr>
-              <a:t>True Positives (TP):</a:t>
-            </a:r>
-            <a:r>
-              <a:rPr lang="en-US" dirty="0">
-                <a:solidFill>
-                  <a:schemeClr val="tx1"/>
-                </a:solidFill>
-              </a:rPr>
-              <a:t> Correctly predicted positive cases.</a:t>
-            </a:r>
-          </a:p>
-          <a:p>
-            <a:r>
-              <a:rPr lang="en-US" b="1" dirty="0">
-                <a:solidFill>
-                  <a:schemeClr val="tx1"/>
-                </a:solidFill>
-              </a:rPr>
-              <a:t>False Positives (FP):</a:t>
-            </a:r>
-            <a:r>
-              <a:rPr lang="en-US" dirty="0">
-                <a:solidFill>
-                  <a:schemeClr val="tx1"/>
-                </a:solidFill>
-              </a:rPr>
-              <a:t> Negative cases incorrectly predicted as positive (Type I Error).</a:t>
-            </a:r>
-          </a:p>
-          <a:p>
-            <a:r>
-              <a:rPr lang="en-US" b="1" dirty="0">
-                <a:solidFill>
-                  <a:schemeClr val="tx1"/>
-                </a:solidFill>
-              </a:rPr>
-              <a:t>Precision</a:t>
-            </a:r>
-            <a:r>
-              <a:rPr lang="en-US" dirty="0">
-                <a:solidFill>
-                  <a:schemeClr val="tx1"/>
-                </a:solidFill>
-              </a:rPr>
-              <a:t> answers:</a:t>
-            </a:r>
-            <a:br>
-              <a:rPr lang="en-US" dirty="0">
-                <a:solidFill>
-                  <a:schemeClr val="tx1"/>
-                </a:solidFill>
-              </a:rPr>
-            </a:br>
-            <a:r>
-              <a:rPr lang="en-US" i="1" dirty="0">
-                <a:solidFill>
-                  <a:schemeClr val="tx1"/>
-                </a:solidFill>
-              </a:rPr>
-              <a:t>"Of all the instances predicted as positive, how many are actually positive?"</a:t>
-            </a:r>
-            <a:endParaRPr lang="en-US" dirty="0">
-              <a:solidFill>
-                <a:schemeClr val="tx1"/>
-              </a:solidFill>
-            </a:endParaRPr>
-          </a:p>
-          <a:p>
-            <a:pPr marL="114300" indent="0">
-              <a:buNone/>
-            </a:pPr>
-            <a:endParaRPr lang="en-US" sz="2000" dirty="0" smtClean="0">
-              <a:solidFill>
-                <a:schemeClr val="tx1"/>
-              </a:solidFill>
-            </a:endParaRPr>
-          </a:p>
-          <a:p>
-            <a:pPr marL="114300" indent="0" algn="just">
-              <a:buNone/>
-            </a:pPr>
-            <a:endParaRPr lang="en-US" sz="2000" dirty="0">
-              <a:solidFill>
-                <a:schemeClr val="tx1"/>
-              </a:solidFill>
-            </a:endParaRPr>
-          </a:p>
-          <a:p>
-            <a:endParaRPr lang="en-US" sz="2000" dirty="0">
-              <a:solidFill>
-                <a:schemeClr val="tx1"/>
-              </a:solidFill>
-            </a:endParaRPr>
-          </a:p>
-          <a:p>
-            <a:pPr marL="114300" indent="0">
-              <a:buNone/>
-            </a:pPr>
-            <a:endParaRPr lang="en-US" sz="2000" dirty="0"/>
-          </a:p>
-        </p:txBody>
-      </p:sp>
-      <p:pic>
-        <p:nvPicPr>
-          <p:cNvPr id="2" name="Picture 1"/>
-          <p:cNvPicPr>
-            <a:picLocks noChangeAspect="1"/>
-          </p:cNvPicPr>
-          <p:nvPr/>
-        </p:nvPicPr>
-        <p:blipFill>
-          <a:blip r:embed="rId3"/>
-          <a:stretch>
-            <a:fillRect/>
-          </a:stretch>
-        </p:blipFill>
-        <p:spPr>
-          <a:xfrm>
-            <a:off x="1208032" y="1547565"/>
-            <a:ext cx="6286500" cy="1123950"/>
-          </a:xfrm>
-          <a:prstGeom prst="rect">
-            <a:avLst/>
-          </a:prstGeom>
-        </p:spPr>
-      </p:pic>
-    </p:spTree>
-    <p:extLst>
-      <p:ext uri="{BB962C8B-B14F-4D97-AF65-F5344CB8AC3E}">
-        <p14:creationId xmlns:p14="http://schemas.microsoft.com/office/powerpoint/2010/main" val="3491894492"/>
-      </p:ext>
-    </p:extLst>
-  </p:cSld>
-  <p:clrMapOvr>
-    <a:masterClrMapping/>
-  </p:clrMapOvr>
-  <p:timing>
-    <p:tnLst>
-      <p:par>
-        <p:cTn id="1" dur="indefinite" restart="never" nodeType="tmRoot"/>
-      </p:par>
-    </p:tnLst>
-  </p:timing>
-</p:sld>
-</file>
-
-<file path=ppt/slides/slide5.xml><?xml version="1.0" encoding="utf-8"?>
-<p:sld xmlns:a="http://schemas.openxmlformats.org/drawingml/2006/main" xmlns:r="http://schemas.openxmlformats.org/officeDocument/2006/relationships" xmlns:p="http://schemas.openxmlformats.org/presentationml/2006/main">
-  <p:cSld>
-    <p:spTree>
-      <p:nvGrpSpPr>
-        <p:cNvPr id="1" name="Shape 102"/>
-        <p:cNvGrpSpPr/>
-        <p:nvPr/>
-      </p:nvGrpSpPr>
-      <p:grpSpPr>
-        <a:xfrm>
-          <a:off x="0" y="0"/>
-          <a:ext cx="0" cy="0"/>
-          <a:chOff x="0" y="0"/>
-          <a:chExt cx="0" cy="0"/>
-        </a:xfrm>
-      </p:grpSpPr>
-      <p:sp>
-        <p:nvSpPr>
-          <p:cNvPr id="103" name="Google Shape;103;p16"/>
-          <p:cNvSpPr txBox="1">
-            <a:spLocks noGrp="1"/>
-          </p:cNvSpPr>
-          <p:nvPr>
-            <p:ph type="title"/>
-          </p:nvPr>
-        </p:nvSpPr>
-        <p:spPr>
-          <a:xfrm>
-            <a:off x="0" y="3650"/>
-            <a:ext cx="9144000" cy="523232"/>
-          </a:xfrm>
-          <a:prstGeom prst="rect">
-            <a:avLst/>
-          </a:prstGeom>
-        </p:spPr>
-        <p:txBody>
-          <a:bodyPr spcFirstLastPara="1" wrap="square" lIns="91425" tIns="91425" rIns="91425" bIns="91425" anchor="t" anchorCtr="0">
-            <a:noAutofit/>
-          </a:bodyPr>
-          <a:lstStyle/>
-          <a:p>
-            <a:pPr algn="ctr"/>
-            <a:r>
-              <a:rPr lang="en-US" sz="2400" b="1" dirty="0" smtClean="0"/>
-              <a:t> </a:t>
-            </a:r>
-            <a:r>
-              <a:rPr lang="en-US" sz="2400" b="1" dirty="0"/>
-              <a:t>Evaluation Metrics for Classification Models</a:t>
-            </a:r>
-          </a:p>
-        </p:txBody>
-      </p:sp>
-      <p:sp>
-        <p:nvSpPr>
-          <p:cNvPr id="7" name="Google Shape;77;g258990b3369_0_16"/>
-          <p:cNvSpPr txBox="1">
-            <a:spLocks noGrp="1"/>
-          </p:cNvSpPr>
-          <p:nvPr>
-            <p:ph type="body" idx="1"/>
-          </p:nvPr>
-        </p:nvSpPr>
-        <p:spPr>
-          <a:xfrm>
-            <a:off x="201341" y="575087"/>
-            <a:ext cx="8650800" cy="4192856"/>
-          </a:xfrm>
-          <a:prstGeom prst="rect">
-            <a:avLst/>
-          </a:prstGeom>
-        </p:spPr>
-        <p:txBody>
-          <a:bodyPr spcFirstLastPara="1" wrap="square" lIns="91425" tIns="91425" rIns="91425" bIns="91425" anchor="t" anchorCtr="0">
-            <a:normAutofit/>
-          </a:bodyPr>
-          <a:lstStyle/>
-          <a:p>
-            <a:pPr marL="114300" indent="0" algn="just">
-              <a:buNone/>
-            </a:pPr>
-            <a:r>
-              <a:rPr lang="en-US" sz="2000" b="1" dirty="0" smtClean="0">
-                <a:solidFill>
-                  <a:schemeClr val="tx1"/>
-                </a:solidFill>
-              </a:rPr>
-              <a:t>Recall:</a:t>
-            </a:r>
-            <a:r>
-              <a:rPr lang="en-US" sz="2000" dirty="0">
-                <a:solidFill>
-                  <a:schemeClr val="tx1"/>
-                </a:solidFill>
-              </a:rPr>
-              <a:t> The ratio of true positives to the sum of true positives and false negatives. It answers how many relevant items are selected.</a:t>
-            </a:r>
-          </a:p>
-          <a:p>
-            <a:pPr marL="114300" indent="0">
-              <a:buNone/>
-            </a:pPr>
-            <a:endParaRPr lang="en-US" sz="2000" dirty="0">
-              <a:solidFill>
-                <a:schemeClr val="tx1"/>
-              </a:solidFill>
-            </a:endParaRPr>
-          </a:p>
-          <a:p>
-            <a:pPr marL="114300" indent="0">
-              <a:buNone/>
-            </a:pPr>
-            <a:endParaRPr lang="en-US" sz="2000" dirty="0" smtClean="0">
-              <a:solidFill>
-                <a:schemeClr val="tx1"/>
-              </a:solidFill>
-            </a:endParaRPr>
-          </a:p>
-          <a:p>
-            <a:pPr marL="114300" indent="0">
-              <a:buNone/>
-            </a:pPr>
-            <a:endParaRPr lang="en-US" sz="2000" dirty="0">
-              <a:solidFill>
-                <a:schemeClr val="tx1"/>
-              </a:solidFill>
-            </a:endParaRPr>
-          </a:p>
-          <a:p>
-            <a:pPr marL="114300" indent="0">
-              <a:buNone/>
-            </a:pPr>
-            <a:endParaRPr lang="en-US" b="1" dirty="0" smtClean="0">
-              <a:solidFill>
-                <a:schemeClr val="tx1"/>
-              </a:solidFill>
-            </a:endParaRPr>
-          </a:p>
-          <a:p>
-            <a:pPr marL="114300" indent="0">
-              <a:buNone/>
-            </a:pPr>
-            <a:r>
-              <a:rPr lang="en-US" b="1" dirty="0" smtClean="0">
-                <a:solidFill>
-                  <a:schemeClr val="tx1"/>
-                </a:solidFill>
-              </a:rPr>
-              <a:t>Interpretation</a:t>
-            </a:r>
-            <a:endParaRPr lang="en-US" dirty="0">
-              <a:solidFill>
-                <a:schemeClr val="tx1"/>
-              </a:solidFill>
-            </a:endParaRPr>
-          </a:p>
-          <a:p>
-            <a:r>
-              <a:rPr lang="en-US" b="1" dirty="0">
-                <a:solidFill>
-                  <a:schemeClr val="tx1"/>
-                </a:solidFill>
-              </a:rPr>
-              <a:t>True Positives (TP):</a:t>
-            </a:r>
-            <a:r>
-              <a:rPr lang="en-US" dirty="0">
-                <a:solidFill>
-                  <a:schemeClr val="tx1"/>
-                </a:solidFill>
-              </a:rPr>
-              <a:t> Correctly predicted positive cases.</a:t>
-            </a:r>
-          </a:p>
-          <a:p>
-            <a:r>
-              <a:rPr lang="en-US" b="1" dirty="0">
-                <a:solidFill>
-                  <a:schemeClr val="tx1"/>
-                </a:solidFill>
-              </a:rPr>
-              <a:t>False Negatives (FN):</a:t>
-            </a:r>
-            <a:r>
-              <a:rPr lang="en-US" dirty="0">
-                <a:solidFill>
-                  <a:schemeClr val="tx1"/>
-                </a:solidFill>
-              </a:rPr>
-              <a:t> Positive cases incorrectly predicted as negative (Type II Error).</a:t>
-            </a:r>
-          </a:p>
-          <a:p>
-            <a:r>
-              <a:rPr lang="en-US" b="1" dirty="0">
-                <a:solidFill>
-                  <a:schemeClr val="tx1"/>
-                </a:solidFill>
-              </a:rPr>
-              <a:t>Recall</a:t>
-            </a:r>
-            <a:r>
-              <a:rPr lang="en-US" dirty="0">
-                <a:solidFill>
-                  <a:schemeClr val="tx1"/>
-                </a:solidFill>
-              </a:rPr>
-              <a:t> answers:</a:t>
-            </a:r>
-            <a:br>
-              <a:rPr lang="en-US" dirty="0">
-                <a:solidFill>
-                  <a:schemeClr val="tx1"/>
-                </a:solidFill>
-              </a:rPr>
-            </a:br>
-            <a:r>
-              <a:rPr lang="en-US" i="1" dirty="0">
-                <a:solidFill>
-                  <a:schemeClr val="tx1"/>
-                </a:solidFill>
-              </a:rPr>
-              <a:t>"Of all the actual positive instances, how many did we correctly predict?"</a:t>
-            </a:r>
-            <a:endParaRPr lang="en-US" dirty="0">
-              <a:solidFill>
-                <a:schemeClr val="tx1"/>
-              </a:solidFill>
-            </a:endParaRPr>
-          </a:p>
-          <a:p>
-            <a:pPr marL="114300" indent="0">
-              <a:buNone/>
-            </a:pPr>
-            <a:endParaRPr lang="en-US" sz="2000" dirty="0" smtClean="0">
-              <a:solidFill>
-                <a:schemeClr val="tx1"/>
-              </a:solidFill>
-            </a:endParaRPr>
-          </a:p>
-          <a:p>
-            <a:pPr marL="114300" indent="0" algn="just">
-              <a:buNone/>
-            </a:pPr>
-            <a:endParaRPr lang="en-US" sz="2000" dirty="0">
-              <a:solidFill>
-                <a:schemeClr val="tx1"/>
-              </a:solidFill>
-            </a:endParaRPr>
-          </a:p>
-          <a:p>
-            <a:endParaRPr lang="en-US" sz="2000" dirty="0">
-              <a:solidFill>
-                <a:schemeClr val="tx1"/>
-              </a:solidFill>
-            </a:endParaRPr>
-          </a:p>
-          <a:p>
-            <a:pPr marL="114300" indent="0">
-              <a:buNone/>
-            </a:pPr>
-            <a:endParaRPr lang="en-US" sz="2000" dirty="0"/>
-          </a:p>
-        </p:txBody>
-      </p:sp>
-      <p:pic>
-        <p:nvPicPr>
-          <p:cNvPr id="3" name="Picture 2"/>
-          <p:cNvPicPr>
-            <a:picLocks noChangeAspect="1"/>
-          </p:cNvPicPr>
-          <p:nvPr/>
-        </p:nvPicPr>
-        <p:blipFill>
-          <a:blip r:embed="rId3"/>
-          <a:stretch>
-            <a:fillRect/>
-          </a:stretch>
-        </p:blipFill>
-        <p:spPr>
-          <a:xfrm>
-            <a:off x="1559703" y="1540422"/>
-            <a:ext cx="5934075" cy="990600"/>
-          </a:xfrm>
-          <a:prstGeom prst="rect">
-            <a:avLst/>
-          </a:prstGeom>
-        </p:spPr>
-      </p:pic>
-    </p:spTree>
-    <p:extLst>
-      <p:ext uri="{BB962C8B-B14F-4D97-AF65-F5344CB8AC3E}">
-        <p14:creationId xmlns:p14="http://schemas.microsoft.com/office/powerpoint/2010/main" val="3594793725"/>
-      </p:ext>
-    </p:extLst>
-  </p:cSld>
-  <p:clrMapOvr>
-    <a:masterClrMapping/>
-  </p:clrMapOvr>
-  <p:timing>
-    <p:tnLst>
-      <p:par>
-        <p:cTn id="1" dur="indefinite" restart="never" nodeType="tmRoot"/>
-      </p:par>
-    </p:tnLst>
-  </p:timing>
-</p:sld>
-</file>
-
-<file path=ppt/slides/slide6.xml><?xml version="1.0" encoding="utf-8"?>
-<p:sld xmlns:a="http://schemas.openxmlformats.org/drawingml/2006/main" xmlns:r="http://schemas.openxmlformats.org/officeDocument/2006/relationships" xmlns:p="http://schemas.openxmlformats.org/presentationml/2006/main">
-  <p:cSld>
-    <p:spTree>
-      <p:nvGrpSpPr>
-        <p:cNvPr id="1" name="Shape 102"/>
-        <p:cNvGrpSpPr/>
-        <p:nvPr/>
-      </p:nvGrpSpPr>
-      <p:grpSpPr>
-        <a:xfrm>
-          <a:off x="0" y="0"/>
-          <a:ext cx="0" cy="0"/>
-          <a:chOff x="0" y="0"/>
-          <a:chExt cx="0" cy="0"/>
-        </a:xfrm>
-      </p:grpSpPr>
-      <p:sp>
-        <p:nvSpPr>
-          <p:cNvPr id="103" name="Google Shape;103;p16"/>
-          <p:cNvSpPr txBox="1">
-            <a:spLocks noGrp="1"/>
-          </p:cNvSpPr>
-          <p:nvPr>
-            <p:ph type="title"/>
-          </p:nvPr>
-        </p:nvSpPr>
-        <p:spPr>
-          <a:xfrm>
-            <a:off x="0" y="3650"/>
-            <a:ext cx="9144000" cy="523232"/>
-          </a:xfrm>
-          <a:prstGeom prst="rect">
-            <a:avLst/>
-          </a:prstGeom>
-        </p:spPr>
-        <p:txBody>
-          <a:bodyPr spcFirstLastPara="1" wrap="square" lIns="91425" tIns="91425" rIns="91425" bIns="91425" anchor="t" anchorCtr="0">
-            <a:noAutofit/>
-          </a:bodyPr>
-          <a:lstStyle/>
-          <a:p>
-            <a:pPr algn="ctr"/>
-            <a:r>
-              <a:rPr lang="en-US" sz="2400" b="1" dirty="0" smtClean="0"/>
-              <a:t> </a:t>
-            </a:r>
-            <a:r>
-              <a:rPr lang="en-US" sz="2400" b="1" dirty="0"/>
-              <a:t>Evaluation Metrics for Classification Models</a:t>
-            </a:r>
-          </a:p>
-        </p:txBody>
-      </p:sp>
-      <p:sp>
-        <p:nvSpPr>
-          <p:cNvPr id="7" name="Google Shape;77;g258990b3369_0_16"/>
-          <p:cNvSpPr txBox="1">
-            <a:spLocks noGrp="1"/>
-          </p:cNvSpPr>
-          <p:nvPr>
-            <p:ph type="body" idx="1"/>
-          </p:nvPr>
-        </p:nvSpPr>
-        <p:spPr>
-          <a:xfrm>
-            <a:off x="201341" y="575087"/>
-            <a:ext cx="8650800" cy="4192856"/>
-          </a:xfrm>
-          <a:prstGeom prst="rect">
-            <a:avLst/>
-          </a:prstGeom>
-        </p:spPr>
-        <p:txBody>
-          <a:bodyPr spcFirstLastPara="1" wrap="square" lIns="91425" tIns="91425" rIns="91425" bIns="91425" anchor="t" anchorCtr="0">
-            <a:normAutofit/>
-          </a:bodyPr>
-          <a:lstStyle/>
-          <a:p>
-            <a:pPr marL="114300" indent="0" algn="just">
-              <a:buNone/>
-            </a:pPr>
-            <a:r>
-              <a:rPr lang="en-US" sz="2000" b="1" dirty="0" smtClean="0">
-                <a:solidFill>
-                  <a:schemeClr val="tx1"/>
-                </a:solidFill>
-              </a:rPr>
-              <a:t>F1 Score:</a:t>
-            </a:r>
-            <a:r>
-              <a:rPr lang="en-US" sz="2000" dirty="0" smtClean="0">
-                <a:solidFill>
-                  <a:schemeClr val="tx1"/>
-                </a:solidFill>
-              </a:rPr>
-              <a:t> </a:t>
-            </a:r>
-            <a:r>
-              <a:rPr lang="en-US" sz="2000" dirty="0">
-                <a:solidFill>
-                  <a:schemeClr val="tx1"/>
-                </a:solidFill>
-              </a:rPr>
-              <a:t>The harmonic mean of precision and recall. It balances precision and recall.</a:t>
-            </a:r>
-          </a:p>
-          <a:p>
-            <a:pPr marL="114300" indent="0">
-              <a:buNone/>
-            </a:pPr>
-            <a:endParaRPr lang="en-US" sz="2000" dirty="0" smtClean="0">
-              <a:solidFill>
-                <a:schemeClr val="tx1"/>
-              </a:solidFill>
-            </a:endParaRPr>
-          </a:p>
-          <a:p>
-            <a:pPr marL="114300" indent="0">
-              <a:buNone/>
-            </a:pPr>
-            <a:endParaRPr lang="en-US" sz="2000" dirty="0" smtClean="0">
-              <a:solidFill>
-                <a:schemeClr val="tx1"/>
-              </a:solidFill>
-            </a:endParaRPr>
-          </a:p>
-          <a:p>
-            <a:pPr marL="114300" indent="0">
-              <a:buNone/>
-            </a:pPr>
-            <a:endParaRPr lang="en-US" sz="2000" dirty="0">
-              <a:solidFill>
-                <a:schemeClr val="tx1"/>
-              </a:solidFill>
-            </a:endParaRPr>
-          </a:p>
-          <a:p>
-            <a:pPr marL="114300" indent="0">
-              <a:buNone/>
-            </a:pPr>
-            <a:endParaRPr lang="en-US" b="1" dirty="0" smtClean="0">
-              <a:solidFill>
-                <a:schemeClr val="tx1"/>
-              </a:solidFill>
-            </a:endParaRPr>
-          </a:p>
-          <a:p>
-            <a:pPr marL="114300" indent="0">
-              <a:buNone/>
-            </a:pPr>
-            <a:r>
-              <a:rPr lang="en-US" b="1" dirty="0">
-                <a:solidFill>
-                  <a:schemeClr val="tx1"/>
-                </a:solidFill>
-              </a:rPr>
-              <a:t>Interpretation</a:t>
-            </a:r>
-            <a:endParaRPr lang="en-US" dirty="0">
-              <a:solidFill>
-                <a:schemeClr val="tx1"/>
-              </a:solidFill>
-            </a:endParaRPr>
-          </a:p>
-          <a:p>
-            <a:r>
-              <a:rPr lang="en-US" b="1" dirty="0">
-                <a:solidFill>
-                  <a:schemeClr val="tx1"/>
-                </a:solidFill>
-              </a:rPr>
-              <a:t>Balances Precision and Recall</a:t>
-            </a:r>
-            <a:r>
-              <a:rPr lang="en-US" dirty="0">
-                <a:solidFill>
-                  <a:schemeClr val="tx1"/>
-                </a:solidFill>
-              </a:rPr>
-              <a:t>: Harmonic mean (punishes extreme values more than arithmetic mean).</a:t>
-            </a:r>
-          </a:p>
-          <a:p>
-            <a:r>
-              <a:rPr lang="en-US" b="1" dirty="0">
-                <a:solidFill>
-                  <a:schemeClr val="tx1"/>
-                </a:solidFill>
-              </a:rPr>
-              <a:t>Range</a:t>
-            </a:r>
-            <a:r>
-              <a:rPr lang="en-US" dirty="0">
-                <a:solidFill>
-                  <a:schemeClr val="tx1"/>
-                </a:solidFill>
-              </a:rPr>
-              <a:t>: 0 (worst) to 1 (best).</a:t>
-            </a:r>
-          </a:p>
-          <a:p>
-            <a:r>
-              <a:rPr lang="en-US" b="1" dirty="0">
-                <a:solidFill>
-                  <a:schemeClr val="tx1"/>
-                </a:solidFill>
-              </a:rPr>
-              <a:t>Answers</a:t>
-            </a:r>
-            <a:r>
-              <a:rPr lang="en-US" dirty="0">
-                <a:solidFill>
-                  <a:schemeClr val="tx1"/>
-                </a:solidFill>
-              </a:rPr>
-              <a:t>:</a:t>
-            </a:r>
-            <a:br>
-              <a:rPr lang="en-US" dirty="0">
-                <a:solidFill>
-                  <a:schemeClr val="tx1"/>
-                </a:solidFill>
-              </a:rPr>
-            </a:br>
-            <a:r>
-              <a:rPr lang="en-US" i="1" dirty="0">
-                <a:solidFill>
-                  <a:schemeClr val="tx1"/>
-                </a:solidFill>
-              </a:rPr>
-              <a:t>"What is the tradeoff between precision and recall?"</a:t>
-            </a:r>
-            <a:endParaRPr lang="en-US" dirty="0">
-              <a:solidFill>
-                <a:schemeClr val="tx1"/>
-              </a:solidFill>
-            </a:endParaRPr>
-          </a:p>
-          <a:p>
-            <a:pPr marL="114300" indent="0">
-              <a:buNone/>
-            </a:pPr>
-            <a:endParaRPr lang="en-US" sz="2000" dirty="0" smtClean="0">
-              <a:solidFill>
-                <a:schemeClr val="tx1"/>
-              </a:solidFill>
-            </a:endParaRPr>
-          </a:p>
-          <a:p>
-            <a:pPr marL="114300" indent="0" algn="just">
-              <a:buNone/>
-            </a:pPr>
-            <a:endParaRPr lang="en-US" sz="2000" dirty="0">
-              <a:solidFill>
-                <a:schemeClr val="tx1"/>
-              </a:solidFill>
-            </a:endParaRPr>
-          </a:p>
-          <a:p>
-            <a:endParaRPr lang="en-US" sz="2000" dirty="0">
-              <a:solidFill>
-                <a:schemeClr val="tx1"/>
-              </a:solidFill>
-            </a:endParaRPr>
-          </a:p>
-          <a:p>
-            <a:pPr marL="114300" indent="0">
-              <a:buNone/>
-            </a:pPr>
-            <a:endParaRPr lang="en-US" sz="2000" dirty="0"/>
-          </a:p>
-        </p:txBody>
-      </p:sp>
-      <p:pic>
-        <p:nvPicPr>
-          <p:cNvPr id="2" name="Picture 1"/>
-          <p:cNvPicPr>
-            <a:picLocks noChangeAspect="1"/>
-          </p:cNvPicPr>
-          <p:nvPr/>
-        </p:nvPicPr>
-        <p:blipFill>
-          <a:blip r:embed="rId3"/>
-          <a:stretch>
-            <a:fillRect/>
-          </a:stretch>
-        </p:blipFill>
-        <p:spPr>
-          <a:xfrm>
-            <a:off x="1750203" y="1528927"/>
-            <a:ext cx="5553075" cy="971550"/>
-          </a:xfrm>
-          <a:prstGeom prst="rect">
-            <a:avLst/>
-          </a:prstGeom>
-        </p:spPr>
-      </p:pic>
-    </p:spTree>
-    <p:extLst>
-      <p:ext uri="{BB962C8B-B14F-4D97-AF65-F5344CB8AC3E}">
-        <p14:creationId xmlns:p14="http://schemas.microsoft.com/office/powerpoint/2010/main" val="2360432693"/>
-      </p:ext>
-    </p:extLst>
-  </p:cSld>
-  <p:clrMapOvr>
-    <a:masterClrMapping/>
-  </p:clrMapOvr>
-  <p:timing>
-    <p:tnLst>
-      <p:par>
-        <p:cTn id="1" dur="indefinite" restart="never" nodeType="tmRoot"/>
-      </p:par>
-    </p:tnLst>
-  </p:timing>
-</p:sld>
-</file>
-
-<file path=ppt/slides/slide7.xml><?xml version="1.0" encoding="utf-8"?>
-<p:sld xmlns:a="http://schemas.openxmlformats.org/drawingml/2006/main" xmlns:r="http://schemas.openxmlformats.org/officeDocument/2006/relationships" xmlns:p="http://schemas.openxmlformats.org/presentationml/2006/main">
-  <p:cSld>
-    <p:spTree>
-      <p:nvGrpSpPr>
-        <p:cNvPr id="1" name="Shape 102"/>
-        <p:cNvGrpSpPr/>
-        <p:nvPr/>
-      </p:nvGrpSpPr>
-      <p:grpSpPr>
-        <a:xfrm>
-          <a:off x="0" y="0"/>
-          <a:ext cx="0" cy="0"/>
-          <a:chOff x="0" y="0"/>
-          <a:chExt cx="0" cy="0"/>
-        </a:xfrm>
-      </p:grpSpPr>
-      <p:sp>
-        <p:nvSpPr>
-          <p:cNvPr id="103" name="Google Shape;103;p16"/>
-          <p:cNvSpPr txBox="1">
-            <a:spLocks noGrp="1"/>
-          </p:cNvSpPr>
-          <p:nvPr>
-            <p:ph type="title"/>
-          </p:nvPr>
-        </p:nvSpPr>
-        <p:spPr>
-          <a:xfrm>
-            <a:off x="0" y="3650"/>
-            <a:ext cx="9144000" cy="523232"/>
-          </a:xfrm>
-          <a:prstGeom prst="rect">
-            <a:avLst/>
-          </a:prstGeom>
-        </p:spPr>
-        <p:txBody>
-          <a:bodyPr spcFirstLastPara="1" wrap="square" lIns="91425" tIns="91425" rIns="91425" bIns="91425" anchor="t" anchorCtr="0">
-            <a:noAutofit/>
-          </a:bodyPr>
-          <a:lstStyle/>
-          <a:p>
-            <a:pPr algn="ctr"/>
-            <a:r>
-              <a:rPr lang="en-US" sz="2400" b="1" dirty="0" smtClean="0"/>
-              <a:t> </a:t>
-            </a:r>
-            <a:r>
               <a:rPr lang="en-US" sz="2400" b="1" dirty="0" smtClean="0">
                 <a:solidFill>
                   <a:schemeClr val="tx1"/>
@@ -11252,7 +9136,7 @@
 </p:sld>
 </file>
 
-<file path=ppt/slides/slide8.xml><?xml version="1.0" encoding="utf-8"?>
+<file path=ppt/slides/slide11.xml><?xml version="1.0" encoding="utf-8"?>
 <p:sld xmlns:a="http://schemas.openxmlformats.org/drawingml/2006/main" xmlns:r="http://schemas.openxmlformats.org/officeDocument/2006/relationships" xmlns:p="http://schemas.openxmlformats.org/presentationml/2006/main">
   <p:cSld>
     <p:spTree>
@@ -11425,7 +9309,7 @@
 </p:sld>
 </file>
 
-<file path=ppt/slides/slide9.xml><?xml version="1.0" encoding="utf-8"?>
+<file path=ppt/slides/slide12.xml><?xml version="1.0" encoding="utf-8"?>
 <p:sld xmlns:a="http://schemas.openxmlformats.org/drawingml/2006/main" xmlns:r="http://schemas.openxmlformats.org/officeDocument/2006/relationships" xmlns:p="http://schemas.openxmlformats.org/presentationml/2006/main">
   <p:cSld>
     <p:spTree>
@@ -11599,6 +9483,2950 @@
   <p:clrMapOvr>
     <a:masterClrMapping/>
   </p:clrMapOvr>
+</p:sld>
+</file>
+
+<file path=ppt/slides/slide13.xml><?xml version="1.0" encoding="utf-8"?>
+<p:sld xmlns:a="http://schemas.openxmlformats.org/drawingml/2006/main" xmlns:r="http://schemas.openxmlformats.org/officeDocument/2006/relationships" xmlns:p="http://schemas.openxmlformats.org/presentationml/2006/main">
+  <p:cSld>
+    <p:spTree>
+      <p:nvGrpSpPr>
+        <p:cNvPr id="1" name="Shape 102"/>
+        <p:cNvGrpSpPr/>
+        <p:nvPr/>
+      </p:nvGrpSpPr>
+      <p:grpSpPr>
+        <a:xfrm>
+          <a:off x="0" y="0"/>
+          <a:ext cx="0" cy="0"/>
+          <a:chOff x="0" y="0"/>
+          <a:chExt cx="0" cy="0"/>
+        </a:xfrm>
+      </p:grpSpPr>
+      <p:sp>
+        <p:nvSpPr>
+          <p:cNvPr id="103" name="Google Shape;103;p16"/>
+          <p:cNvSpPr txBox="1">
+            <a:spLocks noGrp="1"/>
+          </p:cNvSpPr>
+          <p:nvPr>
+            <p:ph type="title"/>
+          </p:nvPr>
+        </p:nvSpPr>
+        <p:spPr>
+          <a:xfrm>
+            <a:off x="0" y="3650"/>
+            <a:ext cx="9144000" cy="523232"/>
+          </a:xfrm>
+          <a:prstGeom prst="rect">
+            <a:avLst/>
+          </a:prstGeom>
+        </p:spPr>
+        <p:txBody>
+          <a:bodyPr spcFirstLastPara="1" wrap="square" lIns="91425" tIns="91425" rIns="91425" bIns="91425" anchor="t" anchorCtr="0">
+            <a:noAutofit/>
+          </a:bodyPr>
+          <a:lstStyle/>
+          <a:p>
+            <a:pPr algn="ctr"/>
+            <a:r>
+              <a:rPr lang="en-US" sz="2400" b="1" dirty="0" smtClean="0"/>
+              <a:t> </a:t>
+            </a:r>
+            <a:r>
+              <a:rPr lang="en" sz="2400" b="1" dirty="0" smtClean="0"/>
+              <a:t>COMPONENTS OF SUPERVISED MACHINE LEARNING</a:t>
+            </a:r>
+            <a:endParaRPr lang="en-US" sz="2400" b="1" dirty="0"/>
+          </a:p>
+        </p:txBody>
+      </p:sp>
+      <p:sp>
+        <p:nvSpPr>
+          <p:cNvPr id="7" name="Google Shape;77;g258990b3369_0_16"/>
+          <p:cNvSpPr txBox="1">
+            <a:spLocks noGrp="1"/>
+          </p:cNvSpPr>
+          <p:nvPr>
+            <p:ph type="body" idx="1"/>
+          </p:nvPr>
+        </p:nvSpPr>
+        <p:spPr>
+          <a:xfrm>
+            <a:off x="201341" y="575087"/>
+            <a:ext cx="8650800" cy="2252089"/>
+          </a:xfrm>
+          <a:prstGeom prst="rect">
+            <a:avLst/>
+          </a:prstGeom>
+        </p:spPr>
+        <p:txBody>
+          <a:bodyPr spcFirstLastPara="1" wrap="square" lIns="91425" tIns="91425" rIns="91425" bIns="91425" anchor="t" anchorCtr="0">
+            <a:normAutofit fontScale="92500" lnSpcReduction="10000"/>
+          </a:bodyPr>
+          <a:lstStyle/>
+          <a:p>
+            <a:pPr marL="114300" indent="0" algn="just">
+              <a:buNone/>
+            </a:pPr>
+            <a:r>
+              <a:rPr lang="en-US" sz="2000" b="1" u="sng" dirty="0">
+                <a:solidFill>
+                  <a:schemeClr val="tx1"/>
+                </a:solidFill>
+              </a:rPr>
+              <a:t>Cost Function (Loss Function)</a:t>
+            </a:r>
+            <a:r>
+              <a:rPr lang="en-US" sz="2000" u="sng" dirty="0">
+                <a:solidFill>
+                  <a:schemeClr val="tx1"/>
+                </a:solidFill>
+              </a:rPr>
+              <a:t>:</a:t>
+            </a:r>
+          </a:p>
+          <a:p>
+            <a:pPr marL="114300" indent="0" algn="just">
+              <a:buNone/>
+            </a:pPr>
+            <a:r>
+              <a:rPr lang="en-US" sz="1900" dirty="0">
+                <a:solidFill>
+                  <a:schemeClr val="tx1"/>
+                </a:solidFill>
+              </a:rPr>
+              <a:t>The cost function measures how well the model's predictions match the actual labels in the training </a:t>
+            </a:r>
+            <a:r>
+              <a:rPr lang="en-US" sz="1900" dirty="0" smtClean="0">
+                <a:solidFill>
+                  <a:schemeClr val="tx1"/>
+                </a:solidFill>
+              </a:rPr>
+              <a:t>data OR </a:t>
+            </a:r>
+            <a:r>
+              <a:rPr lang="en-US" sz="1900" dirty="0">
+                <a:solidFill>
+                  <a:schemeClr val="tx1"/>
+                </a:solidFill>
+              </a:rPr>
+              <a:t>Cost (or </a:t>
+            </a:r>
+            <a:r>
+              <a:rPr lang="en-US" sz="1900" b="1" dirty="0">
+                <a:solidFill>
+                  <a:schemeClr val="tx1"/>
+                </a:solidFill>
+              </a:rPr>
+              <a:t>loss</a:t>
+            </a:r>
+            <a:r>
+              <a:rPr lang="en-US" sz="1900" dirty="0">
+                <a:solidFill>
+                  <a:schemeClr val="tx1"/>
+                </a:solidFill>
+              </a:rPr>
+              <a:t>) functions measure </a:t>
+            </a:r>
+            <a:r>
+              <a:rPr lang="en-US" sz="1900" b="1" dirty="0">
+                <a:solidFill>
+                  <a:schemeClr val="tx1"/>
+                </a:solidFill>
+              </a:rPr>
+              <a:t>how wrong</a:t>
+            </a:r>
+            <a:r>
+              <a:rPr lang="en-US" sz="1900" dirty="0">
+                <a:solidFill>
+                  <a:schemeClr val="tx1"/>
+                </a:solidFill>
+              </a:rPr>
+              <a:t> a machine learning model's predictions are compared to the actual </a:t>
+            </a:r>
+            <a:r>
+              <a:rPr lang="en-US" sz="1900" dirty="0" smtClean="0">
+                <a:solidFill>
+                  <a:schemeClr val="tx1"/>
+                </a:solidFill>
+              </a:rPr>
+              <a:t>values. </a:t>
+            </a:r>
+            <a:r>
+              <a:rPr lang="en-US" sz="1900" dirty="0" smtClean="0">
+                <a:solidFill>
+                  <a:schemeClr val="tx1"/>
+                </a:solidFill>
+              </a:rPr>
+              <a:t>It </a:t>
+            </a:r>
+            <a:r>
+              <a:rPr lang="en-US" sz="1900" dirty="0">
+                <a:solidFill>
+                  <a:schemeClr val="tx1"/>
+                </a:solidFill>
+              </a:rPr>
+              <a:t>quantifies the error between the predicted and actual outputs. Common cost functions include Mean Squared Error (MSE) for regression tasks and Cross-Entropy Loss for classification tasks</a:t>
+            </a:r>
+            <a:r>
+              <a:rPr lang="en-US" sz="1900" dirty="0" smtClean="0">
+                <a:solidFill>
+                  <a:schemeClr val="tx1"/>
+                </a:solidFill>
+              </a:rPr>
+              <a:t>.</a:t>
+            </a:r>
+            <a:endParaRPr lang="en-US" sz="1900" dirty="0">
+              <a:solidFill>
+                <a:schemeClr val="tx1"/>
+              </a:solidFill>
+            </a:endParaRPr>
+          </a:p>
+        </p:txBody>
+      </p:sp>
+      <p:pic>
+        <p:nvPicPr>
+          <p:cNvPr id="3074" name="Picture 2"/>
+          <p:cNvPicPr>
+            <a:picLocks noChangeAspect="1" noChangeArrowheads="1"/>
+          </p:cNvPicPr>
+          <p:nvPr/>
+        </p:nvPicPr>
+        <p:blipFill>
+          <a:blip r:embed="rId3">
+            <a:extLst>
+              <a:ext uri="{28A0092B-C50C-407E-A947-70E740481C1C}">
+                <a14:useLocalDpi xmlns:a14="http://schemas.microsoft.com/office/drawing/2010/main" val="0"/>
+              </a:ext>
+            </a:extLst>
+          </a:blip>
+          <a:srcRect/>
+          <a:stretch>
+            <a:fillRect/>
+          </a:stretch>
+        </p:blipFill>
+        <p:spPr bwMode="auto">
+          <a:xfrm>
+            <a:off x="1505825" y="2886206"/>
+            <a:ext cx="5591175" cy="1533525"/>
+          </a:xfrm>
+          <a:prstGeom prst="rect">
+            <a:avLst/>
+          </a:prstGeom>
+          <a:noFill/>
+          <a:ln>
+            <a:noFill/>
+          </a:ln>
+          <a:effectLst/>
+          <a:extLst>
+            <a:ext uri="{909E8E84-426E-40DD-AFC4-6F175D3DCCD1}">
+              <a14:hiddenFill xmlns:a14="http://schemas.microsoft.com/office/drawing/2010/main">
+                <a:solidFill>
+                  <a:schemeClr val="accent1"/>
+                </a:solidFill>
+              </a14:hiddenFill>
+            </a:ext>
+            <a:ext uri="{91240B29-F687-4F45-9708-019B960494DF}">
+              <a14:hiddenLine xmlns:a14="http://schemas.microsoft.com/office/drawing/2010/main" w="9525">
+                <a:solidFill>
+                  <a:schemeClr val="tx1"/>
+                </a:solidFill>
+                <a:miter lim="800000"/>
+                <a:headEnd/>
+                <a:tailEnd/>
+              </a14:hiddenLine>
+            </a:ext>
+            <a:ext uri="{AF507438-7753-43E0-B8FC-AC1667EBCBE1}">
+              <a14:hiddenEffects xmlns:a14="http://schemas.microsoft.com/office/drawing/2010/main">
+                <a:effectLst>
+                  <a:outerShdw dist="35921" dir="2700000" algn="ctr" rotWithShape="0">
+                    <a:schemeClr val="bg2"/>
+                  </a:outerShdw>
+                </a:effectLst>
+              </a14:hiddenEffects>
+            </a:ext>
+          </a:extLst>
+        </p:spPr>
+      </p:pic>
+    </p:spTree>
+    <p:extLst>
+      <p:ext uri="{BB962C8B-B14F-4D97-AF65-F5344CB8AC3E}">
+        <p14:creationId xmlns:p14="http://schemas.microsoft.com/office/powerpoint/2010/main" val="1723408440"/>
+      </p:ext>
+    </p:extLst>
+  </p:cSld>
+  <p:clrMapOvr>
+    <a:masterClrMapping/>
+  </p:clrMapOvr>
+  <p:timing>
+    <p:tnLst>
+      <p:par>
+        <p:cTn id="1" dur="indefinite" restart="never" nodeType="tmRoot"/>
+      </p:par>
+    </p:tnLst>
+  </p:timing>
+</p:sld>
+</file>
+
+<file path=ppt/slides/slide14.xml><?xml version="1.0" encoding="utf-8"?>
+<p:sld xmlns:a="http://schemas.openxmlformats.org/drawingml/2006/main" xmlns:r="http://schemas.openxmlformats.org/officeDocument/2006/relationships" xmlns:p="http://schemas.openxmlformats.org/presentationml/2006/main">
+  <p:cSld>
+    <p:spTree>
+      <p:nvGrpSpPr>
+        <p:cNvPr id="1" name=""/>
+        <p:cNvGrpSpPr/>
+        <p:nvPr/>
+      </p:nvGrpSpPr>
+      <p:grpSpPr>
+        <a:xfrm>
+          <a:off x="0" y="0"/>
+          <a:ext cx="0" cy="0"/>
+          <a:chOff x="0" y="0"/>
+          <a:chExt cx="0" cy="0"/>
+        </a:xfrm>
+      </p:grpSpPr>
+      <p:sp>
+        <p:nvSpPr>
+          <p:cNvPr id="6" name="Google Shape;103;p16"/>
+          <p:cNvSpPr txBox="1">
+            <a:spLocks noGrp="1"/>
+          </p:cNvSpPr>
+          <p:nvPr>
+            <p:ph type="title"/>
+          </p:nvPr>
+        </p:nvSpPr>
+        <p:spPr>
+          <a:xfrm>
+            <a:off x="0" y="3650"/>
+            <a:ext cx="9144000" cy="523232"/>
+          </a:xfrm>
+          <a:prstGeom prst="rect">
+            <a:avLst/>
+          </a:prstGeom>
+        </p:spPr>
+        <p:txBody>
+          <a:bodyPr spcFirstLastPara="1" wrap="square" lIns="91425" tIns="91425" rIns="91425" bIns="91425" anchor="t" anchorCtr="0">
+            <a:noAutofit/>
+          </a:bodyPr>
+          <a:lstStyle/>
+          <a:p>
+            <a:pPr algn="ctr"/>
+            <a:r>
+              <a:rPr lang="en-US" sz="2400" b="1" dirty="0" smtClean="0"/>
+              <a:t>COST / LOSS FUNCTION</a:t>
+            </a:r>
+            <a:endParaRPr lang="en-US" sz="2400" b="1" dirty="0"/>
+          </a:p>
+        </p:txBody>
+      </p:sp>
+      <p:pic>
+        <p:nvPicPr>
+          <p:cNvPr id="3074" name="Picture 2"/>
+          <p:cNvPicPr>
+            <a:picLocks noChangeAspect="1" noChangeArrowheads="1"/>
+          </p:cNvPicPr>
+          <p:nvPr/>
+        </p:nvPicPr>
+        <p:blipFill>
+          <a:blip r:embed="rId2">
+            <a:extLst>
+              <a:ext uri="{28A0092B-C50C-407E-A947-70E740481C1C}">
+                <a14:useLocalDpi xmlns:a14="http://schemas.microsoft.com/office/drawing/2010/main" val="0"/>
+              </a:ext>
+            </a:extLst>
+          </a:blip>
+          <a:srcRect/>
+          <a:stretch>
+            <a:fillRect/>
+          </a:stretch>
+        </p:blipFill>
+        <p:spPr bwMode="auto">
+          <a:xfrm>
+            <a:off x="602073" y="783771"/>
+            <a:ext cx="6552078" cy="3150248"/>
+          </a:xfrm>
+          <a:prstGeom prst="rect">
+            <a:avLst/>
+          </a:prstGeom>
+          <a:noFill/>
+          <a:ln>
+            <a:noFill/>
+          </a:ln>
+          <a:effectLst/>
+          <a:extLst>
+            <a:ext uri="{909E8E84-426E-40DD-AFC4-6F175D3DCCD1}">
+              <a14:hiddenFill xmlns:a14="http://schemas.microsoft.com/office/drawing/2010/main">
+                <a:solidFill>
+                  <a:schemeClr val="accent1"/>
+                </a:solidFill>
+              </a14:hiddenFill>
+            </a:ext>
+            <a:ext uri="{91240B29-F687-4F45-9708-019B960494DF}">
+              <a14:hiddenLine xmlns:a14="http://schemas.microsoft.com/office/drawing/2010/main" w="9525">
+                <a:solidFill>
+                  <a:schemeClr val="tx1"/>
+                </a:solidFill>
+                <a:miter lim="800000"/>
+                <a:headEnd/>
+                <a:tailEnd/>
+              </a14:hiddenLine>
+            </a:ext>
+            <a:ext uri="{AF507438-7753-43E0-B8FC-AC1667EBCBE1}">
+              <a14:hiddenEffects xmlns:a14="http://schemas.microsoft.com/office/drawing/2010/main">
+                <a:effectLst>
+                  <a:outerShdw dist="35921" dir="2700000" algn="ctr" rotWithShape="0">
+                    <a:schemeClr val="bg2"/>
+                  </a:outerShdw>
+                </a:effectLst>
+              </a14:hiddenEffects>
+            </a:ext>
+          </a:extLst>
+        </p:spPr>
+      </p:pic>
+    </p:spTree>
+    <p:extLst>
+      <p:ext uri="{BB962C8B-B14F-4D97-AF65-F5344CB8AC3E}">
+        <p14:creationId xmlns:p14="http://schemas.microsoft.com/office/powerpoint/2010/main" val="4017530526"/>
+      </p:ext>
+    </p:extLst>
+  </p:cSld>
+  <p:clrMapOvr>
+    <a:masterClrMapping/>
+  </p:clrMapOvr>
+</p:sld>
+</file>
+
+<file path=ppt/slides/slide15.xml><?xml version="1.0" encoding="utf-8"?>
+<p:sld xmlns:a="http://schemas.openxmlformats.org/drawingml/2006/main" xmlns:r="http://schemas.openxmlformats.org/officeDocument/2006/relationships" xmlns:p="http://schemas.openxmlformats.org/presentationml/2006/main">
+  <p:cSld>
+    <p:spTree>
+      <p:nvGrpSpPr>
+        <p:cNvPr id="1" name=""/>
+        <p:cNvGrpSpPr/>
+        <p:nvPr/>
+      </p:nvGrpSpPr>
+      <p:grpSpPr>
+        <a:xfrm>
+          <a:off x="0" y="0"/>
+          <a:ext cx="0" cy="0"/>
+          <a:chOff x="0" y="0"/>
+          <a:chExt cx="0" cy="0"/>
+        </a:xfrm>
+      </p:grpSpPr>
+      <p:sp>
+        <p:nvSpPr>
+          <p:cNvPr id="6" name="Google Shape;103;p16"/>
+          <p:cNvSpPr txBox="1">
+            <a:spLocks noGrp="1"/>
+          </p:cNvSpPr>
+          <p:nvPr>
+            <p:ph type="title"/>
+          </p:nvPr>
+        </p:nvSpPr>
+        <p:spPr>
+          <a:xfrm>
+            <a:off x="0" y="3650"/>
+            <a:ext cx="9144000" cy="523232"/>
+          </a:xfrm>
+          <a:prstGeom prst="rect">
+            <a:avLst/>
+          </a:prstGeom>
+        </p:spPr>
+        <p:txBody>
+          <a:bodyPr spcFirstLastPara="1" wrap="square" lIns="91425" tIns="91425" rIns="91425" bIns="91425" anchor="t" anchorCtr="0">
+            <a:noAutofit/>
+          </a:bodyPr>
+          <a:lstStyle/>
+          <a:p>
+            <a:pPr algn="ctr"/>
+            <a:r>
+              <a:rPr lang="en-US" sz="2400" b="1" dirty="0" smtClean="0"/>
+              <a:t>COST / LOSS FUNCTION</a:t>
+            </a:r>
+            <a:endParaRPr lang="en-US" sz="2400" b="1" dirty="0"/>
+          </a:p>
+        </p:txBody>
+      </p:sp>
+      <p:pic>
+        <p:nvPicPr>
+          <p:cNvPr id="4099" name="Picture 3"/>
+          <p:cNvPicPr>
+            <a:picLocks noChangeAspect="1" noChangeArrowheads="1"/>
+          </p:cNvPicPr>
+          <p:nvPr/>
+        </p:nvPicPr>
+        <p:blipFill>
+          <a:blip r:embed="rId2">
+            <a:extLst>
+              <a:ext uri="{28A0092B-C50C-407E-A947-70E740481C1C}">
+                <a14:useLocalDpi xmlns:a14="http://schemas.microsoft.com/office/drawing/2010/main" val="0"/>
+              </a:ext>
+            </a:extLst>
+          </a:blip>
+          <a:srcRect/>
+          <a:stretch>
+            <a:fillRect/>
+          </a:stretch>
+        </p:blipFill>
+        <p:spPr bwMode="auto">
+          <a:xfrm>
+            <a:off x="1399592" y="471190"/>
+            <a:ext cx="5952930" cy="4388508"/>
+          </a:xfrm>
+          <a:prstGeom prst="rect">
+            <a:avLst/>
+          </a:prstGeom>
+          <a:noFill/>
+          <a:ln>
+            <a:noFill/>
+          </a:ln>
+          <a:effectLst/>
+          <a:extLst>
+            <a:ext uri="{909E8E84-426E-40DD-AFC4-6F175D3DCCD1}">
+              <a14:hiddenFill xmlns:a14="http://schemas.microsoft.com/office/drawing/2010/main">
+                <a:solidFill>
+                  <a:schemeClr val="accent1"/>
+                </a:solidFill>
+              </a14:hiddenFill>
+            </a:ext>
+            <a:ext uri="{91240B29-F687-4F45-9708-019B960494DF}">
+              <a14:hiddenLine xmlns:a14="http://schemas.microsoft.com/office/drawing/2010/main" w="9525">
+                <a:solidFill>
+                  <a:schemeClr val="tx1"/>
+                </a:solidFill>
+                <a:miter lim="800000"/>
+                <a:headEnd/>
+                <a:tailEnd/>
+              </a14:hiddenLine>
+            </a:ext>
+            <a:ext uri="{AF507438-7753-43E0-B8FC-AC1667EBCBE1}">
+              <a14:hiddenEffects xmlns:a14="http://schemas.microsoft.com/office/drawing/2010/main">
+                <a:effectLst>
+                  <a:outerShdw dist="35921" dir="2700000" algn="ctr" rotWithShape="0">
+                    <a:schemeClr val="bg2"/>
+                  </a:outerShdw>
+                </a:effectLst>
+              </a14:hiddenEffects>
+            </a:ext>
+          </a:extLst>
+        </p:spPr>
+      </p:pic>
+    </p:spTree>
+    <p:extLst>
+      <p:ext uri="{BB962C8B-B14F-4D97-AF65-F5344CB8AC3E}">
+        <p14:creationId xmlns:p14="http://schemas.microsoft.com/office/powerpoint/2010/main" val="3043475555"/>
+      </p:ext>
+    </p:extLst>
+  </p:cSld>
+  <p:clrMapOvr>
+    <a:masterClrMapping/>
+  </p:clrMapOvr>
+</p:sld>
+</file>
+
+<file path=ppt/slides/slide16.xml><?xml version="1.0" encoding="utf-8"?>
+<p:sld xmlns:a="http://schemas.openxmlformats.org/drawingml/2006/main" xmlns:r="http://schemas.openxmlformats.org/officeDocument/2006/relationships" xmlns:p="http://schemas.openxmlformats.org/presentationml/2006/main">
+  <p:cSld>
+    <p:spTree>
+      <p:nvGrpSpPr>
+        <p:cNvPr id="1" name=""/>
+        <p:cNvGrpSpPr/>
+        <p:nvPr/>
+      </p:nvGrpSpPr>
+      <p:grpSpPr>
+        <a:xfrm>
+          <a:off x="0" y="0"/>
+          <a:ext cx="0" cy="0"/>
+          <a:chOff x="0" y="0"/>
+          <a:chExt cx="0" cy="0"/>
+        </a:xfrm>
+      </p:grpSpPr>
+      <p:sp>
+        <p:nvSpPr>
+          <p:cNvPr id="6" name="Google Shape;103;p16"/>
+          <p:cNvSpPr txBox="1">
+            <a:spLocks noGrp="1"/>
+          </p:cNvSpPr>
+          <p:nvPr>
+            <p:ph type="title"/>
+          </p:nvPr>
+        </p:nvSpPr>
+        <p:spPr>
+          <a:xfrm>
+            <a:off x="0" y="3650"/>
+            <a:ext cx="9144000" cy="523232"/>
+          </a:xfrm>
+          <a:prstGeom prst="rect">
+            <a:avLst/>
+          </a:prstGeom>
+        </p:spPr>
+        <p:txBody>
+          <a:bodyPr spcFirstLastPara="1" wrap="square" lIns="91425" tIns="91425" rIns="91425" bIns="91425" anchor="t" anchorCtr="0">
+            <a:noAutofit/>
+          </a:bodyPr>
+          <a:lstStyle/>
+          <a:p>
+            <a:pPr algn="ctr"/>
+            <a:r>
+              <a:rPr lang="en-US" sz="2400" b="1" dirty="0" smtClean="0"/>
+              <a:t>COST / LOSS FUNCTION</a:t>
+            </a:r>
+            <a:endParaRPr lang="en-US" sz="2400" b="1" dirty="0"/>
+          </a:p>
+        </p:txBody>
+      </p:sp>
+      <p:pic>
+        <p:nvPicPr>
+          <p:cNvPr id="5122" name="Picture 2"/>
+          <p:cNvPicPr>
+            <a:picLocks noChangeAspect="1" noChangeArrowheads="1"/>
+          </p:cNvPicPr>
+          <p:nvPr/>
+        </p:nvPicPr>
+        <p:blipFill>
+          <a:blip r:embed="rId2">
+            <a:extLst>
+              <a:ext uri="{28A0092B-C50C-407E-A947-70E740481C1C}">
+                <a14:useLocalDpi xmlns:a14="http://schemas.microsoft.com/office/drawing/2010/main" val="0"/>
+              </a:ext>
+            </a:extLst>
+          </a:blip>
+          <a:srcRect/>
+          <a:stretch>
+            <a:fillRect/>
+          </a:stretch>
+        </p:blipFill>
+        <p:spPr bwMode="auto">
+          <a:xfrm>
+            <a:off x="1007708" y="735222"/>
+            <a:ext cx="7621264" cy="1977749"/>
+          </a:xfrm>
+          <a:prstGeom prst="rect">
+            <a:avLst/>
+          </a:prstGeom>
+          <a:noFill/>
+          <a:ln>
+            <a:noFill/>
+          </a:ln>
+          <a:effectLst/>
+          <a:extLst>
+            <a:ext uri="{909E8E84-426E-40DD-AFC4-6F175D3DCCD1}">
+              <a14:hiddenFill xmlns:a14="http://schemas.microsoft.com/office/drawing/2010/main">
+                <a:solidFill>
+                  <a:schemeClr val="accent1"/>
+                </a:solidFill>
+              </a14:hiddenFill>
+            </a:ext>
+            <a:ext uri="{91240B29-F687-4F45-9708-019B960494DF}">
+              <a14:hiddenLine xmlns:a14="http://schemas.microsoft.com/office/drawing/2010/main" w="9525">
+                <a:solidFill>
+                  <a:schemeClr val="tx1"/>
+                </a:solidFill>
+                <a:miter lim="800000"/>
+                <a:headEnd/>
+                <a:tailEnd/>
+              </a14:hiddenLine>
+            </a:ext>
+            <a:ext uri="{AF507438-7753-43E0-B8FC-AC1667EBCBE1}">
+              <a14:hiddenEffects xmlns:a14="http://schemas.microsoft.com/office/drawing/2010/main">
+                <a:effectLst>
+                  <a:outerShdw dist="35921" dir="2700000" algn="ctr" rotWithShape="0">
+                    <a:schemeClr val="bg2"/>
+                  </a:outerShdw>
+                </a:effectLst>
+              </a14:hiddenEffects>
+            </a:ext>
+          </a:extLst>
+        </p:spPr>
+      </p:pic>
+    </p:spTree>
+    <p:extLst>
+      <p:ext uri="{BB962C8B-B14F-4D97-AF65-F5344CB8AC3E}">
+        <p14:creationId xmlns:p14="http://schemas.microsoft.com/office/powerpoint/2010/main" val="2726059942"/>
+      </p:ext>
+    </p:extLst>
+  </p:cSld>
+  <p:clrMapOvr>
+    <a:masterClrMapping/>
+  </p:clrMapOvr>
+</p:sld>
+</file>
+
+<file path=ppt/slides/slide17.xml><?xml version="1.0" encoding="utf-8"?>
+<p:sld xmlns:a="http://schemas.openxmlformats.org/drawingml/2006/main" xmlns:r="http://schemas.openxmlformats.org/officeDocument/2006/relationships" xmlns:p="http://schemas.openxmlformats.org/presentationml/2006/main">
+  <p:cSld>
+    <p:spTree>
+      <p:nvGrpSpPr>
+        <p:cNvPr id="1" name="Shape 102"/>
+        <p:cNvGrpSpPr/>
+        <p:nvPr/>
+      </p:nvGrpSpPr>
+      <p:grpSpPr>
+        <a:xfrm>
+          <a:off x="0" y="0"/>
+          <a:ext cx="0" cy="0"/>
+          <a:chOff x="0" y="0"/>
+          <a:chExt cx="0" cy="0"/>
+        </a:xfrm>
+      </p:grpSpPr>
+      <p:sp>
+        <p:nvSpPr>
+          <p:cNvPr id="103" name="Google Shape;103;p16"/>
+          <p:cNvSpPr txBox="1">
+            <a:spLocks noGrp="1"/>
+          </p:cNvSpPr>
+          <p:nvPr>
+            <p:ph type="title"/>
+          </p:nvPr>
+        </p:nvSpPr>
+        <p:spPr>
+          <a:xfrm>
+            <a:off x="0" y="3650"/>
+            <a:ext cx="9144000" cy="523232"/>
+          </a:xfrm>
+          <a:prstGeom prst="rect">
+            <a:avLst/>
+          </a:prstGeom>
+        </p:spPr>
+        <p:txBody>
+          <a:bodyPr spcFirstLastPara="1" wrap="square" lIns="91425" tIns="91425" rIns="91425" bIns="91425" anchor="t" anchorCtr="0">
+            <a:noAutofit/>
+          </a:bodyPr>
+          <a:lstStyle/>
+          <a:p>
+            <a:pPr algn="ctr"/>
+            <a:r>
+              <a:rPr lang="en-US" sz="2400" b="1" dirty="0" smtClean="0"/>
+              <a:t> </a:t>
+            </a:r>
+            <a:r>
+              <a:rPr lang="en" sz="2400" b="1" dirty="0"/>
+              <a:t>EVALUATION FUNCTIONS</a:t>
+            </a:r>
+            <a:endParaRPr lang="en-US" sz="2400" b="1" dirty="0"/>
+          </a:p>
+        </p:txBody>
+      </p:sp>
+      <p:sp>
+        <p:nvSpPr>
+          <p:cNvPr id="7" name="Google Shape;77;g258990b3369_0_16"/>
+          <p:cNvSpPr txBox="1">
+            <a:spLocks noGrp="1"/>
+          </p:cNvSpPr>
+          <p:nvPr>
+            <p:ph type="body" idx="1"/>
+          </p:nvPr>
+        </p:nvSpPr>
+        <p:spPr>
+          <a:xfrm>
+            <a:off x="201341" y="575087"/>
+            <a:ext cx="8650800" cy="2252089"/>
+          </a:xfrm>
+          <a:prstGeom prst="rect">
+            <a:avLst/>
+          </a:prstGeom>
+        </p:spPr>
+        <p:txBody>
+          <a:bodyPr spcFirstLastPara="1" wrap="square" lIns="91425" tIns="91425" rIns="91425" bIns="91425" anchor="t" anchorCtr="0">
+            <a:normAutofit fontScale="85000" lnSpcReduction="10000"/>
+          </a:bodyPr>
+          <a:lstStyle/>
+          <a:p>
+            <a:pPr marL="114300" indent="0" algn="just">
+              <a:buNone/>
+            </a:pPr>
+            <a:r>
+              <a:rPr lang="en-US" sz="2000" b="1" u="sng" dirty="0">
+                <a:solidFill>
+                  <a:schemeClr val="tx1"/>
+                </a:solidFill>
+              </a:rPr>
+              <a:t>Optimizer:</a:t>
+            </a:r>
+          </a:p>
+          <a:p>
+            <a:r>
+              <a:rPr lang="en-US" sz="2000" dirty="0">
+                <a:solidFill>
+                  <a:schemeClr val="tx1"/>
+                </a:solidFill>
+              </a:rPr>
+              <a:t>Optimizers are algorithms used to minimize the cost function by updating the model parameters. In logistic regression, </a:t>
+            </a:r>
+            <a:r>
+              <a:rPr lang="en-US" sz="2000" b="1" dirty="0">
+                <a:solidFill>
+                  <a:schemeClr val="tx1"/>
+                </a:solidFill>
+              </a:rPr>
+              <a:t>Gradient Descent</a:t>
+            </a:r>
+            <a:r>
+              <a:rPr lang="en-US" sz="2000" dirty="0">
+                <a:solidFill>
+                  <a:schemeClr val="tx1"/>
+                </a:solidFill>
+              </a:rPr>
+              <a:t> is commonly used. There are various types of gradient descent optimizers, including:</a:t>
+            </a:r>
+          </a:p>
+          <a:p>
+            <a:r>
+              <a:rPr lang="en-US" sz="2000" b="1" dirty="0">
+                <a:solidFill>
+                  <a:schemeClr val="tx1"/>
+                </a:solidFill>
+              </a:rPr>
+              <a:t>Batch Gradient Descent</a:t>
+            </a:r>
+            <a:endParaRPr lang="en-US" sz="2000" dirty="0">
+              <a:solidFill>
+                <a:schemeClr val="tx1"/>
+              </a:solidFill>
+            </a:endParaRPr>
+          </a:p>
+          <a:p>
+            <a:r>
+              <a:rPr lang="en-US" sz="2000" b="1" dirty="0">
+                <a:solidFill>
+                  <a:schemeClr val="tx1"/>
+                </a:solidFill>
+              </a:rPr>
+              <a:t>Stochastic Gradient Descent (SGD)</a:t>
+            </a:r>
+            <a:endParaRPr lang="en-US" sz="2000" dirty="0">
+              <a:solidFill>
+                <a:schemeClr val="tx1"/>
+              </a:solidFill>
+            </a:endParaRPr>
+          </a:p>
+          <a:p>
+            <a:r>
+              <a:rPr lang="en-US" sz="2000" b="1" dirty="0">
+                <a:solidFill>
+                  <a:schemeClr val="tx1"/>
+                </a:solidFill>
+              </a:rPr>
+              <a:t>Mini-Batch Gradient Descent</a:t>
+            </a:r>
+            <a:endParaRPr lang="en-US" sz="2000" dirty="0">
+              <a:solidFill>
+                <a:schemeClr val="tx1"/>
+              </a:solidFill>
+            </a:endParaRPr>
+          </a:p>
+        </p:txBody>
+      </p:sp>
+      <p:pic>
+        <p:nvPicPr>
+          <p:cNvPr id="4098" name="Picture 2"/>
+          <p:cNvPicPr>
+            <a:picLocks noChangeAspect="1" noChangeArrowheads="1"/>
+          </p:cNvPicPr>
+          <p:nvPr/>
+        </p:nvPicPr>
+        <p:blipFill>
+          <a:blip r:embed="rId3">
+            <a:extLst>
+              <a:ext uri="{28A0092B-C50C-407E-A947-70E740481C1C}">
+                <a14:useLocalDpi xmlns:a14="http://schemas.microsoft.com/office/drawing/2010/main" val="0"/>
+              </a:ext>
+            </a:extLst>
+          </a:blip>
+          <a:srcRect/>
+          <a:stretch>
+            <a:fillRect/>
+          </a:stretch>
+        </p:blipFill>
+        <p:spPr bwMode="auto">
+          <a:xfrm>
+            <a:off x="757306" y="2978418"/>
+            <a:ext cx="5334000" cy="1295400"/>
+          </a:xfrm>
+          <a:prstGeom prst="rect">
+            <a:avLst/>
+          </a:prstGeom>
+          <a:noFill/>
+          <a:ln>
+            <a:noFill/>
+          </a:ln>
+          <a:effectLst/>
+          <a:extLst>
+            <a:ext uri="{909E8E84-426E-40DD-AFC4-6F175D3DCCD1}">
+              <a14:hiddenFill xmlns:a14="http://schemas.microsoft.com/office/drawing/2010/main">
+                <a:solidFill>
+                  <a:schemeClr val="accent1"/>
+                </a:solidFill>
+              </a14:hiddenFill>
+            </a:ext>
+            <a:ext uri="{91240B29-F687-4F45-9708-019B960494DF}">
+              <a14:hiddenLine xmlns:a14="http://schemas.microsoft.com/office/drawing/2010/main" w="9525">
+                <a:solidFill>
+                  <a:schemeClr val="tx1"/>
+                </a:solidFill>
+                <a:miter lim="800000"/>
+                <a:headEnd/>
+                <a:tailEnd/>
+              </a14:hiddenLine>
+            </a:ext>
+            <a:ext uri="{AF507438-7753-43E0-B8FC-AC1667EBCBE1}">
+              <a14:hiddenEffects xmlns:a14="http://schemas.microsoft.com/office/drawing/2010/main">
+                <a:effectLst>
+                  <a:outerShdw dist="35921" dir="2700000" algn="ctr" rotWithShape="0">
+                    <a:schemeClr val="bg2"/>
+                  </a:outerShdw>
+                </a:effectLst>
+              </a14:hiddenEffects>
+            </a:ext>
+          </a:extLst>
+        </p:spPr>
+      </p:pic>
+    </p:spTree>
+    <p:extLst>
+      <p:ext uri="{BB962C8B-B14F-4D97-AF65-F5344CB8AC3E}">
+        <p14:creationId xmlns:p14="http://schemas.microsoft.com/office/powerpoint/2010/main" val="1995493696"/>
+      </p:ext>
+    </p:extLst>
+  </p:cSld>
+  <p:clrMapOvr>
+    <a:masterClrMapping/>
+  </p:clrMapOvr>
+  <p:timing>
+    <p:tnLst>
+      <p:par>
+        <p:cTn id="1" dur="indefinite" restart="never" nodeType="tmRoot"/>
+      </p:par>
+    </p:tnLst>
+  </p:timing>
+</p:sld>
+</file>
+
+<file path=ppt/slides/slide18.xml><?xml version="1.0" encoding="utf-8"?>
+<p:sld xmlns:a="http://schemas.openxmlformats.org/drawingml/2006/main" xmlns:r="http://schemas.openxmlformats.org/officeDocument/2006/relationships" xmlns:p="http://schemas.openxmlformats.org/presentationml/2006/main">
+  <p:cSld>
+    <p:spTree>
+      <p:nvGrpSpPr>
+        <p:cNvPr id="1" name="Shape 102"/>
+        <p:cNvGrpSpPr/>
+        <p:nvPr/>
+      </p:nvGrpSpPr>
+      <p:grpSpPr>
+        <a:xfrm>
+          <a:off x="0" y="0"/>
+          <a:ext cx="0" cy="0"/>
+          <a:chOff x="0" y="0"/>
+          <a:chExt cx="0" cy="0"/>
+        </a:xfrm>
+      </p:grpSpPr>
+      <p:sp>
+        <p:nvSpPr>
+          <p:cNvPr id="103" name="Google Shape;103;p16"/>
+          <p:cNvSpPr txBox="1">
+            <a:spLocks noGrp="1"/>
+          </p:cNvSpPr>
+          <p:nvPr>
+            <p:ph type="title"/>
+          </p:nvPr>
+        </p:nvSpPr>
+        <p:spPr>
+          <a:xfrm>
+            <a:off x="0" y="3650"/>
+            <a:ext cx="9144000" cy="523232"/>
+          </a:xfrm>
+          <a:prstGeom prst="rect">
+            <a:avLst/>
+          </a:prstGeom>
+        </p:spPr>
+        <p:txBody>
+          <a:bodyPr spcFirstLastPara="1" wrap="square" lIns="91425" tIns="91425" rIns="91425" bIns="91425" anchor="t" anchorCtr="0">
+            <a:noAutofit/>
+          </a:bodyPr>
+          <a:lstStyle/>
+          <a:p>
+            <a:pPr algn="ctr"/>
+            <a:r>
+              <a:rPr lang="en-US" sz="2400" b="1" dirty="0" smtClean="0"/>
+              <a:t> </a:t>
+            </a:r>
+            <a:r>
+              <a:rPr lang="en" sz="2400" b="1" dirty="0" smtClean="0"/>
+              <a:t>EVALUATION FUNCTIONS</a:t>
+            </a:r>
+            <a:endParaRPr lang="en-US" sz="2400" b="1" dirty="0"/>
+          </a:p>
+        </p:txBody>
+      </p:sp>
+      <p:sp>
+        <p:nvSpPr>
+          <p:cNvPr id="7" name="Google Shape;77;g258990b3369_0_16"/>
+          <p:cNvSpPr txBox="1">
+            <a:spLocks noGrp="1"/>
+          </p:cNvSpPr>
+          <p:nvPr>
+            <p:ph type="body" idx="1"/>
+          </p:nvPr>
+        </p:nvSpPr>
+        <p:spPr>
+          <a:xfrm>
+            <a:off x="201341" y="575087"/>
+            <a:ext cx="8650800" cy="2802595"/>
+          </a:xfrm>
+          <a:prstGeom prst="rect">
+            <a:avLst/>
+          </a:prstGeom>
+        </p:spPr>
+        <p:txBody>
+          <a:bodyPr spcFirstLastPara="1" wrap="square" lIns="91425" tIns="91425" rIns="91425" bIns="91425" anchor="t" anchorCtr="0">
+            <a:normAutofit/>
+          </a:bodyPr>
+          <a:lstStyle/>
+          <a:p>
+            <a:pPr algn="just">
+              <a:buFont typeface="Wingdings" pitchFamily="2" charset="2"/>
+              <a:buChar char="v"/>
+            </a:pPr>
+            <a:r>
+              <a:rPr lang="en-US" b="1" dirty="0">
+                <a:solidFill>
+                  <a:schemeClr val="tx1"/>
+                </a:solidFill>
+              </a:rPr>
+              <a:t>Sigmoid Function</a:t>
+            </a:r>
+            <a:r>
+              <a:rPr lang="en-US" dirty="0">
+                <a:solidFill>
+                  <a:schemeClr val="tx1"/>
+                </a:solidFill>
+              </a:rPr>
+              <a:t>: Maps </a:t>
+            </a:r>
+            <a:r>
+              <a:rPr lang="en-US" dirty="0" err="1">
+                <a:solidFill>
+                  <a:schemeClr val="tx1"/>
+                </a:solidFill>
+              </a:rPr>
+              <a:t>logits</a:t>
+            </a:r>
+            <a:r>
+              <a:rPr lang="en-US" dirty="0">
+                <a:solidFill>
+                  <a:schemeClr val="tx1"/>
+                </a:solidFill>
+              </a:rPr>
+              <a:t> to probabilities, essential for binary classification</a:t>
+            </a:r>
+            <a:r>
+              <a:rPr lang="en-US" dirty="0" smtClean="0">
+                <a:solidFill>
+                  <a:schemeClr val="tx1"/>
+                </a:solidFill>
+              </a:rPr>
+              <a:t>.</a:t>
+            </a:r>
+          </a:p>
+          <a:p>
+            <a:pPr algn="just">
+              <a:buFont typeface="Wingdings" pitchFamily="2" charset="2"/>
+              <a:buChar char="v"/>
+            </a:pPr>
+            <a:endParaRPr lang="en-US" dirty="0" smtClean="0">
+              <a:solidFill>
+                <a:schemeClr val="tx1"/>
+              </a:solidFill>
+            </a:endParaRPr>
+          </a:p>
+          <a:p>
+            <a:pPr algn="just">
+              <a:buFont typeface="Wingdings" pitchFamily="2" charset="2"/>
+              <a:buChar char="v"/>
+            </a:pPr>
+            <a:r>
+              <a:rPr lang="en-US" b="1" dirty="0" smtClean="0">
+                <a:solidFill>
+                  <a:schemeClr val="tx1"/>
+                </a:solidFill>
+              </a:rPr>
+              <a:t>Cost </a:t>
+            </a:r>
+            <a:r>
+              <a:rPr lang="en-US" b="1" dirty="0">
+                <a:solidFill>
+                  <a:schemeClr val="tx1"/>
+                </a:solidFill>
+              </a:rPr>
+              <a:t>Function</a:t>
+            </a:r>
+            <a:r>
+              <a:rPr lang="en-US" dirty="0">
+                <a:solidFill>
+                  <a:schemeClr val="tx1"/>
+                </a:solidFill>
+              </a:rPr>
+              <a:t>: Measures the error between predicted probabilities and actual labels; binary cross-entropy is used for logistic regression</a:t>
+            </a:r>
+            <a:r>
+              <a:rPr lang="en-US" dirty="0" smtClean="0">
+                <a:solidFill>
+                  <a:schemeClr val="tx1"/>
+                </a:solidFill>
+              </a:rPr>
+              <a:t>.</a:t>
+            </a:r>
+          </a:p>
+          <a:p>
+            <a:pPr marL="114300" indent="0" algn="just">
+              <a:buNone/>
+            </a:pPr>
+            <a:endParaRPr lang="en-US" dirty="0" smtClean="0">
+              <a:solidFill>
+                <a:schemeClr val="tx1"/>
+              </a:solidFill>
+            </a:endParaRPr>
+          </a:p>
+          <a:p>
+            <a:pPr algn="just">
+              <a:buFont typeface="Wingdings" pitchFamily="2" charset="2"/>
+              <a:buChar char="v"/>
+            </a:pPr>
+            <a:r>
+              <a:rPr lang="en-US" b="1" dirty="0" smtClean="0">
+                <a:solidFill>
+                  <a:schemeClr val="tx1"/>
+                </a:solidFill>
+              </a:rPr>
+              <a:t>Optimizer</a:t>
+            </a:r>
+            <a:r>
+              <a:rPr lang="en-US" dirty="0">
+                <a:solidFill>
+                  <a:schemeClr val="tx1"/>
+                </a:solidFill>
+              </a:rPr>
+              <a:t>: Updates model parameters to minimize the cost function. Gradient Descent and its variants are commonly used optimizers.</a:t>
+            </a:r>
+            <a:endParaRPr lang="en-US" sz="2000" dirty="0">
+              <a:solidFill>
+                <a:schemeClr val="tx1"/>
+              </a:solidFill>
+            </a:endParaRPr>
+          </a:p>
+        </p:txBody>
+      </p:sp>
+    </p:spTree>
+    <p:extLst>
+      <p:ext uri="{BB962C8B-B14F-4D97-AF65-F5344CB8AC3E}">
+        <p14:creationId xmlns:p14="http://schemas.microsoft.com/office/powerpoint/2010/main" val="743032425"/>
+      </p:ext>
+    </p:extLst>
+  </p:cSld>
+  <p:clrMapOvr>
+    <a:masterClrMapping/>
+  </p:clrMapOvr>
+  <p:timing>
+    <p:tnLst>
+      <p:par>
+        <p:cTn id="1" dur="indefinite" restart="never" nodeType="tmRoot"/>
+      </p:par>
+    </p:tnLst>
+  </p:timing>
+</p:sld>
+</file>
+
+<file path=ppt/slides/slide2.xml><?xml version="1.0" encoding="utf-8"?>
+<p:sld xmlns:a="http://schemas.openxmlformats.org/drawingml/2006/main" xmlns:r="http://schemas.openxmlformats.org/officeDocument/2006/relationships" xmlns:p="http://schemas.openxmlformats.org/presentationml/2006/main">
+  <p:cSld>
+    <p:spTree>
+      <p:nvGrpSpPr>
+        <p:cNvPr id="1" name="Shape 102"/>
+        <p:cNvGrpSpPr/>
+        <p:nvPr/>
+      </p:nvGrpSpPr>
+      <p:grpSpPr>
+        <a:xfrm>
+          <a:off x="0" y="0"/>
+          <a:ext cx="0" cy="0"/>
+          <a:chOff x="0" y="0"/>
+          <a:chExt cx="0" cy="0"/>
+        </a:xfrm>
+      </p:grpSpPr>
+      <p:sp>
+        <p:nvSpPr>
+          <p:cNvPr id="103" name="Google Shape;103;p16"/>
+          <p:cNvSpPr txBox="1">
+            <a:spLocks noGrp="1"/>
+          </p:cNvSpPr>
+          <p:nvPr>
+            <p:ph type="title"/>
+          </p:nvPr>
+        </p:nvSpPr>
+        <p:spPr>
+          <a:xfrm>
+            <a:off x="0" y="3650"/>
+            <a:ext cx="9144000" cy="523232"/>
+          </a:xfrm>
+          <a:prstGeom prst="rect">
+            <a:avLst/>
+          </a:prstGeom>
+        </p:spPr>
+        <p:txBody>
+          <a:bodyPr spcFirstLastPara="1" wrap="square" lIns="91425" tIns="91425" rIns="91425" bIns="91425" anchor="t" anchorCtr="0">
+            <a:noAutofit/>
+          </a:bodyPr>
+          <a:lstStyle/>
+          <a:p>
+            <a:pPr algn="ctr"/>
+            <a:r>
+              <a:rPr lang="en-US" sz="2400" b="1" dirty="0" smtClean="0"/>
+              <a:t> </a:t>
+            </a:r>
+            <a:r>
+              <a:rPr lang="en-US" sz="2400" b="1" dirty="0" smtClean="0"/>
+              <a:t>Regression / Classification Problems</a:t>
+            </a:r>
+            <a:endParaRPr lang="en-US" sz="2400" b="1" dirty="0"/>
+          </a:p>
+        </p:txBody>
+      </p:sp>
+      <p:pic>
+        <p:nvPicPr>
+          <p:cNvPr id="5" name="Picture 4"/>
+          <p:cNvPicPr>
+            <a:picLocks noChangeAspect="1"/>
+          </p:cNvPicPr>
+          <p:nvPr/>
+        </p:nvPicPr>
+        <p:blipFill>
+          <a:blip r:embed="rId3"/>
+          <a:stretch>
+            <a:fillRect/>
+          </a:stretch>
+        </p:blipFill>
+        <p:spPr>
+          <a:xfrm>
+            <a:off x="660572" y="526882"/>
+            <a:ext cx="7927374" cy="4325518"/>
+          </a:xfrm>
+          <a:prstGeom prst="rect">
+            <a:avLst/>
+          </a:prstGeom>
+        </p:spPr>
+      </p:pic>
+    </p:spTree>
+    <p:extLst>
+      <p:ext uri="{BB962C8B-B14F-4D97-AF65-F5344CB8AC3E}">
+        <p14:creationId xmlns:p14="http://schemas.microsoft.com/office/powerpoint/2010/main" val="932976188"/>
+      </p:ext>
+    </p:extLst>
+  </p:cSld>
+  <p:clrMapOvr>
+    <a:masterClrMapping/>
+  </p:clrMapOvr>
+  <p:timing>
+    <p:tnLst>
+      <p:par>
+        <p:cTn id="1" dur="indefinite" restart="never" nodeType="tmRoot"/>
+      </p:par>
+    </p:tnLst>
+  </p:timing>
+</p:sld>
+</file>
+
+<file path=ppt/slides/slide3.xml><?xml version="1.0" encoding="utf-8"?>
+<p:sld xmlns:a="http://schemas.openxmlformats.org/drawingml/2006/main" xmlns:r="http://schemas.openxmlformats.org/officeDocument/2006/relationships" xmlns:p="http://schemas.openxmlformats.org/presentationml/2006/main">
+  <p:cSld>
+    <p:spTree>
+      <p:nvGrpSpPr>
+        <p:cNvPr id="1" name="Shape 102"/>
+        <p:cNvGrpSpPr/>
+        <p:nvPr/>
+      </p:nvGrpSpPr>
+      <p:grpSpPr>
+        <a:xfrm>
+          <a:off x="0" y="0"/>
+          <a:ext cx="0" cy="0"/>
+          <a:chOff x="0" y="0"/>
+          <a:chExt cx="0" cy="0"/>
+        </a:xfrm>
+      </p:grpSpPr>
+      <p:sp>
+        <p:nvSpPr>
+          <p:cNvPr id="103" name="Google Shape;103;p16"/>
+          <p:cNvSpPr txBox="1">
+            <a:spLocks noGrp="1"/>
+          </p:cNvSpPr>
+          <p:nvPr>
+            <p:ph type="title"/>
+          </p:nvPr>
+        </p:nvSpPr>
+        <p:spPr>
+          <a:xfrm>
+            <a:off x="0" y="3650"/>
+            <a:ext cx="9144000" cy="523232"/>
+          </a:xfrm>
+          <a:prstGeom prst="rect">
+            <a:avLst/>
+          </a:prstGeom>
+        </p:spPr>
+        <p:txBody>
+          <a:bodyPr spcFirstLastPara="1" wrap="square" lIns="91425" tIns="91425" rIns="91425" bIns="91425" anchor="t" anchorCtr="0">
+            <a:noAutofit/>
+          </a:bodyPr>
+          <a:lstStyle/>
+          <a:p>
+            <a:pPr algn="ctr"/>
+            <a:r>
+              <a:rPr lang="en-US" sz="2400" b="1" dirty="0" smtClean="0"/>
+              <a:t> </a:t>
+            </a:r>
+            <a:r>
+              <a:rPr lang="en-US" sz="2400" b="1" dirty="0" smtClean="0"/>
+              <a:t>Linear Regression / Logistic Regression</a:t>
+            </a:r>
+            <a:endParaRPr lang="en-US" sz="2400" b="1" dirty="0"/>
+          </a:p>
+        </p:txBody>
+      </p:sp>
+      <p:pic>
+        <p:nvPicPr>
+          <p:cNvPr id="3" name="Picture 2"/>
+          <p:cNvPicPr>
+            <a:picLocks noChangeAspect="1"/>
+          </p:cNvPicPr>
+          <p:nvPr/>
+        </p:nvPicPr>
+        <p:blipFill>
+          <a:blip r:embed="rId3"/>
+          <a:stretch>
+            <a:fillRect/>
+          </a:stretch>
+        </p:blipFill>
+        <p:spPr>
+          <a:xfrm>
+            <a:off x="903458" y="526882"/>
+            <a:ext cx="7048114" cy="4349148"/>
+          </a:xfrm>
+          <a:prstGeom prst="rect">
+            <a:avLst/>
+          </a:prstGeom>
+        </p:spPr>
+      </p:pic>
+    </p:spTree>
+    <p:extLst>
+      <p:ext uri="{BB962C8B-B14F-4D97-AF65-F5344CB8AC3E}">
+        <p14:creationId xmlns:p14="http://schemas.microsoft.com/office/powerpoint/2010/main" val="660511648"/>
+      </p:ext>
+    </p:extLst>
+  </p:cSld>
+  <p:clrMapOvr>
+    <a:masterClrMapping/>
+  </p:clrMapOvr>
+  <p:timing>
+    <p:tnLst>
+      <p:par>
+        <p:cTn id="1" dur="indefinite" restart="never" nodeType="tmRoot"/>
+      </p:par>
+    </p:tnLst>
+  </p:timing>
+</p:sld>
+</file>
+
+<file path=ppt/slides/slide4.xml><?xml version="1.0" encoding="utf-8"?>
+<p:sld xmlns:a="http://schemas.openxmlformats.org/drawingml/2006/main" xmlns:r="http://schemas.openxmlformats.org/officeDocument/2006/relationships" xmlns:p="http://schemas.openxmlformats.org/presentationml/2006/main">
+  <p:cSld>
+    <p:spTree>
+      <p:nvGrpSpPr>
+        <p:cNvPr id="1" name="Shape 102"/>
+        <p:cNvGrpSpPr/>
+        <p:nvPr/>
+      </p:nvGrpSpPr>
+      <p:grpSpPr>
+        <a:xfrm>
+          <a:off x="0" y="0"/>
+          <a:ext cx="0" cy="0"/>
+          <a:chOff x="0" y="0"/>
+          <a:chExt cx="0" cy="0"/>
+        </a:xfrm>
+      </p:grpSpPr>
+      <p:sp>
+        <p:nvSpPr>
+          <p:cNvPr id="103" name="Google Shape;103;p16"/>
+          <p:cNvSpPr txBox="1">
+            <a:spLocks noGrp="1"/>
+          </p:cNvSpPr>
+          <p:nvPr>
+            <p:ph type="title"/>
+          </p:nvPr>
+        </p:nvSpPr>
+        <p:spPr>
+          <a:xfrm>
+            <a:off x="0" y="3650"/>
+            <a:ext cx="9144000" cy="523232"/>
+          </a:xfrm>
+          <a:prstGeom prst="rect">
+            <a:avLst/>
+          </a:prstGeom>
+        </p:spPr>
+        <p:txBody>
+          <a:bodyPr spcFirstLastPara="1" wrap="square" lIns="91425" tIns="91425" rIns="91425" bIns="91425" anchor="t" anchorCtr="0">
+            <a:noAutofit/>
+          </a:bodyPr>
+          <a:lstStyle/>
+          <a:p>
+            <a:pPr algn="ctr"/>
+            <a:r>
+              <a:rPr lang="en-US" sz="2400" b="1" dirty="0" smtClean="0"/>
+              <a:t> </a:t>
+            </a:r>
+            <a:r>
+              <a:rPr lang="en-US" sz="2400" b="1" dirty="0"/>
+              <a:t>Evaluation Metrics for Classification Models</a:t>
+            </a:r>
+          </a:p>
+        </p:txBody>
+      </p:sp>
+      <p:sp>
+        <p:nvSpPr>
+          <p:cNvPr id="7" name="Google Shape;77;g258990b3369_0_16"/>
+          <p:cNvSpPr txBox="1">
+            <a:spLocks noGrp="1"/>
+          </p:cNvSpPr>
+          <p:nvPr>
+            <p:ph type="body" idx="1"/>
+          </p:nvPr>
+        </p:nvSpPr>
+        <p:spPr>
+          <a:xfrm>
+            <a:off x="201341" y="575087"/>
+            <a:ext cx="8650800" cy="3558374"/>
+          </a:xfrm>
+          <a:prstGeom prst="rect">
+            <a:avLst/>
+          </a:prstGeom>
+        </p:spPr>
+        <p:txBody>
+          <a:bodyPr spcFirstLastPara="1" wrap="square" lIns="91425" tIns="91425" rIns="91425" bIns="91425" anchor="t" anchorCtr="0">
+            <a:normAutofit/>
+          </a:bodyPr>
+          <a:lstStyle/>
+          <a:p>
+            <a:pPr marL="114300" indent="0">
+              <a:buNone/>
+            </a:pPr>
+            <a:r>
+              <a:rPr lang="en-US" b="1" dirty="0">
+                <a:solidFill>
+                  <a:schemeClr val="tx1"/>
+                </a:solidFill>
+              </a:rPr>
+              <a:t>When to Use Accuracy</a:t>
+            </a:r>
+            <a:endParaRPr lang="en-US" dirty="0">
+              <a:solidFill>
+                <a:schemeClr val="tx1"/>
+              </a:solidFill>
+            </a:endParaRPr>
+          </a:p>
+          <a:p>
+            <a:r>
+              <a:rPr lang="en-US" b="1" dirty="0">
+                <a:solidFill>
+                  <a:schemeClr val="tx1"/>
+                </a:solidFill>
+              </a:rPr>
+              <a:t>Balanced datasets</a:t>
+            </a:r>
+            <a:r>
+              <a:rPr lang="en-US" dirty="0">
+                <a:solidFill>
+                  <a:schemeClr val="tx1"/>
+                </a:solidFill>
+              </a:rPr>
+              <a:t>: When classes are roughly equal in size.</a:t>
+            </a:r>
+          </a:p>
+          <a:p>
+            <a:r>
+              <a:rPr lang="en-US" b="1" dirty="0">
+                <a:solidFill>
+                  <a:schemeClr val="tx1"/>
+                </a:solidFill>
+              </a:rPr>
+              <a:t>Simple benchmarks</a:t>
+            </a:r>
+            <a:r>
+              <a:rPr lang="en-US" dirty="0">
+                <a:solidFill>
+                  <a:schemeClr val="tx1"/>
+                </a:solidFill>
+              </a:rPr>
+              <a:t>: Quick evaluation of model performance</a:t>
+            </a:r>
+            <a:r>
+              <a:rPr lang="en-US" dirty="0" smtClean="0">
+                <a:solidFill>
+                  <a:schemeClr val="tx1"/>
+                </a:solidFill>
+              </a:rPr>
+              <a:t>.</a:t>
+            </a:r>
+          </a:p>
+          <a:p>
+            <a:pPr marL="114300" indent="0">
+              <a:buNone/>
+            </a:pPr>
+            <a:endParaRPr lang="en-US" dirty="0">
+              <a:solidFill>
+                <a:schemeClr val="tx1"/>
+              </a:solidFill>
+            </a:endParaRPr>
+          </a:p>
+          <a:p>
+            <a:pPr marL="114300" indent="0">
+              <a:buNone/>
+            </a:pPr>
+            <a:r>
+              <a:rPr lang="en-US" b="1" dirty="0">
+                <a:solidFill>
+                  <a:schemeClr val="tx1"/>
+                </a:solidFill>
+              </a:rPr>
+              <a:t>When to Avoid Accuracy</a:t>
+            </a:r>
+            <a:endParaRPr lang="en-US" dirty="0">
+              <a:solidFill>
+                <a:schemeClr val="tx1"/>
+              </a:solidFill>
+            </a:endParaRPr>
+          </a:p>
+          <a:p>
+            <a:r>
+              <a:rPr lang="en-US" b="1" dirty="0">
+                <a:solidFill>
+                  <a:schemeClr val="tx1"/>
+                </a:solidFill>
+              </a:rPr>
+              <a:t>Imbalanced datasets</a:t>
+            </a:r>
+            <a:r>
+              <a:rPr lang="en-US" dirty="0">
+                <a:solidFill>
+                  <a:schemeClr val="tx1"/>
+                </a:solidFill>
+              </a:rPr>
+              <a:t>: For example, if 95% of examples are negative, a model that always predicts negative will have 95% accuracy but is useless.</a:t>
+            </a:r>
+          </a:p>
+          <a:p>
+            <a:r>
+              <a:rPr lang="en-US" b="1" dirty="0">
+                <a:solidFill>
+                  <a:schemeClr val="tx1"/>
+                </a:solidFill>
+              </a:rPr>
+              <a:t>Cost-sensitive scenarios</a:t>
+            </a:r>
+            <a:r>
+              <a:rPr lang="en-US" dirty="0">
+                <a:solidFill>
+                  <a:schemeClr val="tx1"/>
+                </a:solidFill>
+              </a:rPr>
+              <a:t>: When false positives and false negatives have different consequences (e.g., medical testing).</a:t>
+            </a:r>
+          </a:p>
+        </p:txBody>
+      </p:sp>
+    </p:spTree>
+    <p:extLst>
+      <p:ext uri="{BB962C8B-B14F-4D97-AF65-F5344CB8AC3E}">
+        <p14:creationId xmlns:p14="http://schemas.microsoft.com/office/powerpoint/2010/main" val="377761719"/>
+      </p:ext>
+    </p:extLst>
+  </p:cSld>
+  <p:clrMapOvr>
+    <a:masterClrMapping/>
+  </p:clrMapOvr>
+  <p:timing>
+    <p:tnLst>
+      <p:par>
+        <p:cTn id="1" dur="indefinite" restart="never" nodeType="tmRoot"/>
+      </p:par>
+    </p:tnLst>
+  </p:timing>
+</p:sld>
+</file>
+
+<file path=ppt/slides/slide5.xml><?xml version="1.0" encoding="utf-8"?>
+<p:sld xmlns:a="http://schemas.openxmlformats.org/drawingml/2006/main" xmlns:r="http://schemas.openxmlformats.org/officeDocument/2006/relationships" xmlns:p="http://schemas.openxmlformats.org/presentationml/2006/main">
+  <p:cSld>
+    <p:spTree>
+      <p:nvGrpSpPr>
+        <p:cNvPr id="1" name="Shape 102"/>
+        <p:cNvGrpSpPr/>
+        <p:nvPr/>
+      </p:nvGrpSpPr>
+      <p:grpSpPr>
+        <a:xfrm>
+          <a:off x="0" y="0"/>
+          <a:ext cx="0" cy="0"/>
+          <a:chOff x="0" y="0"/>
+          <a:chExt cx="0" cy="0"/>
+        </a:xfrm>
+      </p:grpSpPr>
+      <p:sp>
+        <p:nvSpPr>
+          <p:cNvPr id="103" name="Google Shape;103;p16"/>
+          <p:cNvSpPr txBox="1">
+            <a:spLocks noGrp="1"/>
+          </p:cNvSpPr>
+          <p:nvPr>
+            <p:ph type="title"/>
+          </p:nvPr>
+        </p:nvSpPr>
+        <p:spPr>
+          <a:xfrm>
+            <a:off x="0" y="3650"/>
+            <a:ext cx="9144000" cy="523232"/>
+          </a:xfrm>
+          <a:prstGeom prst="rect">
+            <a:avLst/>
+          </a:prstGeom>
+        </p:spPr>
+        <p:txBody>
+          <a:bodyPr spcFirstLastPara="1" wrap="square" lIns="91425" tIns="91425" rIns="91425" bIns="91425" anchor="t" anchorCtr="0">
+            <a:noAutofit/>
+          </a:bodyPr>
+          <a:lstStyle/>
+          <a:p>
+            <a:pPr algn="ctr"/>
+            <a:r>
+              <a:rPr lang="en-US" sz="2400" b="1" dirty="0" smtClean="0"/>
+              <a:t> </a:t>
+            </a:r>
+            <a:r>
+              <a:rPr lang="en-US" sz="2400" b="1" dirty="0"/>
+              <a:t>Evaluation Metrics for Classification Models</a:t>
+            </a:r>
+          </a:p>
+        </p:txBody>
+      </p:sp>
+      <p:sp>
+        <p:nvSpPr>
+          <p:cNvPr id="7" name="Google Shape;77;g258990b3369_0_16"/>
+          <p:cNvSpPr txBox="1">
+            <a:spLocks noGrp="1"/>
+          </p:cNvSpPr>
+          <p:nvPr>
+            <p:ph type="body" idx="1"/>
+          </p:nvPr>
+        </p:nvSpPr>
+        <p:spPr>
+          <a:xfrm>
+            <a:off x="201341" y="575087"/>
+            <a:ext cx="8650800" cy="3558374"/>
+          </a:xfrm>
+          <a:prstGeom prst="rect">
+            <a:avLst/>
+          </a:prstGeom>
+        </p:spPr>
+        <p:txBody>
+          <a:bodyPr spcFirstLastPara="1" wrap="square" lIns="91425" tIns="91425" rIns="91425" bIns="91425" anchor="t" anchorCtr="0">
+            <a:normAutofit/>
+          </a:bodyPr>
+          <a:lstStyle/>
+          <a:p>
+            <a:pPr marL="114300" indent="0">
+              <a:buNone/>
+            </a:pPr>
+            <a:r>
+              <a:rPr lang="en-US" sz="2000" b="1" dirty="0" smtClean="0">
+                <a:solidFill>
+                  <a:schemeClr val="tx1"/>
+                </a:solidFill>
+              </a:rPr>
+              <a:t>Accuracy: </a:t>
+            </a:r>
+            <a:r>
+              <a:rPr lang="en-US" sz="2000" dirty="0" smtClean="0">
+                <a:solidFill>
+                  <a:schemeClr val="tx1"/>
+                </a:solidFill>
+              </a:rPr>
+              <a:t>Accuracy </a:t>
+            </a:r>
+            <a:r>
+              <a:rPr lang="en-US" sz="2000" dirty="0">
+                <a:solidFill>
+                  <a:schemeClr val="tx1"/>
+                </a:solidFill>
+              </a:rPr>
+              <a:t>is the ratio of correctly predicted instances to the total instances. It is a simple metric but can be misleading in imbalanced </a:t>
+            </a:r>
+            <a:r>
+              <a:rPr lang="en-US" sz="2000" dirty="0" smtClean="0">
+                <a:solidFill>
+                  <a:schemeClr val="tx1"/>
+                </a:solidFill>
+              </a:rPr>
+              <a:t>datasets.</a:t>
+            </a:r>
+          </a:p>
+          <a:p>
+            <a:pPr marL="114300" indent="0">
+              <a:buNone/>
+            </a:pPr>
+            <a:endParaRPr lang="en-US" sz="2000" dirty="0" smtClean="0">
+              <a:solidFill>
+                <a:schemeClr val="tx1"/>
+              </a:solidFill>
+            </a:endParaRPr>
+          </a:p>
+          <a:p>
+            <a:pPr marL="114300" indent="0">
+              <a:buNone/>
+            </a:pPr>
+            <a:endParaRPr lang="en-US" sz="2000" dirty="0">
+              <a:solidFill>
+                <a:schemeClr val="tx1"/>
+              </a:solidFill>
+            </a:endParaRPr>
+          </a:p>
+          <a:p>
+            <a:pPr marL="114300" indent="0">
+              <a:buNone/>
+            </a:pPr>
+            <a:endParaRPr lang="en-US" sz="2000" dirty="0"/>
+          </a:p>
+        </p:txBody>
+      </p:sp>
+      <p:pic>
+        <p:nvPicPr>
+          <p:cNvPr id="2" name="Picture 1"/>
+          <p:cNvPicPr>
+            <a:picLocks noChangeAspect="1"/>
+          </p:cNvPicPr>
+          <p:nvPr/>
+        </p:nvPicPr>
+        <p:blipFill>
+          <a:blip r:embed="rId3"/>
+          <a:stretch>
+            <a:fillRect/>
+          </a:stretch>
+        </p:blipFill>
+        <p:spPr>
+          <a:xfrm>
+            <a:off x="1323975" y="1813301"/>
+            <a:ext cx="6496050" cy="2362200"/>
+          </a:xfrm>
+          <a:prstGeom prst="rect">
+            <a:avLst/>
+          </a:prstGeom>
+        </p:spPr>
+      </p:pic>
+    </p:spTree>
+    <p:extLst>
+      <p:ext uri="{BB962C8B-B14F-4D97-AF65-F5344CB8AC3E}">
+        <p14:creationId xmlns:p14="http://schemas.microsoft.com/office/powerpoint/2010/main" val="3162328535"/>
+      </p:ext>
+    </p:extLst>
+  </p:cSld>
+  <p:clrMapOvr>
+    <a:masterClrMapping/>
+  </p:clrMapOvr>
+  <p:timing>
+    <p:tnLst>
+      <p:par>
+        <p:cTn id="1" dur="indefinite" restart="never" nodeType="tmRoot"/>
+      </p:par>
+    </p:tnLst>
+  </p:timing>
+</p:sld>
+</file>
+
+<file path=ppt/slides/slide6.xml><?xml version="1.0" encoding="utf-8"?>
+<p:sld xmlns:a="http://schemas.openxmlformats.org/drawingml/2006/main" xmlns:r="http://schemas.openxmlformats.org/officeDocument/2006/relationships" xmlns:p="http://schemas.openxmlformats.org/presentationml/2006/main">
+  <p:cSld>
+    <p:spTree>
+      <p:nvGrpSpPr>
+        <p:cNvPr id="1" name="Shape 102"/>
+        <p:cNvGrpSpPr/>
+        <p:nvPr/>
+      </p:nvGrpSpPr>
+      <p:grpSpPr>
+        <a:xfrm>
+          <a:off x="0" y="0"/>
+          <a:ext cx="0" cy="0"/>
+          <a:chOff x="0" y="0"/>
+          <a:chExt cx="0" cy="0"/>
+        </a:xfrm>
+      </p:grpSpPr>
+      <p:sp>
+        <p:nvSpPr>
+          <p:cNvPr id="103" name="Google Shape;103;p16"/>
+          <p:cNvSpPr txBox="1">
+            <a:spLocks noGrp="1"/>
+          </p:cNvSpPr>
+          <p:nvPr>
+            <p:ph type="title"/>
+          </p:nvPr>
+        </p:nvSpPr>
+        <p:spPr>
+          <a:xfrm>
+            <a:off x="0" y="3650"/>
+            <a:ext cx="9144000" cy="523232"/>
+          </a:xfrm>
+          <a:prstGeom prst="rect">
+            <a:avLst/>
+          </a:prstGeom>
+        </p:spPr>
+        <p:txBody>
+          <a:bodyPr spcFirstLastPara="1" wrap="square" lIns="91425" tIns="91425" rIns="91425" bIns="91425" anchor="t" anchorCtr="0">
+            <a:noAutofit/>
+          </a:bodyPr>
+          <a:lstStyle/>
+          <a:p>
+            <a:pPr algn="ctr"/>
+            <a:r>
+              <a:rPr lang="en-US" sz="2400" b="1" dirty="0" smtClean="0"/>
+              <a:t> </a:t>
+            </a:r>
+            <a:r>
+              <a:rPr lang="en-US" sz="2400" b="1" dirty="0"/>
+              <a:t>Evaluation Metrics for Classification Models</a:t>
+            </a:r>
+          </a:p>
+        </p:txBody>
+      </p:sp>
+      <p:sp>
+        <p:nvSpPr>
+          <p:cNvPr id="7" name="Google Shape;77;g258990b3369_0_16"/>
+          <p:cNvSpPr txBox="1">
+            <a:spLocks noGrp="1"/>
+          </p:cNvSpPr>
+          <p:nvPr>
+            <p:ph type="body" idx="1"/>
+          </p:nvPr>
+        </p:nvSpPr>
+        <p:spPr>
+          <a:xfrm>
+            <a:off x="201341" y="575087"/>
+            <a:ext cx="8650800" cy="3558374"/>
+          </a:xfrm>
+          <a:prstGeom prst="rect">
+            <a:avLst/>
+          </a:prstGeom>
+        </p:spPr>
+        <p:txBody>
+          <a:bodyPr spcFirstLastPara="1" wrap="square" lIns="91425" tIns="91425" rIns="91425" bIns="91425" anchor="t" anchorCtr="0">
+            <a:normAutofit/>
+          </a:bodyPr>
+          <a:lstStyle/>
+          <a:p>
+            <a:pPr marL="114300" indent="0">
+              <a:buNone/>
+            </a:pPr>
+            <a:r>
+              <a:rPr lang="en-US" b="1" dirty="0">
+                <a:solidFill>
+                  <a:schemeClr val="tx1"/>
+                </a:solidFill>
+              </a:rPr>
+              <a:t>When to Use Accuracy</a:t>
+            </a:r>
+            <a:endParaRPr lang="en-US" dirty="0">
+              <a:solidFill>
+                <a:schemeClr val="tx1"/>
+              </a:solidFill>
+            </a:endParaRPr>
+          </a:p>
+          <a:p>
+            <a:r>
+              <a:rPr lang="en-US" b="1" dirty="0">
+                <a:solidFill>
+                  <a:schemeClr val="tx1"/>
+                </a:solidFill>
+              </a:rPr>
+              <a:t>Balanced datasets</a:t>
+            </a:r>
+            <a:r>
+              <a:rPr lang="en-US" dirty="0">
+                <a:solidFill>
+                  <a:schemeClr val="tx1"/>
+                </a:solidFill>
+              </a:rPr>
+              <a:t>: When classes are roughly equal in size.</a:t>
+            </a:r>
+          </a:p>
+          <a:p>
+            <a:r>
+              <a:rPr lang="en-US" b="1" dirty="0">
+                <a:solidFill>
+                  <a:schemeClr val="tx1"/>
+                </a:solidFill>
+              </a:rPr>
+              <a:t>Simple benchmarks</a:t>
+            </a:r>
+            <a:r>
+              <a:rPr lang="en-US" dirty="0">
+                <a:solidFill>
+                  <a:schemeClr val="tx1"/>
+                </a:solidFill>
+              </a:rPr>
+              <a:t>: Quick evaluation of model performance</a:t>
+            </a:r>
+            <a:r>
+              <a:rPr lang="en-US" dirty="0" smtClean="0">
+                <a:solidFill>
+                  <a:schemeClr val="tx1"/>
+                </a:solidFill>
+              </a:rPr>
+              <a:t>.</a:t>
+            </a:r>
+          </a:p>
+          <a:p>
+            <a:pPr marL="114300" indent="0">
+              <a:buNone/>
+            </a:pPr>
+            <a:endParaRPr lang="en-US" dirty="0">
+              <a:solidFill>
+                <a:schemeClr val="tx1"/>
+              </a:solidFill>
+            </a:endParaRPr>
+          </a:p>
+          <a:p>
+            <a:pPr marL="114300" indent="0">
+              <a:buNone/>
+            </a:pPr>
+            <a:r>
+              <a:rPr lang="en-US" b="1" dirty="0">
+                <a:solidFill>
+                  <a:schemeClr val="tx1"/>
+                </a:solidFill>
+              </a:rPr>
+              <a:t>When to Avoid Accuracy</a:t>
+            </a:r>
+            <a:endParaRPr lang="en-US" dirty="0">
+              <a:solidFill>
+                <a:schemeClr val="tx1"/>
+              </a:solidFill>
+            </a:endParaRPr>
+          </a:p>
+          <a:p>
+            <a:r>
+              <a:rPr lang="en-US" b="1" dirty="0">
+                <a:solidFill>
+                  <a:schemeClr val="tx1"/>
+                </a:solidFill>
+              </a:rPr>
+              <a:t>Imbalanced datasets</a:t>
+            </a:r>
+            <a:r>
+              <a:rPr lang="en-US" dirty="0">
+                <a:solidFill>
+                  <a:schemeClr val="tx1"/>
+                </a:solidFill>
+              </a:rPr>
+              <a:t>: For example, if 95% of examples are negative, a model that always predicts negative will have 95% accuracy but is useless.</a:t>
+            </a:r>
+          </a:p>
+          <a:p>
+            <a:r>
+              <a:rPr lang="en-US" b="1" dirty="0">
+                <a:solidFill>
+                  <a:schemeClr val="tx1"/>
+                </a:solidFill>
+              </a:rPr>
+              <a:t>Cost-sensitive scenarios</a:t>
+            </a:r>
+            <a:r>
+              <a:rPr lang="en-US" dirty="0">
+                <a:solidFill>
+                  <a:schemeClr val="tx1"/>
+                </a:solidFill>
+              </a:rPr>
+              <a:t>: When false positives and false negatives have different consequences (e.g., medical testing).</a:t>
+            </a:r>
+          </a:p>
+        </p:txBody>
+      </p:sp>
+    </p:spTree>
+    <p:extLst>
+      <p:ext uri="{BB962C8B-B14F-4D97-AF65-F5344CB8AC3E}">
+        <p14:creationId xmlns:p14="http://schemas.microsoft.com/office/powerpoint/2010/main" val="730423470"/>
+      </p:ext>
+    </p:extLst>
+  </p:cSld>
+  <p:clrMapOvr>
+    <a:masterClrMapping/>
+  </p:clrMapOvr>
+  <p:timing>
+    <p:tnLst>
+      <p:par>
+        <p:cTn id="1" dur="indefinite" restart="never" nodeType="tmRoot"/>
+      </p:par>
+    </p:tnLst>
+  </p:timing>
+</p:sld>
+</file>
+
+<file path=ppt/slides/slide7.xml><?xml version="1.0" encoding="utf-8"?>
+<p:sld xmlns:a="http://schemas.openxmlformats.org/drawingml/2006/main" xmlns:r="http://schemas.openxmlformats.org/officeDocument/2006/relationships" xmlns:p="http://schemas.openxmlformats.org/presentationml/2006/main">
+  <p:cSld>
+    <p:spTree>
+      <p:nvGrpSpPr>
+        <p:cNvPr id="1" name="Shape 102"/>
+        <p:cNvGrpSpPr/>
+        <p:nvPr/>
+      </p:nvGrpSpPr>
+      <p:grpSpPr>
+        <a:xfrm>
+          <a:off x="0" y="0"/>
+          <a:ext cx="0" cy="0"/>
+          <a:chOff x="0" y="0"/>
+          <a:chExt cx="0" cy="0"/>
+        </a:xfrm>
+      </p:grpSpPr>
+      <p:sp>
+        <p:nvSpPr>
+          <p:cNvPr id="103" name="Google Shape;103;p16"/>
+          <p:cNvSpPr txBox="1">
+            <a:spLocks noGrp="1"/>
+          </p:cNvSpPr>
+          <p:nvPr>
+            <p:ph type="title"/>
+          </p:nvPr>
+        </p:nvSpPr>
+        <p:spPr>
+          <a:xfrm>
+            <a:off x="0" y="3650"/>
+            <a:ext cx="9144000" cy="523232"/>
+          </a:xfrm>
+          <a:prstGeom prst="rect">
+            <a:avLst/>
+          </a:prstGeom>
+        </p:spPr>
+        <p:txBody>
+          <a:bodyPr spcFirstLastPara="1" wrap="square" lIns="91425" tIns="91425" rIns="91425" bIns="91425" anchor="t" anchorCtr="0">
+            <a:noAutofit/>
+          </a:bodyPr>
+          <a:lstStyle/>
+          <a:p>
+            <a:pPr algn="ctr"/>
+            <a:r>
+              <a:rPr lang="en-US" sz="2400" b="1" dirty="0" smtClean="0"/>
+              <a:t> </a:t>
+            </a:r>
+            <a:r>
+              <a:rPr lang="en-US" sz="2400" b="1" dirty="0"/>
+              <a:t>Evaluation Metrics for Classification Models</a:t>
+            </a:r>
+          </a:p>
+        </p:txBody>
+      </p:sp>
+      <p:sp>
+        <p:nvSpPr>
+          <p:cNvPr id="7" name="Google Shape;77;g258990b3369_0_16"/>
+          <p:cNvSpPr txBox="1">
+            <a:spLocks noGrp="1"/>
+          </p:cNvSpPr>
+          <p:nvPr>
+            <p:ph type="body" idx="1"/>
+          </p:nvPr>
+        </p:nvSpPr>
+        <p:spPr>
+          <a:xfrm>
+            <a:off x="201341" y="575087"/>
+            <a:ext cx="8650800" cy="4192856"/>
+          </a:xfrm>
+          <a:prstGeom prst="rect">
+            <a:avLst/>
+          </a:prstGeom>
+        </p:spPr>
+        <p:txBody>
+          <a:bodyPr spcFirstLastPara="1" wrap="square" lIns="91425" tIns="91425" rIns="91425" bIns="91425" anchor="t" anchorCtr="0">
+            <a:normAutofit/>
+          </a:bodyPr>
+          <a:lstStyle/>
+          <a:p>
+            <a:pPr marL="114300" indent="0">
+              <a:buNone/>
+            </a:pPr>
+            <a:r>
+              <a:rPr lang="en-US" sz="2000" b="1" dirty="0" smtClean="0">
+                <a:solidFill>
+                  <a:schemeClr val="tx1"/>
+                </a:solidFill>
+              </a:rPr>
+              <a:t>Precision:</a:t>
+            </a:r>
+            <a:r>
+              <a:rPr lang="en-US" sz="2000" dirty="0" smtClean="0">
+                <a:solidFill>
+                  <a:schemeClr val="tx1"/>
+                </a:solidFill>
+              </a:rPr>
+              <a:t> </a:t>
+            </a:r>
+            <a:r>
+              <a:rPr lang="en-US" sz="2000" dirty="0">
+                <a:solidFill>
+                  <a:schemeClr val="tx1"/>
+                </a:solidFill>
+              </a:rPr>
+              <a:t>The ratio of true positives to the sum of true positives and false positives. It answers how many selected items are relevant</a:t>
+            </a:r>
+            <a:r>
+              <a:rPr lang="en-US" sz="2000" dirty="0" smtClean="0">
+                <a:solidFill>
+                  <a:schemeClr val="tx1"/>
+                </a:solidFill>
+              </a:rPr>
+              <a:t>.</a:t>
+            </a:r>
+          </a:p>
+          <a:p>
+            <a:pPr marL="114300" indent="0">
+              <a:buNone/>
+            </a:pPr>
+            <a:endParaRPr lang="en-US" sz="2000" dirty="0">
+              <a:solidFill>
+                <a:schemeClr val="tx1"/>
+              </a:solidFill>
+            </a:endParaRPr>
+          </a:p>
+          <a:p>
+            <a:pPr marL="114300" indent="0">
+              <a:buNone/>
+            </a:pPr>
+            <a:endParaRPr lang="en-US" sz="2000" dirty="0" smtClean="0">
+              <a:solidFill>
+                <a:schemeClr val="tx1"/>
+              </a:solidFill>
+            </a:endParaRPr>
+          </a:p>
+          <a:p>
+            <a:pPr marL="114300" indent="0">
+              <a:buNone/>
+            </a:pPr>
+            <a:endParaRPr lang="en-US" sz="2000" dirty="0">
+              <a:solidFill>
+                <a:schemeClr val="tx1"/>
+              </a:solidFill>
+            </a:endParaRPr>
+          </a:p>
+          <a:p>
+            <a:pPr marL="114300" indent="0">
+              <a:buNone/>
+            </a:pPr>
+            <a:endParaRPr lang="en-US" sz="2000" dirty="0" smtClean="0">
+              <a:solidFill>
+                <a:schemeClr val="tx1"/>
+              </a:solidFill>
+            </a:endParaRPr>
+          </a:p>
+          <a:p>
+            <a:pPr marL="114300" indent="0">
+              <a:buNone/>
+            </a:pPr>
+            <a:r>
+              <a:rPr lang="en-US" b="1" dirty="0">
+                <a:solidFill>
+                  <a:schemeClr val="tx1"/>
+                </a:solidFill>
+              </a:rPr>
+              <a:t>Interpretation</a:t>
+            </a:r>
+            <a:r>
+              <a:rPr lang="en-US" dirty="0">
+                <a:solidFill>
+                  <a:schemeClr val="tx1"/>
+                </a:solidFill>
+              </a:rPr>
+              <a:t>:</a:t>
+            </a:r>
+          </a:p>
+          <a:p>
+            <a:r>
+              <a:rPr lang="en-US" b="1" dirty="0">
+                <a:solidFill>
+                  <a:schemeClr val="tx1"/>
+                </a:solidFill>
+              </a:rPr>
+              <a:t>True Positives (TP):</a:t>
+            </a:r>
+            <a:r>
+              <a:rPr lang="en-US" dirty="0">
+                <a:solidFill>
+                  <a:schemeClr val="tx1"/>
+                </a:solidFill>
+              </a:rPr>
+              <a:t> Correctly predicted positive cases.</a:t>
+            </a:r>
+          </a:p>
+          <a:p>
+            <a:r>
+              <a:rPr lang="en-US" b="1" dirty="0">
+                <a:solidFill>
+                  <a:schemeClr val="tx1"/>
+                </a:solidFill>
+              </a:rPr>
+              <a:t>False Positives (FP):</a:t>
+            </a:r>
+            <a:r>
+              <a:rPr lang="en-US" dirty="0">
+                <a:solidFill>
+                  <a:schemeClr val="tx1"/>
+                </a:solidFill>
+              </a:rPr>
+              <a:t> Negative cases incorrectly predicted as positive (Type I Error).</a:t>
+            </a:r>
+          </a:p>
+          <a:p>
+            <a:r>
+              <a:rPr lang="en-US" b="1" dirty="0">
+                <a:solidFill>
+                  <a:schemeClr val="tx1"/>
+                </a:solidFill>
+              </a:rPr>
+              <a:t>Precision</a:t>
+            </a:r>
+            <a:r>
+              <a:rPr lang="en-US" dirty="0">
+                <a:solidFill>
+                  <a:schemeClr val="tx1"/>
+                </a:solidFill>
+              </a:rPr>
+              <a:t> answers:</a:t>
+            </a:r>
+            <a:br>
+              <a:rPr lang="en-US" dirty="0">
+                <a:solidFill>
+                  <a:schemeClr val="tx1"/>
+                </a:solidFill>
+              </a:rPr>
+            </a:br>
+            <a:r>
+              <a:rPr lang="en-US" i="1" dirty="0">
+                <a:solidFill>
+                  <a:schemeClr val="tx1"/>
+                </a:solidFill>
+              </a:rPr>
+              <a:t>"Of all the instances predicted as positive, how many are actually positive?"</a:t>
+            </a:r>
+            <a:endParaRPr lang="en-US" dirty="0">
+              <a:solidFill>
+                <a:schemeClr val="tx1"/>
+              </a:solidFill>
+            </a:endParaRPr>
+          </a:p>
+          <a:p>
+            <a:pPr marL="114300" indent="0">
+              <a:buNone/>
+            </a:pPr>
+            <a:endParaRPr lang="en-US" sz="2000" dirty="0" smtClean="0">
+              <a:solidFill>
+                <a:schemeClr val="tx1"/>
+              </a:solidFill>
+            </a:endParaRPr>
+          </a:p>
+          <a:p>
+            <a:pPr marL="114300" indent="0" algn="just">
+              <a:buNone/>
+            </a:pPr>
+            <a:endParaRPr lang="en-US" sz="2000" dirty="0">
+              <a:solidFill>
+                <a:schemeClr val="tx1"/>
+              </a:solidFill>
+            </a:endParaRPr>
+          </a:p>
+          <a:p>
+            <a:endParaRPr lang="en-US" sz="2000" dirty="0">
+              <a:solidFill>
+                <a:schemeClr val="tx1"/>
+              </a:solidFill>
+            </a:endParaRPr>
+          </a:p>
+          <a:p>
+            <a:pPr marL="114300" indent="0">
+              <a:buNone/>
+            </a:pPr>
+            <a:endParaRPr lang="en-US" sz="2000" dirty="0"/>
+          </a:p>
+        </p:txBody>
+      </p:sp>
+      <p:pic>
+        <p:nvPicPr>
+          <p:cNvPr id="2" name="Picture 1"/>
+          <p:cNvPicPr>
+            <a:picLocks noChangeAspect="1"/>
+          </p:cNvPicPr>
+          <p:nvPr/>
+        </p:nvPicPr>
+        <p:blipFill>
+          <a:blip r:embed="rId3"/>
+          <a:stretch>
+            <a:fillRect/>
+          </a:stretch>
+        </p:blipFill>
+        <p:spPr>
+          <a:xfrm>
+            <a:off x="1208032" y="1547565"/>
+            <a:ext cx="6286500" cy="1123950"/>
+          </a:xfrm>
+          <a:prstGeom prst="rect">
+            <a:avLst/>
+          </a:prstGeom>
+        </p:spPr>
+      </p:pic>
+    </p:spTree>
+    <p:extLst>
+      <p:ext uri="{BB962C8B-B14F-4D97-AF65-F5344CB8AC3E}">
+        <p14:creationId xmlns:p14="http://schemas.microsoft.com/office/powerpoint/2010/main" val="3491894492"/>
+      </p:ext>
+    </p:extLst>
+  </p:cSld>
+  <p:clrMapOvr>
+    <a:masterClrMapping/>
+  </p:clrMapOvr>
+  <p:timing>
+    <p:tnLst>
+      <p:par>
+        <p:cTn id="1" dur="indefinite" restart="never" nodeType="tmRoot"/>
+      </p:par>
+    </p:tnLst>
+  </p:timing>
+</p:sld>
+</file>
+
+<file path=ppt/slides/slide8.xml><?xml version="1.0" encoding="utf-8"?>
+<p:sld xmlns:a="http://schemas.openxmlformats.org/drawingml/2006/main" xmlns:r="http://schemas.openxmlformats.org/officeDocument/2006/relationships" xmlns:p="http://schemas.openxmlformats.org/presentationml/2006/main">
+  <p:cSld>
+    <p:spTree>
+      <p:nvGrpSpPr>
+        <p:cNvPr id="1" name="Shape 102"/>
+        <p:cNvGrpSpPr/>
+        <p:nvPr/>
+      </p:nvGrpSpPr>
+      <p:grpSpPr>
+        <a:xfrm>
+          <a:off x="0" y="0"/>
+          <a:ext cx="0" cy="0"/>
+          <a:chOff x="0" y="0"/>
+          <a:chExt cx="0" cy="0"/>
+        </a:xfrm>
+      </p:grpSpPr>
+      <p:sp>
+        <p:nvSpPr>
+          <p:cNvPr id="103" name="Google Shape;103;p16"/>
+          <p:cNvSpPr txBox="1">
+            <a:spLocks noGrp="1"/>
+          </p:cNvSpPr>
+          <p:nvPr>
+            <p:ph type="title"/>
+          </p:nvPr>
+        </p:nvSpPr>
+        <p:spPr>
+          <a:xfrm>
+            <a:off x="0" y="3650"/>
+            <a:ext cx="9144000" cy="523232"/>
+          </a:xfrm>
+          <a:prstGeom prst="rect">
+            <a:avLst/>
+          </a:prstGeom>
+        </p:spPr>
+        <p:txBody>
+          <a:bodyPr spcFirstLastPara="1" wrap="square" lIns="91425" tIns="91425" rIns="91425" bIns="91425" anchor="t" anchorCtr="0">
+            <a:noAutofit/>
+          </a:bodyPr>
+          <a:lstStyle/>
+          <a:p>
+            <a:pPr algn="ctr"/>
+            <a:r>
+              <a:rPr lang="en-US" sz="2400" b="1" dirty="0" smtClean="0"/>
+              <a:t> </a:t>
+            </a:r>
+            <a:r>
+              <a:rPr lang="en-US" sz="2400" b="1" dirty="0"/>
+              <a:t>Evaluation Metrics for Classification Models</a:t>
+            </a:r>
+          </a:p>
+        </p:txBody>
+      </p:sp>
+      <p:sp>
+        <p:nvSpPr>
+          <p:cNvPr id="7" name="Google Shape;77;g258990b3369_0_16"/>
+          <p:cNvSpPr txBox="1">
+            <a:spLocks noGrp="1"/>
+          </p:cNvSpPr>
+          <p:nvPr>
+            <p:ph type="body" idx="1"/>
+          </p:nvPr>
+        </p:nvSpPr>
+        <p:spPr>
+          <a:xfrm>
+            <a:off x="201341" y="575087"/>
+            <a:ext cx="8650800" cy="4192856"/>
+          </a:xfrm>
+          <a:prstGeom prst="rect">
+            <a:avLst/>
+          </a:prstGeom>
+        </p:spPr>
+        <p:txBody>
+          <a:bodyPr spcFirstLastPara="1" wrap="square" lIns="91425" tIns="91425" rIns="91425" bIns="91425" anchor="t" anchorCtr="0">
+            <a:normAutofit/>
+          </a:bodyPr>
+          <a:lstStyle/>
+          <a:p>
+            <a:pPr marL="114300" indent="0" algn="just">
+              <a:buNone/>
+            </a:pPr>
+            <a:r>
+              <a:rPr lang="en-US" sz="2000" b="1" dirty="0" smtClean="0">
+                <a:solidFill>
+                  <a:schemeClr val="tx1"/>
+                </a:solidFill>
+              </a:rPr>
+              <a:t>Recall:</a:t>
+            </a:r>
+            <a:r>
+              <a:rPr lang="en-US" sz="2000" dirty="0">
+                <a:solidFill>
+                  <a:schemeClr val="tx1"/>
+                </a:solidFill>
+              </a:rPr>
+              <a:t> The ratio of true positives to the sum of true positives and false negatives. It answers how many relevant items are selected.</a:t>
+            </a:r>
+          </a:p>
+          <a:p>
+            <a:pPr marL="114300" indent="0">
+              <a:buNone/>
+            </a:pPr>
+            <a:endParaRPr lang="en-US" sz="2000" dirty="0">
+              <a:solidFill>
+                <a:schemeClr val="tx1"/>
+              </a:solidFill>
+            </a:endParaRPr>
+          </a:p>
+          <a:p>
+            <a:pPr marL="114300" indent="0">
+              <a:buNone/>
+            </a:pPr>
+            <a:endParaRPr lang="en-US" sz="2000" dirty="0" smtClean="0">
+              <a:solidFill>
+                <a:schemeClr val="tx1"/>
+              </a:solidFill>
+            </a:endParaRPr>
+          </a:p>
+          <a:p>
+            <a:pPr marL="114300" indent="0">
+              <a:buNone/>
+            </a:pPr>
+            <a:endParaRPr lang="en-US" sz="2000" dirty="0">
+              <a:solidFill>
+                <a:schemeClr val="tx1"/>
+              </a:solidFill>
+            </a:endParaRPr>
+          </a:p>
+          <a:p>
+            <a:pPr marL="114300" indent="0">
+              <a:buNone/>
+            </a:pPr>
+            <a:endParaRPr lang="en-US" b="1" dirty="0" smtClean="0">
+              <a:solidFill>
+                <a:schemeClr val="tx1"/>
+              </a:solidFill>
+            </a:endParaRPr>
+          </a:p>
+          <a:p>
+            <a:pPr marL="114300" indent="0">
+              <a:buNone/>
+            </a:pPr>
+            <a:r>
+              <a:rPr lang="en-US" b="1" dirty="0" smtClean="0">
+                <a:solidFill>
+                  <a:schemeClr val="tx1"/>
+                </a:solidFill>
+              </a:rPr>
+              <a:t>Interpretation</a:t>
+            </a:r>
+            <a:endParaRPr lang="en-US" dirty="0">
+              <a:solidFill>
+                <a:schemeClr val="tx1"/>
+              </a:solidFill>
+            </a:endParaRPr>
+          </a:p>
+          <a:p>
+            <a:r>
+              <a:rPr lang="en-US" b="1" dirty="0">
+                <a:solidFill>
+                  <a:schemeClr val="tx1"/>
+                </a:solidFill>
+              </a:rPr>
+              <a:t>True Positives (TP):</a:t>
+            </a:r>
+            <a:r>
+              <a:rPr lang="en-US" dirty="0">
+                <a:solidFill>
+                  <a:schemeClr val="tx1"/>
+                </a:solidFill>
+              </a:rPr>
+              <a:t> Correctly predicted positive cases.</a:t>
+            </a:r>
+          </a:p>
+          <a:p>
+            <a:r>
+              <a:rPr lang="en-US" b="1" dirty="0">
+                <a:solidFill>
+                  <a:schemeClr val="tx1"/>
+                </a:solidFill>
+              </a:rPr>
+              <a:t>False Negatives (FN):</a:t>
+            </a:r>
+            <a:r>
+              <a:rPr lang="en-US" dirty="0">
+                <a:solidFill>
+                  <a:schemeClr val="tx1"/>
+                </a:solidFill>
+              </a:rPr>
+              <a:t> Positive cases incorrectly predicted as negative (Type II Error).</a:t>
+            </a:r>
+          </a:p>
+          <a:p>
+            <a:r>
+              <a:rPr lang="en-US" b="1" dirty="0">
+                <a:solidFill>
+                  <a:schemeClr val="tx1"/>
+                </a:solidFill>
+              </a:rPr>
+              <a:t>Recall</a:t>
+            </a:r>
+            <a:r>
+              <a:rPr lang="en-US" dirty="0">
+                <a:solidFill>
+                  <a:schemeClr val="tx1"/>
+                </a:solidFill>
+              </a:rPr>
+              <a:t> answers:</a:t>
+            </a:r>
+            <a:br>
+              <a:rPr lang="en-US" dirty="0">
+                <a:solidFill>
+                  <a:schemeClr val="tx1"/>
+                </a:solidFill>
+              </a:rPr>
+            </a:br>
+            <a:r>
+              <a:rPr lang="en-US" i="1" dirty="0">
+                <a:solidFill>
+                  <a:schemeClr val="tx1"/>
+                </a:solidFill>
+              </a:rPr>
+              <a:t>"Of all the actual positive instances, how many did we correctly predict?"</a:t>
+            </a:r>
+            <a:endParaRPr lang="en-US" dirty="0">
+              <a:solidFill>
+                <a:schemeClr val="tx1"/>
+              </a:solidFill>
+            </a:endParaRPr>
+          </a:p>
+          <a:p>
+            <a:pPr marL="114300" indent="0">
+              <a:buNone/>
+            </a:pPr>
+            <a:endParaRPr lang="en-US" sz="2000" dirty="0" smtClean="0">
+              <a:solidFill>
+                <a:schemeClr val="tx1"/>
+              </a:solidFill>
+            </a:endParaRPr>
+          </a:p>
+          <a:p>
+            <a:pPr marL="114300" indent="0" algn="just">
+              <a:buNone/>
+            </a:pPr>
+            <a:endParaRPr lang="en-US" sz="2000" dirty="0">
+              <a:solidFill>
+                <a:schemeClr val="tx1"/>
+              </a:solidFill>
+            </a:endParaRPr>
+          </a:p>
+          <a:p>
+            <a:endParaRPr lang="en-US" sz="2000" dirty="0">
+              <a:solidFill>
+                <a:schemeClr val="tx1"/>
+              </a:solidFill>
+            </a:endParaRPr>
+          </a:p>
+          <a:p>
+            <a:pPr marL="114300" indent="0">
+              <a:buNone/>
+            </a:pPr>
+            <a:endParaRPr lang="en-US" sz="2000" dirty="0"/>
+          </a:p>
+        </p:txBody>
+      </p:sp>
+      <p:pic>
+        <p:nvPicPr>
+          <p:cNvPr id="3" name="Picture 2"/>
+          <p:cNvPicPr>
+            <a:picLocks noChangeAspect="1"/>
+          </p:cNvPicPr>
+          <p:nvPr/>
+        </p:nvPicPr>
+        <p:blipFill>
+          <a:blip r:embed="rId3"/>
+          <a:stretch>
+            <a:fillRect/>
+          </a:stretch>
+        </p:blipFill>
+        <p:spPr>
+          <a:xfrm>
+            <a:off x="1559703" y="1540422"/>
+            <a:ext cx="5934075" cy="990600"/>
+          </a:xfrm>
+          <a:prstGeom prst="rect">
+            <a:avLst/>
+          </a:prstGeom>
+        </p:spPr>
+      </p:pic>
+    </p:spTree>
+    <p:extLst>
+      <p:ext uri="{BB962C8B-B14F-4D97-AF65-F5344CB8AC3E}">
+        <p14:creationId xmlns:p14="http://schemas.microsoft.com/office/powerpoint/2010/main" val="3594793725"/>
+      </p:ext>
+    </p:extLst>
+  </p:cSld>
+  <p:clrMapOvr>
+    <a:masterClrMapping/>
+  </p:clrMapOvr>
+  <p:timing>
+    <p:tnLst>
+      <p:par>
+        <p:cTn id="1" dur="indefinite" restart="never" nodeType="tmRoot"/>
+      </p:par>
+    </p:tnLst>
+  </p:timing>
+</p:sld>
+</file>
+
+<file path=ppt/slides/slide9.xml><?xml version="1.0" encoding="utf-8"?>
+<p:sld xmlns:a="http://schemas.openxmlformats.org/drawingml/2006/main" xmlns:r="http://schemas.openxmlformats.org/officeDocument/2006/relationships" xmlns:p="http://schemas.openxmlformats.org/presentationml/2006/main">
+  <p:cSld>
+    <p:spTree>
+      <p:nvGrpSpPr>
+        <p:cNvPr id="1" name="Shape 102"/>
+        <p:cNvGrpSpPr/>
+        <p:nvPr/>
+      </p:nvGrpSpPr>
+      <p:grpSpPr>
+        <a:xfrm>
+          <a:off x="0" y="0"/>
+          <a:ext cx="0" cy="0"/>
+          <a:chOff x="0" y="0"/>
+          <a:chExt cx="0" cy="0"/>
+        </a:xfrm>
+      </p:grpSpPr>
+      <p:sp>
+        <p:nvSpPr>
+          <p:cNvPr id="103" name="Google Shape;103;p16"/>
+          <p:cNvSpPr txBox="1">
+            <a:spLocks noGrp="1"/>
+          </p:cNvSpPr>
+          <p:nvPr>
+            <p:ph type="title"/>
+          </p:nvPr>
+        </p:nvSpPr>
+        <p:spPr>
+          <a:xfrm>
+            <a:off x="0" y="3650"/>
+            <a:ext cx="9144000" cy="523232"/>
+          </a:xfrm>
+          <a:prstGeom prst="rect">
+            <a:avLst/>
+          </a:prstGeom>
+        </p:spPr>
+        <p:txBody>
+          <a:bodyPr spcFirstLastPara="1" wrap="square" lIns="91425" tIns="91425" rIns="91425" bIns="91425" anchor="t" anchorCtr="0">
+            <a:noAutofit/>
+          </a:bodyPr>
+          <a:lstStyle/>
+          <a:p>
+            <a:pPr algn="ctr"/>
+            <a:r>
+              <a:rPr lang="en-US" sz="2400" b="1" dirty="0" smtClean="0"/>
+              <a:t> </a:t>
+            </a:r>
+            <a:r>
+              <a:rPr lang="en-US" sz="2400" b="1" dirty="0"/>
+              <a:t>Evaluation Metrics for Classification Models</a:t>
+            </a:r>
+          </a:p>
+        </p:txBody>
+      </p:sp>
+      <p:sp>
+        <p:nvSpPr>
+          <p:cNvPr id="7" name="Google Shape;77;g258990b3369_0_16"/>
+          <p:cNvSpPr txBox="1">
+            <a:spLocks noGrp="1"/>
+          </p:cNvSpPr>
+          <p:nvPr>
+            <p:ph type="body" idx="1"/>
+          </p:nvPr>
+        </p:nvSpPr>
+        <p:spPr>
+          <a:xfrm>
+            <a:off x="201341" y="575087"/>
+            <a:ext cx="8650800" cy="4192856"/>
+          </a:xfrm>
+          <a:prstGeom prst="rect">
+            <a:avLst/>
+          </a:prstGeom>
+        </p:spPr>
+        <p:txBody>
+          <a:bodyPr spcFirstLastPara="1" wrap="square" lIns="91425" tIns="91425" rIns="91425" bIns="91425" anchor="t" anchorCtr="0">
+            <a:normAutofit/>
+          </a:bodyPr>
+          <a:lstStyle/>
+          <a:p>
+            <a:pPr marL="114300" indent="0" algn="just">
+              <a:buNone/>
+            </a:pPr>
+            <a:r>
+              <a:rPr lang="en-US" sz="2000" b="1" dirty="0" smtClean="0">
+                <a:solidFill>
+                  <a:schemeClr val="tx1"/>
+                </a:solidFill>
+              </a:rPr>
+              <a:t>F1 Score:</a:t>
+            </a:r>
+            <a:r>
+              <a:rPr lang="en-US" sz="2000" dirty="0" smtClean="0">
+                <a:solidFill>
+                  <a:schemeClr val="tx1"/>
+                </a:solidFill>
+              </a:rPr>
+              <a:t> </a:t>
+            </a:r>
+            <a:r>
+              <a:rPr lang="en-US" sz="2000" dirty="0">
+                <a:solidFill>
+                  <a:schemeClr val="tx1"/>
+                </a:solidFill>
+              </a:rPr>
+              <a:t>The harmonic mean of precision and recall. It balances precision and recall.</a:t>
+            </a:r>
+          </a:p>
+          <a:p>
+            <a:pPr marL="114300" indent="0">
+              <a:buNone/>
+            </a:pPr>
+            <a:endParaRPr lang="en-US" sz="2000" dirty="0" smtClean="0">
+              <a:solidFill>
+                <a:schemeClr val="tx1"/>
+              </a:solidFill>
+            </a:endParaRPr>
+          </a:p>
+          <a:p>
+            <a:pPr marL="114300" indent="0">
+              <a:buNone/>
+            </a:pPr>
+            <a:endParaRPr lang="en-US" sz="2000" dirty="0" smtClean="0">
+              <a:solidFill>
+                <a:schemeClr val="tx1"/>
+              </a:solidFill>
+            </a:endParaRPr>
+          </a:p>
+          <a:p>
+            <a:pPr marL="114300" indent="0">
+              <a:buNone/>
+            </a:pPr>
+            <a:endParaRPr lang="en-US" sz="2000" dirty="0">
+              <a:solidFill>
+                <a:schemeClr val="tx1"/>
+              </a:solidFill>
+            </a:endParaRPr>
+          </a:p>
+          <a:p>
+            <a:pPr marL="114300" indent="0">
+              <a:buNone/>
+            </a:pPr>
+            <a:endParaRPr lang="en-US" b="1" dirty="0" smtClean="0">
+              <a:solidFill>
+                <a:schemeClr val="tx1"/>
+              </a:solidFill>
+            </a:endParaRPr>
+          </a:p>
+          <a:p>
+            <a:pPr marL="114300" indent="0">
+              <a:buNone/>
+            </a:pPr>
+            <a:r>
+              <a:rPr lang="en-US" b="1" dirty="0">
+                <a:solidFill>
+                  <a:schemeClr val="tx1"/>
+                </a:solidFill>
+              </a:rPr>
+              <a:t>Interpretation</a:t>
+            </a:r>
+            <a:endParaRPr lang="en-US" dirty="0">
+              <a:solidFill>
+                <a:schemeClr val="tx1"/>
+              </a:solidFill>
+            </a:endParaRPr>
+          </a:p>
+          <a:p>
+            <a:r>
+              <a:rPr lang="en-US" b="1" dirty="0">
+                <a:solidFill>
+                  <a:schemeClr val="tx1"/>
+                </a:solidFill>
+              </a:rPr>
+              <a:t>Balances Precision and Recall</a:t>
+            </a:r>
+            <a:r>
+              <a:rPr lang="en-US" dirty="0">
+                <a:solidFill>
+                  <a:schemeClr val="tx1"/>
+                </a:solidFill>
+              </a:rPr>
+              <a:t>: Harmonic mean (punishes extreme values more than arithmetic mean).</a:t>
+            </a:r>
+          </a:p>
+          <a:p>
+            <a:r>
+              <a:rPr lang="en-US" b="1" dirty="0">
+                <a:solidFill>
+                  <a:schemeClr val="tx1"/>
+                </a:solidFill>
+              </a:rPr>
+              <a:t>Range</a:t>
+            </a:r>
+            <a:r>
+              <a:rPr lang="en-US" dirty="0">
+                <a:solidFill>
+                  <a:schemeClr val="tx1"/>
+                </a:solidFill>
+              </a:rPr>
+              <a:t>: 0 (worst) to 1 (best).</a:t>
+            </a:r>
+          </a:p>
+          <a:p>
+            <a:r>
+              <a:rPr lang="en-US" b="1" dirty="0">
+                <a:solidFill>
+                  <a:schemeClr val="tx1"/>
+                </a:solidFill>
+              </a:rPr>
+              <a:t>Answers</a:t>
+            </a:r>
+            <a:r>
+              <a:rPr lang="en-US" dirty="0">
+                <a:solidFill>
+                  <a:schemeClr val="tx1"/>
+                </a:solidFill>
+              </a:rPr>
+              <a:t>:</a:t>
+            </a:r>
+            <a:br>
+              <a:rPr lang="en-US" dirty="0">
+                <a:solidFill>
+                  <a:schemeClr val="tx1"/>
+                </a:solidFill>
+              </a:rPr>
+            </a:br>
+            <a:r>
+              <a:rPr lang="en-US" i="1" dirty="0">
+                <a:solidFill>
+                  <a:schemeClr val="tx1"/>
+                </a:solidFill>
+              </a:rPr>
+              <a:t>"What is the tradeoff between precision and recall?"</a:t>
+            </a:r>
+            <a:endParaRPr lang="en-US" dirty="0">
+              <a:solidFill>
+                <a:schemeClr val="tx1"/>
+              </a:solidFill>
+            </a:endParaRPr>
+          </a:p>
+          <a:p>
+            <a:pPr marL="114300" indent="0">
+              <a:buNone/>
+            </a:pPr>
+            <a:endParaRPr lang="en-US" sz="2000" dirty="0" smtClean="0">
+              <a:solidFill>
+                <a:schemeClr val="tx1"/>
+              </a:solidFill>
+            </a:endParaRPr>
+          </a:p>
+          <a:p>
+            <a:pPr marL="114300" indent="0" algn="just">
+              <a:buNone/>
+            </a:pPr>
+            <a:endParaRPr lang="en-US" sz="2000" dirty="0">
+              <a:solidFill>
+                <a:schemeClr val="tx1"/>
+              </a:solidFill>
+            </a:endParaRPr>
+          </a:p>
+          <a:p>
+            <a:endParaRPr lang="en-US" sz="2000" dirty="0">
+              <a:solidFill>
+                <a:schemeClr val="tx1"/>
+              </a:solidFill>
+            </a:endParaRPr>
+          </a:p>
+          <a:p>
+            <a:pPr marL="114300" indent="0">
+              <a:buNone/>
+            </a:pPr>
+            <a:endParaRPr lang="en-US" sz="2000" dirty="0"/>
+          </a:p>
+        </p:txBody>
+      </p:sp>
+      <p:pic>
+        <p:nvPicPr>
+          <p:cNvPr id="2" name="Picture 1"/>
+          <p:cNvPicPr>
+            <a:picLocks noChangeAspect="1"/>
+          </p:cNvPicPr>
+          <p:nvPr/>
+        </p:nvPicPr>
+        <p:blipFill>
+          <a:blip r:embed="rId3"/>
+          <a:stretch>
+            <a:fillRect/>
+          </a:stretch>
+        </p:blipFill>
+        <p:spPr>
+          <a:xfrm>
+            <a:off x="1750203" y="1528927"/>
+            <a:ext cx="5553075" cy="971550"/>
+          </a:xfrm>
+          <a:prstGeom prst="rect">
+            <a:avLst/>
+          </a:prstGeom>
+        </p:spPr>
+      </p:pic>
+    </p:spTree>
+    <p:extLst>
+      <p:ext uri="{BB962C8B-B14F-4D97-AF65-F5344CB8AC3E}">
+        <p14:creationId xmlns:p14="http://schemas.microsoft.com/office/powerpoint/2010/main" val="2360432693"/>
+      </p:ext>
+    </p:extLst>
+  </p:cSld>
+  <p:clrMapOvr>
+    <a:masterClrMapping/>
+  </p:clrMapOvr>
+  <p:timing>
+    <p:tnLst>
+      <p:par>
+        <p:cTn id="1" dur="indefinite" restart="never" nodeType="tmRoot"/>
+      </p:par>
+    </p:tnLst>
+  </p:timing>
 </p:sld>
 </file>
 
